--- a/UNT/dark_factory.pptx
+++ b/UNT/dark_factory.pptx
@@ -11,6 +11,7 @@
     <p:sldId id="256" r:id="rId2"/>
     <p:sldId id="282" r:id="rId3"/>
     <p:sldId id="269" r:id="rId4"/>
+    <p:sldId id="337" r:id="rId65"/>
     <p:sldId id="336" r:id="rId5"/>
     <p:sldId id="284" r:id="rId6"/>
     <p:sldId id="285" r:id="rId7"/>
@@ -4709,6 +4710,81 @@
 </p:notes>
 </file>
 
+<file path=ppt/notesSlides/notesSlide57.xml><?xml version="1.0" encoding="utf-8"?>
+<p:notes xmlns:a="http://schemas.openxmlformats.org/drawingml/2006/main" xmlns:p="http://schemas.openxmlformats.org/presentationml/2006/main" xmlns:r="http://schemas.openxmlformats.org/officeDocument/2006/relationships">
+  <p:cSld>
+    <p:spTree>
+      <p:nvGrpSpPr>
+        <p:cNvPr id="1" name=""/>
+        <p:cNvGrpSpPr/>
+        <p:nvPr/>
+      </p:nvGrpSpPr>
+      <p:grpSpPr>
+        <a:xfrm>
+          <a:off x="0" y="0"/>
+          <a:ext cx="0" cy="0"/>
+          <a:chOff x="0" y="0"/>
+          <a:chExt cx="0" cy="0"/>
+        </a:xfrm>
+      </p:grpSpPr>
+      <p:sp>
+        <p:nvSpPr>
+          <p:cNvPr id="2" name="Slide Image Placeholder 1"/>
+          <p:cNvSpPr>
+            <a:spLocks noGrp="1"/>
+          </p:cNvSpPr>
+          <p:nvPr>
+            <p:ph type="sldImg" idx="2"/>
+          </p:nvPr>
+        </p:nvSpPr>
+        <p:spPr/>
+      </p:sp>
+      <p:sp>
+        <p:nvSpPr>
+          <p:cNvPr id="3" name="Notes Placeholder 2"/>
+          <p:cNvSpPr>
+            <a:spLocks noGrp="1"/>
+          </p:cNvSpPr>
+          <p:nvPr>
+            <p:ph type="body" idx="3" sz="quarter"/>
+          </p:nvPr>
+        </p:nvSpPr>
+        <p:spPr/>
+        <p:txBody>
+          <a:bodyPr/>
+          <a:lstStyle/>
+          <a:p>
+            <a:r>
+              <a:t>Set expectations up front: no predictions here, just current state.</a:t>
+            </a:r>
+          </a:p>
+          <a:p>
+            <a:r>
+              <a:t>Everything after this is descriptive, not prescriptive of the future.</a:t>
+            </a:r>
+          </a:p>
+        </p:txBody>
+      </p:sp>
+      <p:sp>
+        <p:nvSpPr>
+          <p:cNvPr id="4" name="Slide Number Placeholder 3"/>
+          <p:cNvSpPr>
+            <a:spLocks noGrp="1"/>
+          </p:cNvSpPr>
+          <p:nvPr>
+            <p:ph type="sldNum" idx="5" sz="quarter"/>
+          </p:nvPr>
+        </p:nvSpPr>
+        <p:spPr/>
+      </p:sp>
+    </p:spTree>
+  </p:cSld>
+  <p:clrMapOvr>
+    <a:masterClrMapping/>
+  </p:clrMapOvr>
+</p:notes>
+</file>
+
 <file path=ppt/notesSlides/notesSlide6.xml><?xml version="1.0" encoding="utf-8"?>
 <p:notes xmlns:a="http://schemas.openxmlformats.org/drawingml/2006/main" xmlns:r="http://schemas.openxmlformats.org/officeDocument/2006/relationships" xmlns:p="http://schemas.openxmlformats.org/presentationml/2006/main">
   <p:cSld>
@@ -13295,6 +13371,81 @@
         <p14:creationId xmlns:p14="http://schemas.microsoft.com/office/powerpoint/2010/main" val="2161850691"/>
       </p:ext>
     </p:extLst>
+  </p:cSld>
+  <p:clrMapOvr>
+    <a:masterClrMapping/>
+  </p:clrMapOvr>
+</p:sld>
+</file>
+
+<file path=ppt/slides/slide57.xml><?xml version="1.0" encoding="utf-8"?>
+<p:sld xmlns:a="http://schemas.openxmlformats.org/drawingml/2006/main" xmlns:p="http://schemas.openxmlformats.org/presentationml/2006/main" xmlns:r="http://schemas.openxmlformats.org/officeDocument/2006/relationships">
+  <p:cSld>
+    <p:spTree>
+      <p:nvGrpSpPr>
+        <p:cNvPr id="1" name=""/>
+        <p:cNvGrpSpPr/>
+        <p:nvPr/>
+      </p:nvGrpSpPr>
+      <p:grpSpPr/>
+      <p:sp>
+        <p:nvSpPr>
+          <p:cNvPr id="2" name="Text Placeholder 1"/>
+          <p:cNvSpPr>
+            <a:spLocks noGrp="1"/>
+          </p:cNvSpPr>
+          <p:nvPr>
+            <p:ph type="body" idx="11" sz="quarter"/>
+          </p:nvPr>
+        </p:nvSpPr>
+        <p:spPr/>
+        <p:txBody>
+          <a:bodyPr/>
+          <a:lstStyle/>
+          <a:p>
+            <a:r>
+              <a:t>Not a fortune teller — no crystal ball here</a:t>
+            </a:r>
+          </a:p>
+          <a:p>
+            <a:r>
+              <a:t>This talk shows what's happening now, not what's coming next</a:t>
+            </a:r>
+          </a:p>
+          <a:p>
+            <a:r>
+              <a:t>Every stat and framework is a snapshot, not a prophecy</a:t>
+            </a:r>
+          </a:p>
+          <a:p>
+            <a:r>
+              <a:t>“Why now” means as of today, not a forecast</a:t>
+            </a:r>
+          </a:p>
+        </p:txBody>
+      </p:sp>
+      <p:sp>
+        <p:nvSpPr>
+          <p:cNvPr id="3" name="Title 2"/>
+          <p:cNvSpPr>
+            <a:spLocks noGrp="1"/>
+          </p:cNvSpPr>
+          <p:nvPr>
+            <p:ph type="title"/>
+          </p:nvPr>
+        </p:nvSpPr>
+        <p:spPr/>
+        <p:txBody>
+          <a:bodyPr/>
+          <a:lstStyle/>
+          <a:p>
+            <a:r>
+              <a:t>No Crystal Ball</a:t>
+            </a:r>
+          </a:p>
+        </p:txBody>
+      </p:sp>
+    </p:spTree>
   </p:cSld>
   <p:clrMapOvr>
     <a:masterClrMapping/>

--- a/UNT/dark_factory.pptx
+++ b/UNT/dark_factory.pptx
@@ -958,6 +958,11 @@
               <a:t>Mutation testing is the check — deliberately break the code, confirm the test suite notices.</a:t>
             </a:r>
           </a:p>
+          <a:p>
+            <a:r>
+              <a:t>It's the classic take-home-exam move — grade your own answer key, and you'll find you did great.</a:t>
+            </a:r>
+          </a:p>
         </p:txBody>
       </p:sp>
       <p:sp>
@@ -1246,6 +1251,11 @@
           <a:p>
             <a:r>
               <a:t>Escaped defect rate is probably the single most honest one.</a:t>
+            </a:r>
+          </a:p>
+          <a:p>
+            <a:r>
+              <a:t>Coverage percentage is the GPA of guardrail metrics — easy to inflate, and it tells you almost nothing about whether anyone actually learned anything.</a:t>
             </a:r>
           </a:p>
         </p:txBody>
@@ -1709,6 +1719,11 @@
               <a:t>Mirrors separation-of-duties in any regulated workflow.</a:t>
             </a:r>
           </a:p>
+          <a:p>
+            <a:r>
+              <a:t>One agent doing planning and execution is the corporate equivalent of letting the intern also be their own manager and HR department.</a:t>
+            </a:r>
+          </a:p>
         </p:txBody>
       </p:sp>
       <p:sp>
@@ -2169,6 +2184,11 @@
               <a:t>IaC = Infrastructure as Code — infrastructure defined and provisioned through version-controlled code rather than manual configuration.</a:t>
             </a:r>
           </a:p>
+          <a:p>
+            <a:r>
+              <a:t>Kubernetes operators and production IaC sitting in the unsafe quadrant should worry you exactly as much as it worries me, which is a lot.</a:t>
+            </a:r>
+          </a:p>
         </p:txBody>
       </p:sp>
       <p:sp>
@@ -2529,6 +2549,11 @@
               <a:t>Root cause usually lives in the plan, not the generated code, which is why you log the plan, not just the diff.</a:t>
             </a:r>
           </a:p>
+          <a:p>
+            <a:r>
+              <a:t>Root cause usually lives in the plan — which is inconveniently the one artifact everyone is least eager to log, since it's the part that reveals whose idea this actually was.</a:t>
+            </a:r>
+          </a:p>
         </p:txBody>
       </p:sp>
       <p:sp>
@@ -2779,6 +2804,11 @@
               <a:t>SSRF stands for Server-Side Request Forgery.</a:t>
             </a:r>
           </a:p>
+          <a:p>
+            <a:r>
+              <a:t>Forty-eight steps is either an impressively autonomous attack chain or the most patient debugging session on record — depends entirely which side of it you're standing on.</a:t>
+            </a:r>
+          </a:p>
         </p:txBody>
       </p:sp>
       <p:sp>
@@ -3072,6 +3102,11 @@
           <a:p>
             <a:r>
               <a:t>Rotate on principle, not just on suspicion.</a:t>
+            </a:r>
+          </a:p>
+          <a:p>
+            <a:r>
+              <a:t>Rotate anything an agent has ever seen — treat its context window like a group chat where someone might forward a screenshot.</a:t>
             </a:r>
           </a:p>
         </p:txBody>
@@ -3463,6 +3498,11 @@
               <a:t>Speaking directly to the room here — this is what to listen for in an interview, and what burnout looks like from outside a team before you're in it.</a:t>
             </a:r>
           </a:p>
+          <a:p>
+            <a:r>
+              <a:t>High-vigilance, low-authorship is also the technical definition of being a TSA agent for pull requests.</a:t>
+            </a:r>
+          </a:p>
         </p:txBody>
       </p:sp>
       <p:sp>
@@ -3768,6 +3808,11 @@
               <a:t>Gartner is a major IT research and advisory firm.</a:t>
             </a:r>
           </a:p>
+          <a:p>
+            <a:r>
+              <a:t>So the slick agent demo in that vendor meeting had, at best, a one-in-eight shot of ever meeting a real user.</a:t>
+            </a:r>
+          </a:p>
         </p:txBody>
       </p:sp>
       <p:sp>
@@ -3923,6 +3968,11 @@
               <a:t>Layoffs.fyi is a crowdsourced tracker of tech layoffs.</a:t>
             </a:r>
           </a:p>
+          <a:p>
+            <a:r>
+              <a:t>Nothing says 'efficiency gains' quite like cutting the headcount and then quietly rehiring a third of it back — apparently the AI needed fewer humans, just not zero.</a:t>
+            </a:r>
+          </a:p>
         </p:txBody>
       </p:sp>
       <p:sp>
@@ -4083,6 +4133,11 @@
               <a:t>RCT: randomized controlled trial — developers randomly split into AI-assisted vs. not, to isolate the effect.</a:t>
             </a:r>
           </a:p>
+          <a:p>
+            <a:r>
+              <a:t>This is the one slide in the whole deck where being confidently wrong about your own productivity is itself the headline finding.</a:t>
+            </a:r>
+          </a:p>
         </p:txBody>
       </p:sp>
       <p:sp>
@@ -4158,6 +4213,11 @@
               <a:t>METR (Model Evaluation and Threat Research) tracks this publicly; it's the best predictor of what an agent can be trusted with.</a:t>
             </a:r>
           </a:p>
+          <a:p>
+            <a:r>
+              <a:t>It's worth admitting the early models and I have something in common — one function in working memory before I lose the thread.</a:t>
+            </a:r>
+          </a:p>
         </p:txBody>
       </p:sp>
       <p:sp>
@@ -4306,6 +4366,11 @@
           <a:p>
             <a:r>
               <a:t>UMN hypocrite commits, 2021: University of Minnesota researchers submitted deliberately buggy patches to the Linux kernel as an experiment on reviewer detection, and the kernel team banned the university in response.</a:t>
+            </a:r>
+          </a:p>
+          <a:p>
+            <a:r>
+              <a:t>The xz backdoor got caught almost by accident, which is either reassuring — the system worked — or the least reassuring sentence in this entire talk, depending on your mood that day.</a:t>
             </a:r>
           </a:p>
         </p:txBody>
@@ -6632,10 +6697,10 @@
       </p:grpSpPr>
       <p:sp>
         <p:nvSpPr>
-          <p:cNvPr id="5" name="Title 4">
+          <p:cNvPr id="5" name="Text Placeholder 4">
             <a:extLst>
               <a:ext uri="{FF2B5EF4-FFF2-40B4-BE49-F238E27FC236}">
-                <a16:creationId xmlns:a16="http://schemas.microsoft.com/office/drawing/2014/main" id="{2F76A2A9-483B-FC56-BB52-1E6E204E72B2}"/>
+                <a16:creationId xmlns:a16="http://schemas.microsoft.com/office/drawing/2014/main" id="{8F306AE0-C82F-CBE0-1C4F-1FE7B5B7AB4B}"/>
               </a:ext>
             </a:extLst>
           </p:cNvPr>
@@ -6643,6 +6708,36 @@
             <a:spLocks noGrp="1"/>
           </p:cNvSpPr>
           <p:nvPr>
+            <p:ph type="body" sz="quarter" idx="11"/>
+          </p:nvPr>
+        </p:nvSpPr>
+        <p:spPr/>
+        <p:txBody>
+          <a:bodyPr>
+            <a:normAutofit fontScale="77500" lnSpcReduction="20000"/>
+          </a:bodyPr>
+          <a:lstStyle/>
+          <a:p>
+            <a:r>
+              <a:rPr lang="en-US" dirty="0"/>
+              <a:t>Layers run in parallel: the agent hits cheap friction in seconds, humans see it last.</a:t>
+            </a:r>
+          </a:p>
+        </p:txBody>
+      </p:sp>
+      <p:sp>
+        <p:nvSpPr>
+          <p:cNvPr id="4" name="Title 3">
+            <a:extLst>
+              <a:ext uri="{FF2B5EF4-FFF2-40B4-BE49-F238E27FC236}">
+                <a16:creationId xmlns:a16="http://schemas.microsoft.com/office/drawing/2014/main" id="{B8BA588A-C7B5-ED3C-1C44-C76F7B26DB39}"/>
+              </a:ext>
+            </a:extLst>
+          </p:cNvPr>
+          <p:cNvSpPr>
+            <a:spLocks noGrp="1"/>
+          </p:cNvSpPr>
+          <p:nvPr>
             <p:ph type="title"/>
           </p:nvPr>
         </p:nvSpPr>
@@ -6655,81 +6750,39 @@
           <a:p>
             <a:r>
               <a:rPr lang="en-US" dirty="0"/>
-              <a:t>Guardrails: Automated Testing</a:t>
-            </a:r>
-          </a:p>
-        </p:txBody>
-      </p:sp>
-      <p:sp>
-        <p:nvSpPr>
-          <p:cNvPr id="6" name="Text Placeholder 5">
-            <a:extLst>
-              <a:ext uri="{FF2B5EF4-FFF2-40B4-BE49-F238E27FC236}">
-                <a16:creationId xmlns:a16="http://schemas.microsoft.com/office/drawing/2014/main" id="{37962287-FA7C-C8FD-5531-68A2FFAD38FD}"/>
-              </a:ext>
-            </a:extLst>
-          </p:cNvPr>
-          <p:cNvSpPr>
-            <a:spLocks noGrp="1"/>
-          </p:cNvSpPr>
-          <p:nvPr>
-            <p:ph type="body" sz="quarter" idx="11"/>
-          </p:nvPr>
-        </p:nvSpPr>
-        <p:spPr/>
-        <p:txBody>
-          <a:bodyPr>
-            <a:normAutofit fontScale="84754" lnSpcReduction="20000"/>
-          </a:bodyPr>
-          <a:lstStyle/>
-          <a:p>
-            <a:pPr marL="571500" indent="-571500"/>
-            <a:r>
-              <a:rPr lang="en-US" dirty="0"/>
-              <a:t>Tests are the first guardrail agent output must pass</a:t>
-            </a:r>
-          </a:p>
-          <a:p>
-            <a:pPr marL="571500" indent="-571500"/>
-            <a:r>
-              <a:rPr lang="en-US" dirty="0"/>
-              <a:t>Unit tests catch logic errors before any human looks at it</a:t>
-            </a:r>
-          </a:p>
-          <a:p>
-            <a:pPr marL="571500" indent="-571500"/>
-            <a:r>
-              <a:rPr lang="en-US" dirty="0"/>
-              <a:t>Integration tests catch wiring and contract failures</a:t>
-            </a:r>
-          </a:p>
-          <a:p>
-            <a:pPr marL="571500" indent="-571500"/>
-            <a:r>
-              <a:rPr lang="en-US" dirty="0"/>
-              <a:t>Property-based and scenario tests probe edge cases automatically</a:t>
-            </a:r>
-          </a:p>
-          <a:p>
-            <a:pPr marL="571500" indent="-571500"/>
-            <a:r>
-              <a:rPr lang="en-US" dirty="0"/>
-              <a:t>A failing test blocks merge — no exceptions for agents</a:t>
-            </a:r>
-          </a:p>
-          <a:p>
-            <a:pPr marL="571500" indent="-571500"/>
-            <a:r>
-              <a:rPr lang="en-US" dirty="0"/>
-              <a:t>Coverage is a floor, not a score</a:t>
-            </a:r>
-          </a:p>
-        </p:txBody>
-      </p:sp>
+              <a:t>Guardrails: Defense in Depth</a:t>
+            </a:r>
+          </a:p>
+        </p:txBody>
+      </p:sp>
+      <p:pic>
+        <p:nvPicPr>
+          <p:cNvPr id="7" name="Diagram" descr="A flowchart showing agent output feeding three parallel checks — types, linters, tests, each labeled with how fast it runs — that converge on a merge gate, which then feeds audit and human review downstream."/>
+          <p:cNvPicPr>
+            <a:picLocks noChangeAspect="1"/>
+          </p:cNvPicPr>
+          <p:nvPr/>
+        </p:nvPicPr>
+        <p:blipFill>
+          <a:blip r:embed="rId3"/>
+          <a:stretch>
+            <a:fillRect/>
+          </a:stretch>
+        </p:blipFill>
+        <p:spPr>
+          <a:xfrm>
+            <a:off x="793082" y="1356623"/>
+            <a:ext cx="10591433" cy="4404091"/>
+          </a:xfrm>
+          <a:prstGeom prst="rect">
+            <a:avLst/>
+          </a:prstGeom>
+        </p:spPr>
+      </p:pic>
     </p:spTree>
     <p:extLst>
       <p:ext uri="{BB962C8B-B14F-4D97-AF65-F5344CB8AC3E}">
-        <p14:creationId xmlns:p14="http://schemas.microsoft.com/office/powerpoint/2010/main" val="2161850691"/>
+        <p14:creationId xmlns:p14="http://schemas.microsoft.com/office/powerpoint/2010/main" val="4024389998"/>
       </p:ext>
     </p:extLst>
   </p:cSld>
@@ -6781,7 +6834,7 @@
           <a:p>
             <a:r>
               <a:rPr lang="en-US" dirty="0"/>
-              <a:t>Testing Pitfall: Agents Writing Their Own Tests</a:t>
+              <a:t>Guardrails: Automated Testing</a:t>
             </a:r>
           </a:p>
         </p:txBody>
@@ -6812,42 +6865,42 @@
             <a:pPr marL="571500" indent="-571500"/>
             <a:r>
               <a:rPr lang="en-US" dirty="0"/>
-              <a:t>Agents happily write tests that pass against broken code</a:t>
-            </a:r>
-          </a:p>
-          <a:p>
-            <a:pPr marL="571500" indent="-571500"/>
-            <a:r>
-              <a:rPr lang="en-US" dirty="0"/>
-              <a:t>Tests asserting current behavior lock in bugs as “expected”</a:t>
-            </a:r>
-          </a:p>
-          <a:p>
-            <a:pPr marL="571500" indent="-571500"/>
-            <a:r>
-              <a:rPr lang="en-US" dirty="0"/>
-              <a:t>Tautological tests inflate coverage, prove nothing</a:t>
-            </a:r>
-          </a:p>
-          <a:p>
-            <a:pPr marL="571500" indent="-571500"/>
-            <a:r>
-              <a:rPr lang="en-US" dirty="0"/>
-              <a:t>Fix: humans own the spec, agents own the implementation</a:t>
-            </a:r>
-          </a:p>
-          <a:p>
-            <a:pPr marL="571500" indent="-571500"/>
-            <a:r>
-              <a:rPr lang="en-US" dirty="0"/>
-              <a:t>Mutation testing exposes tests that never actually fail</a:t>
-            </a:r>
-          </a:p>
-          <a:p>
-            <a:pPr marL="571500" indent="-571500"/>
-            <a:r>
-              <a:rPr lang="en-US" dirty="0"/>
-              <a:t>A green suite an agent wrote for itself is weak evidence</a:t>
+              <a:t>Tests are the first guardrail agent output must pass</a:t>
+            </a:r>
+          </a:p>
+          <a:p>
+            <a:pPr marL="571500" indent="-571500"/>
+            <a:r>
+              <a:rPr lang="en-US" dirty="0"/>
+              <a:t>Unit tests catch logic errors before any human looks at it</a:t>
+            </a:r>
+          </a:p>
+          <a:p>
+            <a:pPr marL="571500" indent="-571500"/>
+            <a:r>
+              <a:rPr lang="en-US" dirty="0"/>
+              <a:t>Integration tests catch wiring and contract failures</a:t>
+            </a:r>
+          </a:p>
+          <a:p>
+            <a:pPr marL="571500" indent="-571500"/>
+            <a:r>
+              <a:rPr lang="en-US" dirty="0"/>
+              <a:t>Property-based and scenario tests probe edge cases automatically</a:t>
+            </a:r>
+          </a:p>
+          <a:p>
+            <a:pPr marL="571500" indent="-571500"/>
+            <a:r>
+              <a:rPr lang="en-US" dirty="0"/>
+              <a:t>A failing test blocks merge — no exceptions for agents</a:t>
+            </a:r>
+          </a:p>
+          <a:p>
+            <a:pPr marL="571500" indent="-571500"/>
+            <a:r>
+              <a:rPr lang="en-US" dirty="0"/>
+              <a:t>Coverage is a floor, not a score</a:t>
             </a:r>
           </a:p>
         </p:txBody>
@@ -6907,7 +6960,7 @@
           <a:p>
             <a:r>
               <a:rPr lang="en-US" dirty="0"/>
-              <a:t>Guardrails: Static Analysis</a:t>
+              <a:t>Testing Pitfall: Agents Writing Their Own Tests</a:t>
             </a:r>
           </a:p>
         </p:txBody>
@@ -6928,50 +6981,52 @@
             <p:ph type="body" sz="quarter" idx="11"/>
           </p:nvPr>
         </p:nvSpPr>
-        <p:spPr>
-          <a:xfrm>
-            <a:off x="353171" y="1278968"/>
-            <a:ext cx="11838829" cy="4404656"/>
-          </a:xfrm>
-        </p:spPr>
+        <p:spPr/>
         <p:txBody>
           <a:bodyPr>
-            <a:normAutofit fontScale="88158"/>
+            <a:normAutofit fontScale="84754" lnSpcReduction="20000"/>
           </a:bodyPr>
           <a:lstStyle/>
           <a:p>
             <a:pPr marL="571500" indent="-571500"/>
             <a:r>
               <a:rPr lang="en-US" dirty="0"/>
-              <a:t>Static analysis enforces safety without running code</a:t>
-            </a:r>
-          </a:p>
-          <a:p>
-            <a:pPr marL="571500" indent="-571500"/>
-            <a:r>
-              <a:rPr lang="en-US" dirty="0"/>
-              <a:t>Linters reject entire classes of bugs before runtime</a:t>
-            </a:r>
-          </a:p>
-          <a:p>
-            <a:pPr marL="571500" indent="-571500"/>
-            <a:r>
-              <a:rPr lang="en-US" dirty="0"/>
-              <a:t>Security linters flag SQL injection, hardcoded secrets</a:t>
-            </a:r>
-          </a:p>
-          <a:p>
-            <a:pPr marL="571500" indent="-571500"/>
-            <a:r>
-              <a:rPr lang="en-US" dirty="0"/>
-              <a:t>Runs fast, cheap, on every commit — no model inference needed</a:t>
-            </a:r>
-          </a:p>
-          <a:p>
-            <a:pPr marL="571500" indent="-571500"/>
-            <a:r>
-              <a:rPr lang="en-US" dirty="0"/>
-              <a:t>Pairs with tests: static catches shape, tests catch behavior</a:t>
+              <a:t>Agents happily write tests that pass against broken code</a:t>
+            </a:r>
+          </a:p>
+          <a:p>
+            <a:pPr marL="571500" indent="-571500"/>
+            <a:r>
+              <a:rPr lang="en-US" dirty="0"/>
+              <a:t>Tests asserting current behavior lock in bugs as “expected”</a:t>
+            </a:r>
+          </a:p>
+          <a:p>
+            <a:pPr marL="571500" indent="-571500"/>
+            <a:r>
+              <a:rPr lang="en-US" dirty="0"/>
+              <a:t>Tautological tests inflate coverage, prove nothing</a:t>
+            </a:r>
+          </a:p>
+          <a:p>
+            <a:pPr marL="571500" indent="-571500"/>
+            <a:r>
+              <a:rPr lang="en-US" dirty="0"/>
+              <a:t>Fix: humans own the spec, agents own the implementation</a:t>
+            </a:r>
+          </a:p>
+          <a:p>
+            <a:pPr marL="571500" indent="-571500"/>
+            <a:r>
+              <a:rPr lang="en-US" dirty="0"/>
+              <a:t>Mutation testing exposes tests that never actually fail</a:t>
+            </a:r>
+          </a:p>
+          <a:p>
+            <a:pPr marL="571500" indent="-571500"/>
+            <a:r>
+              <a:rPr lang="en-US" dirty="0"/>
+              <a:t>A green suite an agent wrote for itself is weak evidence</a:t>
             </a:r>
           </a:p>
         </p:txBody>
@@ -7031,7 +7086,7 @@
           <a:p>
             <a:r>
               <a:rPr lang="en-US" dirty="0"/>
-              <a:t>Type Systems as Free Guardrails</a:t>
+              <a:t>Guardrails: Static Analysis</a:t>
             </a:r>
           </a:p>
         </p:txBody>
@@ -7052,52 +7107,50 @@
             <p:ph type="body" sz="quarter" idx="11"/>
           </p:nvPr>
         </p:nvSpPr>
-        <p:spPr/>
+        <p:spPr>
+          <a:xfrm>
+            <a:off x="353171" y="1278968"/>
+            <a:ext cx="11838829" cy="4404656"/>
+          </a:xfrm>
+        </p:spPr>
         <p:txBody>
           <a:bodyPr>
-            <a:normAutofit fontScale="80658" lnSpcReduction="10000"/>
+            <a:normAutofit fontScale="88158"/>
           </a:bodyPr>
           <a:lstStyle/>
           <a:p>
             <a:pPr marL="571500" indent="-571500"/>
             <a:r>
               <a:rPr lang="en-US" dirty="0"/>
-              <a:t>A strong type system rejects bad code before any test</a:t>
-            </a:r>
-          </a:p>
-          <a:p>
-            <a:pPr marL="571500" indent="-571500"/>
-            <a:r>
-              <a:rPr lang="en-US" dirty="0"/>
-              <a:t>Go example: explicit error returns make ignored failures visible</a:t>
-            </a:r>
-          </a:p>
-          <a:p>
-            <a:pPr marL="571500" indent="-571500"/>
-            <a:r>
-              <a:rPr lang="en-US" dirty="0"/>
-              <a:t>Compile errors are the cheapest feedback an agent gets</a:t>
-            </a:r>
-          </a:p>
-          <a:p>
-            <a:pPr marL="571500" indent="-571500"/>
-            <a:r>
-              <a:rPr lang="en-US" dirty="0"/>
-              <a:t>Typed interfaces constrain what an agent can plausibly generate</a:t>
-            </a:r>
-          </a:p>
-          <a:p>
-            <a:pPr marL="571500" indent="-571500"/>
-            <a:r>
-              <a:rPr lang="en-US" dirty="0"/>
-              <a:t>Narrow types encode intent an agent can’t misread</a:t>
-            </a:r>
-          </a:p>
-          <a:p>
-            <a:pPr marL="571500" indent="-571500"/>
-            <a:r>
-              <a:rPr lang="en-US" dirty="0"/>
-              <a:t>The argument generalizes past Go</a:t>
+              <a:t>Static analysis enforces safety without running code</a:t>
+            </a:r>
+          </a:p>
+          <a:p>
+            <a:pPr marL="571500" indent="-571500"/>
+            <a:r>
+              <a:rPr lang="en-US" dirty="0"/>
+              <a:t>Linters reject entire classes of bugs before runtime</a:t>
+            </a:r>
+          </a:p>
+          <a:p>
+            <a:pPr marL="571500" indent="-571500"/>
+            <a:r>
+              <a:rPr lang="en-US" dirty="0"/>
+              <a:t>Security linters flag SQL injection, hardcoded secrets</a:t>
+            </a:r>
+          </a:p>
+          <a:p>
+            <a:pPr marL="571500" indent="-571500"/>
+            <a:r>
+              <a:rPr lang="en-US" dirty="0"/>
+              <a:t>Runs fast, cheap, on every commit — no model inference needed</a:t>
+            </a:r>
+          </a:p>
+          <a:p>
+            <a:pPr marL="571500" indent="-571500"/>
+            <a:r>
+              <a:rPr lang="en-US" dirty="0"/>
+              <a:t>Pairs with tests: static catches shape, tests catch behavior</a:t>
             </a:r>
           </a:p>
         </p:txBody>
@@ -7157,7 +7210,7 @@
           <a:p>
             <a:r>
               <a:rPr lang="en-US" dirty="0"/>
-              <a:t>CI as the Enforcement Point</a:t>
+              <a:t>Type Systems as Free Guardrails</a:t>
             </a:r>
           </a:p>
         </p:txBody>
@@ -7181,49 +7234,49 @@
         <p:spPr/>
         <p:txBody>
           <a:bodyPr>
-            <a:normAutofit fontScale="81784" lnSpcReduction="10000"/>
+            <a:normAutofit fontScale="80658" lnSpcReduction="10000"/>
           </a:bodyPr>
           <a:lstStyle/>
           <a:p>
             <a:pPr marL="571500" indent="-571500"/>
             <a:r>
               <a:rPr lang="en-US" dirty="0"/>
-              <a:t>Guardrails only count if something blocks a failing merge</a:t>
-            </a:r>
-          </a:p>
-          <a:p>
-            <a:pPr marL="571500" indent="-571500"/>
-            <a:r>
-              <a:rPr lang="en-US" dirty="0"/>
-              <a:t>CI combines the layers: types, linters, tests, then gates</a:t>
-            </a:r>
-          </a:p>
-          <a:p>
-            <a:pPr marL="571500" indent="-571500"/>
-            <a:r>
-              <a:rPr lang="en-US" dirty="0"/>
-              <a:t>Required checks: build, test, lint, security scan, coverage</a:t>
-            </a:r>
-          </a:p>
-          <a:p>
-            <a:pPr marL="571500" indent="-571500"/>
-            <a:r>
-              <a:rPr lang="en-US" dirty="0"/>
-              <a:t>Branch protection stops agents from bypassing the gate</a:t>
-            </a:r>
-          </a:p>
-          <a:p>
-            <a:pPr marL="571500" indent="-571500"/>
-            <a:r>
-              <a:rPr lang="en-US" dirty="0"/>
-              <a:t>Same pipeline for human and agent PRs — no fast lane</a:t>
-            </a:r>
-          </a:p>
-          <a:p>
-            <a:pPr marL="571500" indent="-571500"/>
-            <a:r>
-              <a:rPr lang="en-US" dirty="0"/>
-              <a:t>Not enforced in CI? It’s documentation, not a guardrail</a:t>
+              <a:t>A strong type system rejects bad code before any test</a:t>
+            </a:r>
+          </a:p>
+          <a:p>
+            <a:pPr marL="571500" indent="-571500"/>
+            <a:r>
+              <a:rPr lang="en-US" dirty="0"/>
+              <a:t>Go example: explicit error returns make ignored failures visible</a:t>
+            </a:r>
+          </a:p>
+          <a:p>
+            <a:pPr marL="571500" indent="-571500"/>
+            <a:r>
+              <a:rPr lang="en-US" dirty="0"/>
+              <a:t>Compile errors are the cheapest feedback an agent gets</a:t>
+            </a:r>
+          </a:p>
+          <a:p>
+            <a:pPr marL="571500" indent="-571500"/>
+            <a:r>
+              <a:rPr lang="en-US" dirty="0"/>
+              <a:t>Typed interfaces constrain what an agent can plausibly generate</a:t>
+            </a:r>
+          </a:p>
+          <a:p>
+            <a:pPr marL="571500" indent="-571500"/>
+            <a:r>
+              <a:rPr lang="en-US" dirty="0"/>
+              <a:t>Narrow types encode intent an agent can’t misread</a:t>
+            </a:r>
+          </a:p>
+          <a:p>
+            <a:pPr marL="571500" indent="-571500"/>
+            <a:r>
+              <a:rPr lang="en-US" dirty="0"/>
+              <a:t>The argument generalizes past Go</a:t>
             </a:r>
           </a:p>
         </p:txBody>
@@ -7283,7 +7336,7 @@
           <a:p>
             <a:r>
               <a:rPr lang="en-US" dirty="0"/>
-              <a:t>Guardrail Metrics That Actually Matter</a:t>
+              <a:t>CI as the Enforcement Point</a:t>
             </a:r>
           </a:p>
         </p:txBody>
@@ -7307,49 +7360,49 @@
         <p:spPr/>
         <p:txBody>
           <a:bodyPr>
-            <a:normAutofit fontScale="84616" lnSpcReduction="20000"/>
+            <a:normAutofit fontScale="81784" lnSpcReduction="10000"/>
           </a:bodyPr>
           <a:lstStyle/>
           <a:p>
             <a:pPr marL="571500" indent="-571500"/>
             <a:r>
               <a:rPr lang="en-US" dirty="0"/>
-              <a:t>Coverage percentage alone is easy to game</a:t>
-            </a:r>
-          </a:p>
-          <a:p>
-            <a:pPr marL="571500" indent="-571500"/>
-            <a:r>
-              <a:rPr lang="en-US" dirty="0"/>
-              <a:t>Better: escaped defect rate — bugs that reached production</a:t>
-            </a:r>
-          </a:p>
-          <a:p>
-            <a:pPr marL="571500" indent="-571500"/>
-            <a:r>
-              <a:rPr lang="en-US" dirty="0"/>
-              <a:t>Mean time to detect a bad agent change</a:t>
-            </a:r>
-          </a:p>
-          <a:p>
-            <a:pPr marL="571500" indent="-571500"/>
-            <a:r>
-              <a:rPr lang="en-US" dirty="0"/>
-              <a:t>Percentage of agent PRs failing at least one guardrail</a:t>
-            </a:r>
-          </a:p>
-          <a:p>
-            <a:pPr marL="571500" indent="-571500"/>
-            <a:r>
-              <a:rPr lang="en-US" dirty="0"/>
-              <a:t>Revert rate on auto-merged changes</a:t>
-            </a:r>
-          </a:p>
-          <a:p>
-            <a:pPr marL="571500" indent="-571500"/>
-            <a:r>
-              <a:rPr lang="en-US" dirty="0"/>
-              <a:t>Measure whether guardrails catch things, not whether they exist</a:t>
+              <a:t>Guardrails only count if something blocks a failing merge</a:t>
+            </a:r>
+          </a:p>
+          <a:p>
+            <a:pPr marL="571500" indent="-571500"/>
+            <a:r>
+              <a:rPr lang="en-US" dirty="0"/>
+              <a:t>CI combines the layers: types, linters, tests, then gates</a:t>
+            </a:r>
+          </a:p>
+          <a:p>
+            <a:pPr marL="571500" indent="-571500"/>
+            <a:r>
+              <a:rPr lang="en-US" dirty="0"/>
+              <a:t>Required checks: build, test, lint, security scan, coverage</a:t>
+            </a:r>
+          </a:p>
+          <a:p>
+            <a:pPr marL="571500" indent="-571500"/>
+            <a:r>
+              <a:rPr lang="en-US" dirty="0"/>
+              <a:t>Branch protection stops agents from bypassing the gate</a:t>
+            </a:r>
+          </a:p>
+          <a:p>
+            <a:pPr marL="571500" indent="-571500"/>
+            <a:r>
+              <a:rPr lang="en-US" dirty="0"/>
+              <a:t>Same pipeline for human and agent PRs — no fast lane</a:t>
+            </a:r>
+          </a:p>
+          <a:p>
+            <a:pPr marL="571500" indent="-571500"/>
+            <a:r>
+              <a:rPr lang="en-US" dirty="0"/>
+              <a:t>Not enforced in CI? It’s documentation, not a guardrail</a:t>
             </a:r>
           </a:p>
         </p:txBody>
@@ -7409,7 +7462,7 @@
           <a:p>
             <a:r>
               <a:rPr lang="en-US" dirty="0"/>
-              <a:t>LLM Skills as Building Blocks</a:t>
+              <a:t>Guardrail Metrics That Actually Matter</a:t>
             </a:r>
           </a:p>
         </p:txBody>
@@ -7433,42 +7486,49 @@
         <p:spPr/>
         <p:txBody>
           <a:bodyPr>
-            <a:normAutofit fontScale="92116"/>
+            <a:normAutofit fontScale="84616" lnSpcReduction="20000"/>
           </a:bodyPr>
           <a:lstStyle/>
           <a:p>
             <a:pPr marL="571500" indent="-571500"/>
             <a:r>
               <a:rPr lang="en-US" dirty="0"/>
-              <a:t>A skill packages instructions, examples, and tools for one task</a:t>
-            </a:r>
-          </a:p>
-          <a:p>
-            <a:pPr marL="571500" indent="-571500"/>
-            <a:r>
-              <a:rPr lang="en-US" dirty="0"/>
-              <a:t>Narrow skills outperform one giant do-everything prompt</a:t>
-            </a:r>
-          </a:p>
-          <a:p>
-            <a:pPr marL="571500" indent="-571500"/>
-            <a:r>
-              <a:rPr lang="en-US" dirty="0"/>
-              <a:t>Contrast: a prompt is disposable; a fine-tune is opaque</a:t>
-            </a:r>
-          </a:p>
-          <a:p>
-            <a:pPr marL="571500" indent="-571500"/>
-            <a:r>
-              <a:rPr lang="en-US" dirty="0"/>
-              <a:t>Skills hit the useful middle: durable, cheap to change</a:t>
-            </a:r>
-          </a:p>
-          <a:p>
-            <a:pPr marL="571500" indent="-571500"/>
-            <a:r>
-              <a:rPr lang="en-US" dirty="0"/>
-              <a:t>Think: functions, but for reasoning and judgment</a:t>
+              <a:t>Coverage percentage alone is easy to game</a:t>
+            </a:r>
+          </a:p>
+          <a:p>
+            <a:pPr marL="571500" indent="-571500"/>
+            <a:r>
+              <a:rPr lang="en-US" dirty="0"/>
+              <a:t>Better: escaped defect rate — bugs that reached production</a:t>
+            </a:r>
+          </a:p>
+          <a:p>
+            <a:pPr marL="571500" indent="-571500"/>
+            <a:r>
+              <a:rPr lang="en-US" dirty="0"/>
+              <a:t>Mean time to detect a bad agent change</a:t>
+            </a:r>
+          </a:p>
+          <a:p>
+            <a:pPr marL="571500" indent="-571500"/>
+            <a:r>
+              <a:rPr lang="en-US" dirty="0"/>
+              <a:t>Percentage of agent PRs failing at least one guardrail</a:t>
+            </a:r>
+          </a:p>
+          <a:p>
+            <a:pPr marL="571500" indent="-571500"/>
+            <a:r>
+              <a:rPr lang="en-US" dirty="0"/>
+              <a:t>Revert rate on auto-merged changes</a:t>
+            </a:r>
+          </a:p>
+          <a:p>
+            <a:pPr marL="571500" indent="-571500"/>
+            <a:r>
+              <a:rPr lang="en-US" dirty="0"/>
+              <a:t>Measure whether guardrails catch things, not whether they exist</a:t>
             </a:r>
           </a:p>
         </p:txBody>
@@ -7528,7 +7588,7 @@
           <a:p>
             <a:r>
               <a:rPr lang="en-US" dirty="0"/>
-              <a:t>Anatomy of a Skill</a:t>
+              <a:t>LLM Skills as Building Blocks</a:t>
             </a:r>
           </a:p>
         </p:txBody>
@@ -7552,49 +7612,42 @@
         <p:spPr/>
         <p:txBody>
           <a:bodyPr>
-            <a:normAutofit fontScale="84616" lnSpcReduction="20000"/>
+            <a:normAutofit fontScale="92116"/>
           </a:bodyPr>
           <a:lstStyle/>
           <a:p>
             <a:pPr marL="571500" indent="-571500"/>
             <a:r>
               <a:rPr lang="en-US" dirty="0"/>
-              <a:t>Description: when this skill should trigger</a:t>
-            </a:r>
-          </a:p>
-          <a:p>
-            <a:pPr marL="571500" indent="-571500"/>
-            <a:r>
-              <a:rPr lang="en-US" dirty="0"/>
-              <a:t>Instructions: procedure, constraints, house conventions</a:t>
-            </a:r>
-          </a:p>
-          <a:p>
-            <a:pPr marL="571500" indent="-571500"/>
-            <a:r>
-              <a:rPr lang="en-US" dirty="0"/>
-              <a:t>Examples: input/output pairs showing correct behavior</a:t>
-            </a:r>
-          </a:p>
-          <a:p>
-            <a:pPr marL="571500" indent="-571500"/>
-            <a:r>
-              <a:rPr lang="en-US" dirty="0"/>
-              <a:t>Tools: what the skill may call or execute</a:t>
-            </a:r>
-          </a:p>
-          <a:p>
-            <a:pPr marL="571500" indent="-571500"/>
-            <a:r>
-              <a:rPr lang="en-US" dirty="0"/>
-              <a:t>Scoped narrowly enough that correctness is checkable</a:t>
-            </a:r>
-          </a:p>
-          <a:p>
-            <a:pPr marL="571500" indent="-571500"/>
-            <a:r>
-              <a:rPr lang="en-US" dirty="0"/>
-              <a:t>Reads like a runbook a new hire could follow</a:t>
+              <a:t>A skill packages instructions, examples, and tools for one task</a:t>
+            </a:r>
+          </a:p>
+          <a:p>
+            <a:pPr marL="571500" indent="-571500"/>
+            <a:r>
+              <a:rPr lang="en-US" dirty="0"/>
+              <a:t>Narrow skills outperform one giant do-everything prompt</a:t>
+            </a:r>
+          </a:p>
+          <a:p>
+            <a:pPr marL="571500" indent="-571500"/>
+            <a:r>
+              <a:rPr lang="en-US" dirty="0"/>
+              <a:t>Contrast: a prompt is disposable; a fine-tune is opaque</a:t>
+            </a:r>
+          </a:p>
+          <a:p>
+            <a:pPr marL="571500" indent="-571500"/>
+            <a:r>
+              <a:rPr lang="en-US" dirty="0"/>
+              <a:t>Skills hit the useful middle: durable, cheap to change</a:t>
+            </a:r>
+          </a:p>
+          <a:p>
+            <a:pPr marL="571500" indent="-571500"/>
+            <a:r>
+              <a:rPr lang="en-US" dirty="0"/>
+              <a:t>Think: functions, but for reasoning and judgment</a:t>
             </a:r>
           </a:p>
         </p:txBody>
@@ -7654,7 +7707,7 @@
           <a:p>
             <a:r>
               <a:rPr lang="en-US" dirty="0"/>
-              <a:t>Skill Versioning and Reuse</a:t>
+              <a:t>Anatomy of a Skill</a:t>
             </a:r>
           </a:p>
         </p:txBody>
@@ -7678,49 +7731,49 @@
         <p:spPr/>
         <p:txBody>
           <a:bodyPr>
-            <a:normAutofit fontScale="80658" lnSpcReduction="10000"/>
+            <a:normAutofit fontScale="84616" lnSpcReduction="20000"/>
           </a:bodyPr>
           <a:lstStyle/>
           <a:p>
             <a:pPr marL="571500" indent="-571500"/>
             <a:r>
               <a:rPr lang="en-US" dirty="0"/>
-              <a:t>Skills live in version control, like application code</a:t>
-            </a:r>
-          </a:p>
-          <a:p>
-            <a:pPr marL="571500" indent="-571500"/>
-            <a:r>
-              <a:rPr lang="en-US" dirty="0"/>
-              <a:t>A skill change gets reviewed like any other diff</a:t>
-            </a:r>
-          </a:p>
-          <a:p>
-            <a:pPr marL="571500" indent="-571500"/>
-            <a:r>
-              <a:rPr lang="en-US" dirty="0"/>
-              <a:t>Reuse means consistent behavior across teams and projects</a:t>
-            </a:r>
-          </a:p>
-          <a:p>
-            <a:pPr marL="571500" indent="-571500"/>
-            <a:r>
-              <a:rPr lang="en-US" dirty="0"/>
-              <a:t>Roll back a bad skill the way you’d roll back code</a:t>
-            </a:r>
-          </a:p>
-          <a:p>
-            <a:pPr marL="571500" indent="-571500"/>
-            <a:r>
-              <a:rPr lang="en-US" dirty="0"/>
-              <a:t>Skill libraries become shared infrastructure, not personal notes</a:t>
-            </a:r>
-          </a:p>
-          <a:p>
-            <a:pPr marL="571500" indent="-571500"/>
-            <a:r>
-              <a:rPr lang="en-US" dirty="0"/>
-              <a:t>Auditing which skill version ran is part of the trail</a:t>
+              <a:t>Description: when this skill should trigger</a:t>
+            </a:r>
+          </a:p>
+          <a:p>
+            <a:pPr marL="571500" indent="-571500"/>
+            <a:r>
+              <a:rPr lang="en-US" dirty="0"/>
+              <a:t>Instructions: procedure, constraints, house conventions</a:t>
+            </a:r>
+          </a:p>
+          <a:p>
+            <a:pPr marL="571500" indent="-571500"/>
+            <a:r>
+              <a:rPr lang="en-US" dirty="0"/>
+              <a:t>Examples: input/output pairs showing correct behavior</a:t>
+            </a:r>
+          </a:p>
+          <a:p>
+            <a:pPr marL="571500" indent="-571500"/>
+            <a:r>
+              <a:rPr lang="en-US" dirty="0"/>
+              <a:t>Tools: what the skill may call or execute</a:t>
+            </a:r>
+          </a:p>
+          <a:p>
+            <a:pPr marL="571500" indent="-571500"/>
+            <a:r>
+              <a:rPr lang="en-US" dirty="0"/>
+              <a:t>Scoped narrowly enough that correctness is checkable</a:t>
+            </a:r>
+          </a:p>
+          <a:p>
+            <a:pPr marL="571500" indent="-571500"/>
+            <a:r>
+              <a:rPr lang="en-US" dirty="0"/>
+              <a:t>Reads like a runbook a new hire could follow</a:t>
             </a:r>
           </a:p>
         </p:txBody>
@@ -7739,6 +7792,324 @@
 </file>
 
 <file path=ppt/slides/slide19.xml><?xml version="1.0" encoding="utf-8"?>
+<p:sld xmlns:a="http://schemas.openxmlformats.org/drawingml/2006/main" xmlns:r="http://schemas.openxmlformats.org/officeDocument/2006/relationships" xmlns:p="http://schemas.openxmlformats.org/presentationml/2006/main">
+  <p:cSld>
+    <p:spTree>
+      <p:nvGrpSpPr>
+        <p:cNvPr id="1" name=""/>
+        <p:cNvGrpSpPr/>
+        <p:nvPr/>
+      </p:nvGrpSpPr>
+      <p:grpSpPr>
+        <a:xfrm>
+          <a:off x="0" y="0"/>
+          <a:ext cx="0" cy="0"/>
+          <a:chOff x="0" y="0"/>
+          <a:chExt cx="0" cy="0"/>
+        </a:xfrm>
+      </p:grpSpPr>
+      <p:sp>
+        <p:nvSpPr>
+          <p:cNvPr id="5" name="Title 4">
+            <a:extLst>
+              <a:ext uri="{FF2B5EF4-FFF2-40B4-BE49-F238E27FC236}">
+                <a16:creationId xmlns:a16="http://schemas.microsoft.com/office/drawing/2014/main" id="{2F76A2A9-483B-FC56-BB52-1E6E204E72B2}"/>
+              </a:ext>
+            </a:extLst>
+          </p:cNvPr>
+          <p:cNvSpPr>
+            <a:spLocks noGrp="1"/>
+          </p:cNvSpPr>
+          <p:nvPr>
+            <p:ph type="title"/>
+          </p:nvPr>
+        </p:nvSpPr>
+        <p:spPr/>
+        <p:txBody>
+          <a:bodyPr>
+            <a:normAutofit/>
+          </a:bodyPr>
+          <a:lstStyle/>
+          <a:p>
+            <a:r>
+              <a:rPr lang="en-US" dirty="0"/>
+              <a:t>Skill Versioning and Reuse</a:t>
+            </a:r>
+          </a:p>
+        </p:txBody>
+      </p:sp>
+      <p:sp>
+        <p:nvSpPr>
+          <p:cNvPr id="6" name="Text Placeholder 5">
+            <a:extLst>
+              <a:ext uri="{FF2B5EF4-FFF2-40B4-BE49-F238E27FC236}">
+                <a16:creationId xmlns:a16="http://schemas.microsoft.com/office/drawing/2014/main" id="{37962287-FA7C-C8FD-5531-68A2FFAD38FD}"/>
+              </a:ext>
+            </a:extLst>
+          </p:cNvPr>
+          <p:cNvSpPr>
+            <a:spLocks noGrp="1"/>
+          </p:cNvSpPr>
+          <p:nvPr>
+            <p:ph type="body" sz="quarter" idx="11"/>
+          </p:nvPr>
+        </p:nvSpPr>
+        <p:spPr/>
+        <p:txBody>
+          <a:bodyPr>
+            <a:normAutofit fontScale="80658" lnSpcReduction="10000"/>
+          </a:bodyPr>
+          <a:lstStyle/>
+          <a:p>
+            <a:pPr marL="571500" indent="-571500"/>
+            <a:r>
+              <a:rPr lang="en-US" dirty="0"/>
+              <a:t>Skills live in version control, like application code</a:t>
+            </a:r>
+          </a:p>
+          <a:p>
+            <a:pPr marL="571500" indent="-571500"/>
+            <a:r>
+              <a:rPr lang="en-US" dirty="0"/>
+              <a:t>A skill change gets reviewed like any other diff</a:t>
+            </a:r>
+          </a:p>
+          <a:p>
+            <a:pPr marL="571500" indent="-571500"/>
+            <a:r>
+              <a:rPr lang="en-US" dirty="0"/>
+              <a:t>Reuse means consistent behavior across teams and projects</a:t>
+            </a:r>
+          </a:p>
+          <a:p>
+            <a:pPr marL="571500" indent="-571500"/>
+            <a:r>
+              <a:rPr lang="en-US" dirty="0"/>
+              <a:t>Roll back a bad skill the way you’d roll back code</a:t>
+            </a:r>
+          </a:p>
+          <a:p>
+            <a:pPr marL="571500" indent="-571500"/>
+            <a:r>
+              <a:rPr lang="en-US" dirty="0"/>
+              <a:t>Skill libraries become shared infrastructure, not personal notes</a:t>
+            </a:r>
+          </a:p>
+          <a:p>
+            <a:pPr marL="571500" indent="-571500"/>
+            <a:r>
+              <a:rPr lang="en-US" dirty="0"/>
+              <a:t>Auditing which skill version ran is part of the trail</a:t>
+            </a:r>
+          </a:p>
+        </p:txBody>
+      </p:sp>
+    </p:spTree>
+    <p:extLst>
+      <p:ext uri="{BB962C8B-B14F-4D97-AF65-F5344CB8AC3E}">
+        <p14:creationId xmlns:p14="http://schemas.microsoft.com/office/powerpoint/2010/main" val="2161850691"/>
+      </p:ext>
+    </p:extLst>
+  </p:cSld>
+  <p:clrMapOvr>
+    <a:masterClrMapping/>
+  </p:clrMapOvr>
+</p:sld>
+</file>
+
+<file path=ppt/slides/slide2.xml><?xml version="1.0" encoding="utf-8"?>
+<p:sld xmlns:a="http://schemas.openxmlformats.org/drawingml/2006/main" xmlns:r="http://schemas.openxmlformats.org/officeDocument/2006/relationships" xmlns:p="http://schemas.openxmlformats.org/presentationml/2006/main">
+  <p:cSld>
+    <p:spTree>
+      <p:nvGrpSpPr>
+        <p:cNvPr id="1" name=""/>
+        <p:cNvGrpSpPr/>
+        <p:nvPr/>
+      </p:nvGrpSpPr>
+      <p:grpSpPr>
+        <a:xfrm>
+          <a:off x="0" y="0"/>
+          <a:ext cx="0" cy="0"/>
+          <a:chOff x="0" y="0"/>
+          <a:chExt cx="0" cy="0"/>
+        </a:xfrm>
+      </p:grpSpPr>
+      <p:sp>
+        <p:nvSpPr>
+          <p:cNvPr id="11" name="Title 10">
+            <a:extLst>
+              <a:ext uri="{FF2B5EF4-FFF2-40B4-BE49-F238E27FC236}">
+                <a16:creationId xmlns:a16="http://schemas.microsoft.com/office/drawing/2014/main" id="{77BAD118-211A-F293-3AA9-B6C57E74F7C7}"/>
+              </a:ext>
+            </a:extLst>
+          </p:cNvPr>
+          <p:cNvSpPr>
+            <a:spLocks noGrp="1"/>
+          </p:cNvSpPr>
+          <p:nvPr>
+            <p:ph type="title"/>
+          </p:nvPr>
+        </p:nvSpPr>
+        <p:spPr/>
+        <p:txBody>
+          <a:bodyPr/>
+          <a:lstStyle/>
+          <a:p>
+            <a:r>
+              <a:rPr lang="en-US" dirty="0"/>
+              <a:t>Agenda</a:t>
+            </a:r>
+          </a:p>
+        </p:txBody>
+      </p:sp>
+      <p:sp>
+        <p:nvSpPr>
+          <p:cNvPr id="12" name="Text Placeholder 11">
+            <a:extLst>
+              <a:ext uri="{FF2B5EF4-FFF2-40B4-BE49-F238E27FC236}">
+                <a16:creationId xmlns:a16="http://schemas.microsoft.com/office/drawing/2014/main" id="{444F1713-7256-C24F-326F-748B2D04E93E}"/>
+              </a:ext>
+            </a:extLst>
+          </p:cNvPr>
+          <p:cNvSpPr>
+            <a:spLocks noGrp="1"/>
+          </p:cNvSpPr>
+          <p:nvPr>
+            <p:ph type="body" sz="quarter" idx="11"/>
+          </p:nvPr>
+        </p:nvSpPr>
+        <p:spPr/>
+        <p:txBody>
+          <a:bodyPr>
+            <a:normAutofit fontScale="77500" lnSpcReduction="20000"/>
+          </a:bodyPr>
+          <a:lstStyle/>
+          <a:p>
+            <a:pPr marL="571500" indent="-571500">
+              <a:lnSpc>
+                <a:spcPct val="100000"/>
+              </a:lnSpc>
+            </a:pPr>
+            <a:r>
+              <a:rPr lang="en-US" sz="3200" dirty="0"/>
+              <a:t>Foundations</a:t>
+            </a:r>
+          </a:p>
+          <a:p>
+            <a:pPr marL="571500" indent="-571500">
+              <a:lnSpc>
+                <a:spcPct val="100000"/>
+              </a:lnSpc>
+            </a:pPr>
+            <a:r>
+              <a:rPr lang="en-US" sz="3200" dirty="0"/>
+              <a:t>The lifecycle</a:t>
+            </a:r>
+          </a:p>
+          <a:p>
+            <a:pPr marL="571500" indent="-571500">
+              <a:lnSpc>
+                <a:spcPct val="100000"/>
+              </a:lnSpc>
+            </a:pPr>
+            <a:r>
+              <a:rPr lang="en-US" sz="3200" dirty="0"/>
+              <a:t>Guardrails</a:t>
+            </a:r>
+          </a:p>
+          <a:p>
+            <a:pPr marL="571500" indent="-571500">
+              <a:lnSpc>
+                <a:spcPct val="100000"/>
+              </a:lnSpc>
+            </a:pPr>
+            <a:r>
+              <a:rPr lang="en-US" sz="3200" dirty="0"/>
+              <a:t>Skills</a:t>
+            </a:r>
+          </a:p>
+          <a:p>
+            <a:pPr marL="571500" indent="-571500">
+              <a:lnSpc>
+                <a:spcPct val="100000"/>
+              </a:lnSpc>
+            </a:pPr>
+            <a:r>
+              <a:rPr lang="en-US" sz="3200" dirty="0"/>
+              <a:t>Orchestration</a:t>
+            </a:r>
+          </a:p>
+          <a:p>
+            <a:pPr marL="571500" indent="-571500">
+              <a:lnSpc>
+                <a:spcPct val="100000"/>
+              </a:lnSpc>
+            </a:pPr>
+            <a:r>
+              <a:rPr lang="en-US" sz="3200" dirty="0"/>
+              <a:t>Auditing &amp; security</a:t>
+            </a:r>
+          </a:p>
+          <a:p>
+            <a:pPr marL="571500" indent="-571500">
+              <a:lnSpc>
+                <a:spcPct val="100000"/>
+              </a:lnSpc>
+            </a:pPr>
+            <a:r>
+              <a:rPr lang="en-US" sz="3200" dirty="0"/>
+              <a:t>Team health</a:t>
+            </a:r>
+          </a:p>
+          <a:p>
+            <a:pPr marL="571500" indent="-571500">
+              <a:lnSpc>
+                <a:spcPct val="100000"/>
+              </a:lnSpc>
+            </a:pPr>
+            <a:r>
+              <a:rPr lang="en-US" sz="3200" dirty="0"/>
+              <a:t>Economics</a:t>
+            </a:r>
+          </a:p>
+          <a:p>
+            <a:pPr marL="571500" indent="-571500">
+              <a:lnSpc>
+                <a:spcPct val="100000"/>
+              </a:lnSpc>
+            </a:pPr>
+            <a:r>
+              <a:rPr lang="en-US" sz="3200" dirty="0"/>
+              <a:t>Limits</a:t>
+            </a:r>
+          </a:p>
+          <a:p>
+            <a:pPr marL="571500" indent="-571500">
+              <a:lnSpc>
+                <a:spcPct val="100000"/>
+              </a:lnSpc>
+            </a:pPr>
+            <a:r>
+              <a:rPr lang="en-US" sz="3200" dirty="0"/>
+              <a:t>Closing</a:t>
+            </a:r>
+          </a:p>
+        </p:txBody>
+      </p:sp>
+    </p:spTree>
+    <p:extLst>
+      <p:ext uri="{BB962C8B-B14F-4D97-AF65-F5344CB8AC3E}">
+        <p14:creationId xmlns:p14="http://schemas.microsoft.com/office/powerpoint/2010/main" val="147381059"/>
+      </p:ext>
+    </p:extLst>
+  </p:cSld>
+  <p:clrMapOvr>
+    <a:masterClrMapping/>
+  </p:clrMapOvr>
+</p:sld>
+</file>
+
+<file path=ppt/slides/slide20.xml><?xml version="1.0" encoding="utf-8"?>
 <p:sld xmlns:a="http://schemas.openxmlformats.org/drawingml/2006/main" xmlns:r="http://schemas.openxmlformats.org/officeDocument/2006/relationships" xmlns:p="http://schemas.openxmlformats.org/presentationml/2006/main">
   <p:cSld>
     <p:spTree>
@@ -7857,324 +8228,6 @@
 </p:sld>
 </file>
 
-<file path=ppt/slides/slide2.xml><?xml version="1.0" encoding="utf-8"?>
-<p:sld xmlns:a="http://schemas.openxmlformats.org/drawingml/2006/main" xmlns:r="http://schemas.openxmlformats.org/officeDocument/2006/relationships" xmlns:p="http://schemas.openxmlformats.org/presentationml/2006/main">
-  <p:cSld>
-    <p:spTree>
-      <p:nvGrpSpPr>
-        <p:cNvPr id="1" name=""/>
-        <p:cNvGrpSpPr/>
-        <p:nvPr/>
-      </p:nvGrpSpPr>
-      <p:grpSpPr>
-        <a:xfrm>
-          <a:off x="0" y="0"/>
-          <a:ext cx="0" cy="0"/>
-          <a:chOff x="0" y="0"/>
-          <a:chExt cx="0" cy="0"/>
-        </a:xfrm>
-      </p:grpSpPr>
-      <p:sp>
-        <p:nvSpPr>
-          <p:cNvPr id="11" name="Title 10">
-            <a:extLst>
-              <a:ext uri="{FF2B5EF4-FFF2-40B4-BE49-F238E27FC236}">
-                <a16:creationId xmlns:a16="http://schemas.microsoft.com/office/drawing/2014/main" id="{77BAD118-211A-F293-3AA9-B6C57E74F7C7}"/>
-              </a:ext>
-            </a:extLst>
-          </p:cNvPr>
-          <p:cNvSpPr>
-            <a:spLocks noGrp="1"/>
-          </p:cNvSpPr>
-          <p:nvPr>
-            <p:ph type="title"/>
-          </p:nvPr>
-        </p:nvSpPr>
-        <p:spPr/>
-        <p:txBody>
-          <a:bodyPr/>
-          <a:lstStyle/>
-          <a:p>
-            <a:r>
-              <a:rPr lang="en-US" dirty="0"/>
-              <a:t>Agenda</a:t>
-            </a:r>
-          </a:p>
-        </p:txBody>
-      </p:sp>
-      <p:sp>
-        <p:nvSpPr>
-          <p:cNvPr id="12" name="Text Placeholder 11">
-            <a:extLst>
-              <a:ext uri="{FF2B5EF4-FFF2-40B4-BE49-F238E27FC236}">
-                <a16:creationId xmlns:a16="http://schemas.microsoft.com/office/drawing/2014/main" id="{444F1713-7256-C24F-326F-748B2D04E93E}"/>
-              </a:ext>
-            </a:extLst>
-          </p:cNvPr>
-          <p:cNvSpPr>
-            <a:spLocks noGrp="1"/>
-          </p:cNvSpPr>
-          <p:nvPr>
-            <p:ph type="body" sz="quarter" idx="11"/>
-          </p:nvPr>
-        </p:nvSpPr>
-        <p:spPr/>
-        <p:txBody>
-          <a:bodyPr>
-            <a:normAutofit fontScale="77500" lnSpcReduction="20000"/>
-          </a:bodyPr>
-          <a:lstStyle/>
-          <a:p>
-            <a:pPr marL="571500" indent="-571500">
-              <a:lnSpc>
-                <a:spcPct val="100000"/>
-              </a:lnSpc>
-            </a:pPr>
-            <a:r>
-              <a:rPr lang="en-US" sz="3200" dirty="0"/>
-              <a:t>Foundations</a:t>
-            </a:r>
-          </a:p>
-          <a:p>
-            <a:pPr marL="571500" indent="-571500">
-              <a:lnSpc>
-                <a:spcPct val="100000"/>
-              </a:lnSpc>
-            </a:pPr>
-            <a:r>
-              <a:rPr lang="en-US" sz="3200" dirty="0"/>
-              <a:t>The lifecycle</a:t>
-            </a:r>
-          </a:p>
-          <a:p>
-            <a:pPr marL="571500" indent="-571500">
-              <a:lnSpc>
-                <a:spcPct val="100000"/>
-              </a:lnSpc>
-            </a:pPr>
-            <a:r>
-              <a:rPr lang="en-US" sz="3200" dirty="0"/>
-              <a:t>Guardrails</a:t>
-            </a:r>
-          </a:p>
-          <a:p>
-            <a:pPr marL="571500" indent="-571500">
-              <a:lnSpc>
-                <a:spcPct val="100000"/>
-              </a:lnSpc>
-            </a:pPr>
-            <a:r>
-              <a:rPr lang="en-US" sz="3200" dirty="0"/>
-              <a:t>Skills</a:t>
-            </a:r>
-          </a:p>
-          <a:p>
-            <a:pPr marL="571500" indent="-571500">
-              <a:lnSpc>
-                <a:spcPct val="100000"/>
-              </a:lnSpc>
-            </a:pPr>
-            <a:r>
-              <a:rPr lang="en-US" sz="3200" dirty="0"/>
-              <a:t>Orchestration</a:t>
-            </a:r>
-          </a:p>
-          <a:p>
-            <a:pPr marL="571500" indent="-571500">
-              <a:lnSpc>
-                <a:spcPct val="100000"/>
-              </a:lnSpc>
-            </a:pPr>
-            <a:r>
-              <a:rPr lang="en-US" sz="3200" dirty="0"/>
-              <a:t>Auditing &amp; security</a:t>
-            </a:r>
-          </a:p>
-          <a:p>
-            <a:pPr marL="571500" indent="-571500">
-              <a:lnSpc>
-                <a:spcPct val="100000"/>
-              </a:lnSpc>
-            </a:pPr>
-            <a:r>
-              <a:rPr lang="en-US" sz="3200" dirty="0"/>
-              <a:t>Team health</a:t>
-            </a:r>
-          </a:p>
-          <a:p>
-            <a:pPr marL="571500" indent="-571500">
-              <a:lnSpc>
-                <a:spcPct val="100000"/>
-              </a:lnSpc>
-            </a:pPr>
-            <a:r>
-              <a:rPr lang="en-US" sz="3200" dirty="0"/>
-              <a:t>Economics</a:t>
-            </a:r>
-          </a:p>
-          <a:p>
-            <a:pPr marL="571500" indent="-571500">
-              <a:lnSpc>
-                <a:spcPct val="100000"/>
-              </a:lnSpc>
-            </a:pPr>
-            <a:r>
-              <a:rPr lang="en-US" sz="3200" dirty="0"/>
-              <a:t>Limits</a:t>
-            </a:r>
-          </a:p>
-          <a:p>
-            <a:pPr marL="571500" indent="-571500">
-              <a:lnSpc>
-                <a:spcPct val="100000"/>
-              </a:lnSpc>
-            </a:pPr>
-            <a:r>
-              <a:rPr lang="en-US" sz="3200" dirty="0"/>
-              <a:t>Closing</a:t>
-            </a:r>
-          </a:p>
-        </p:txBody>
-      </p:sp>
-    </p:spTree>
-    <p:extLst>
-      <p:ext uri="{BB962C8B-B14F-4D97-AF65-F5344CB8AC3E}">
-        <p14:creationId xmlns:p14="http://schemas.microsoft.com/office/powerpoint/2010/main" val="147381059"/>
-      </p:ext>
-    </p:extLst>
-  </p:cSld>
-  <p:clrMapOvr>
-    <a:masterClrMapping/>
-  </p:clrMapOvr>
-</p:sld>
-</file>
-
-<file path=ppt/slides/slide20.xml><?xml version="1.0" encoding="utf-8"?>
-<p:sld xmlns:a="http://schemas.openxmlformats.org/drawingml/2006/main" xmlns:r="http://schemas.openxmlformats.org/officeDocument/2006/relationships" xmlns:p="http://schemas.openxmlformats.org/presentationml/2006/main">
-  <p:cSld>
-    <p:spTree>
-      <p:nvGrpSpPr>
-        <p:cNvPr id="1" name=""/>
-        <p:cNvGrpSpPr/>
-        <p:nvPr/>
-      </p:nvGrpSpPr>
-      <p:grpSpPr>
-        <a:xfrm>
-          <a:off x="0" y="0"/>
-          <a:ext cx="0" cy="0"/>
-          <a:chOff x="0" y="0"/>
-          <a:chExt cx="0" cy="0"/>
-        </a:xfrm>
-      </p:grpSpPr>
-      <p:sp>
-        <p:nvSpPr>
-          <p:cNvPr id="5" name="Title 4">
-            <a:extLst>
-              <a:ext uri="{FF2B5EF4-FFF2-40B4-BE49-F238E27FC236}">
-                <a16:creationId xmlns:a16="http://schemas.microsoft.com/office/drawing/2014/main" id="{2F76A2A9-483B-FC56-BB52-1E6E204E72B2}"/>
-              </a:ext>
-            </a:extLst>
-          </p:cNvPr>
-          <p:cNvSpPr>
-            <a:spLocks noGrp="1"/>
-          </p:cNvSpPr>
-          <p:nvPr>
-            <p:ph type="title"/>
-          </p:nvPr>
-        </p:nvSpPr>
-        <p:spPr/>
-        <p:txBody>
-          <a:bodyPr>
-            <a:normAutofit/>
-          </a:bodyPr>
-          <a:lstStyle/>
-          <a:p>
-            <a:r>
-              <a:rPr lang="en-US" dirty="0"/>
-              <a:t>Why Separate Roles at All</a:t>
-            </a:r>
-          </a:p>
-        </p:txBody>
-      </p:sp>
-      <p:sp>
-        <p:nvSpPr>
-          <p:cNvPr id="6" name="Text Placeholder 5">
-            <a:extLst>
-              <a:ext uri="{FF2B5EF4-FFF2-40B4-BE49-F238E27FC236}">
-                <a16:creationId xmlns:a16="http://schemas.microsoft.com/office/drawing/2014/main" id="{37962287-FA7C-C8FD-5531-68A2FFAD38FD}"/>
-              </a:ext>
-            </a:extLst>
-          </p:cNvPr>
-          <p:cNvSpPr>
-            <a:spLocks noGrp="1"/>
-          </p:cNvSpPr>
-          <p:nvPr>
-            <p:ph type="body" sz="quarter" idx="11"/>
-          </p:nvPr>
-        </p:nvSpPr>
-        <p:spPr/>
-        <p:txBody>
-          <a:bodyPr>
-            <a:normAutofit fontScale="74284" lnSpcReduction="20000"/>
-          </a:bodyPr>
-          <a:lstStyle/>
-          <a:p>
-            <a:pPr marL="571500" indent="-571500"/>
-            <a:r>
-              <a:rPr lang="en-US" dirty="0"/>
-              <a:t>One agent doing everything blurs the line between planning and execution</a:t>
-            </a:r>
-          </a:p>
-          <a:p>
-            <a:pPr marL="571500" indent="-571500"/>
-            <a:r>
-              <a:rPr lang="en-US" dirty="0"/>
-              <a:t>Separation makes failures attributable to a specific stage</a:t>
-            </a:r>
-          </a:p>
-          <a:p>
-            <a:pPr marL="571500" indent="-571500"/>
-            <a:r>
-              <a:rPr lang="en-US" dirty="0"/>
-              <a:t>Each role gets narrower permissions — least privilege by design</a:t>
-            </a:r>
-          </a:p>
-          <a:p>
-            <a:pPr marL="571500" indent="-571500"/>
-            <a:r>
-              <a:rPr lang="en-US" dirty="0"/>
-              <a:t>A planner that can’t write code can’t fix its own bad plan</a:t>
-            </a:r>
-          </a:p>
-          <a:p>
-            <a:pPr marL="571500" indent="-571500"/>
-            <a:r>
-              <a:rPr lang="en-US" dirty="0"/>
-              <a:t>Role boundaries are where guardrails and logging get inserted</a:t>
-            </a:r>
-          </a:p>
-          <a:p>
-            <a:pPr marL="571500" indent="-571500"/>
-            <a:r>
-              <a:rPr lang="en-US" dirty="0"/>
-              <a:t>Mirrors separation of duties in any regulated workflow</a:t>
-            </a:r>
-          </a:p>
-        </p:txBody>
-      </p:sp>
-    </p:spTree>
-    <p:extLst>
-      <p:ext uri="{BB962C8B-B14F-4D97-AF65-F5344CB8AC3E}">
-        <p14:creationId xmlns:p14="http://schemas.microsoft.com/office/powerpoint/2010/main" val="2161850691"/>
-      </p:ext>
-    </p:extLst>
-  </p:cSld>
-  <p:clrMapOvr>
-    <a:masterClrMapping/>
-  </p:clrMapOvr>
-</p:sld>
-</file>
-
 <file path=ppt/slides/slide21.xml><?xml version="1.0" encoding="utf-8"?>
 <p:sld xmlns:a="http://schemas.openxmlformats.org/drawingml/2006/main" xmlns:r="http://schemas.openxmlformats.org/officeDocument/2006/relationships" xmlns:p="http://schemas.openxmlformats.org/presentationml/2006/main">
   <p:cSld>
@@ -8217,7 +8270,7 @@
           <a:p>
             <a:r>
               <a:rPr lang="en-US" dirty="0"/>
-              <a:t>The Four Roles</a:t>
+              <a:t>Why Separate Roles at All</a:t>
             </a:r>
           </a:p>
         </p:txBody>
@@ -8241,72 +8294,49 @@
         <p:spPr/>
         <p:txBody>
           <a:bodyPr>
-            <a:normAutofit fontScale="88158" lnSpcReduction="10000"/>
+            <a:normAutofit fontScale="74284" lnSpcReduction="20000"/>
           </a:bodyPr>
           <a:lstStyle/>
           <a:p>
             <a:pPr marL="571500" indent="-571500"/>
             <a:r>
-              <a:rPr lang="en-US" b="1" dirty="0"/>
-              <a:t>Planner</a:t>
-            </a:r>
-            <a:r>
-              <a:rPr lang="en-US" dirty="0"/>
-              <a:t>: breaks a goal into steps, outputs a task list</a:t>
-            </a:r>
-          </a:p>
-          <a:p>
-            <a:pPr lvl="1"/>
-            <a:r>
-              <a:rPr lang="en-US" dirty="0"/>
-              <a:t>Never touches code directly</a:t>
-            </a:r>
-          </a:p>
-          <a:p>
-            <a:pPr marL="571500" indent="-571500"/>
-            <a:r>
-              <a:rPr lang="en-US" b="1" dirty="0"/>
-              <a:t>Executor</a:t>
-            </a:r>
-            <a:r>
-              <a:rPr lang="en-US" dirty="0"/>
-              <a:t>: writes code in a scoped worktree, small commits</a:t>
-            </a:r>
-          </a:p>
-          <a:p>
-            <a:pPr lvl="1"/>
-            <a:r>
-              <a:rPr lang="en-US" dirty="0"/>
-              <a:t>Job ends at “code exists,” not “code is safe”</a:t>
-            </a:r>
-          </a:p>
-          <a:p>
-            <a:pPr marL="571500" indent="-571500"/>
-            <a:r>
-              <a:rPr lang="en-US" b="1" dirty="0"/>
-              <a:t>Tooler</a:t>
-            </a:r>
-            <a:r>
-              <a:rPr lang="en-US" dirty="0"/>
-              <a:t>: runs tests, linters, builds — bridges written to proven</a:t>
-            </a:r>
-          </a:p>
-          <a:p>
-            <a:pPr marL="571500" indent="-571500"/>
-            <a:r>
-              <a:rPr lang="en-US" b="1" dirty="0"/>
-              <a:t>Auditor</a:t>
-            </a:r>
-            <a:r>
-              <a:rPr lang="en-US" dirty="0"/>
-              <a:t>: reviews the full trail for chained risk</a:t>
-            </a:r>
-          </a:p>
-          <a:p>
-            <a:pPr lvl="1"/>
-            <a:r>
-              <a:rPr lang="en-US" dirty="0"/>
-              <a:t>No auditor sign-off, no merge</a:t>
+              <a:rPr lang="en-US" dirty="0"/>
+              <a:t>One agent doing everything blurs the line between planning and execution</a:t>
+            </a:r>
+          </a:p>
+          <a:p>
+            <a:pPr marL="571500" indent="-571500"/>
+            <a:r>
+              <a:rPr lang="en-US" dirty="0"/>
+              <a:t>Separation makes failures attributable to a specific stage</a:t>
+            </a:r>
+          </a:p>
+          <a:p>
+            <a:pPr marL="571500" indent="-571500"/>
+            <a:r>
+              <a:rPr lang="en-US" dirty="0"/>
+              <a:t>Each role gets narrower permissions — least privilege by design</a:t>
+            </a:r>
+          </a:p>
+          <a:p>
+            <a:pPr marL="571500" indent="-571500"/>
+            <a:r>
+              <a:rPr lang="en-US" dirty="0"/>
+              <a:t>A planner that can’t write code can’t fix its own bad plan</a:t>
+            </a:r>
+          </a:p>
+          <a:p>
+            <a:pPr marL="571500" indent="-571500"/>
+            <a:r>
+              <a:rPr lang="en-US" dirty="0"/>
+              <a:t>Role boundaries are where guardrails and logging get inserted</a:t>
+            </a:r>
+          </a:p>
+          <a:p>
+            <a:pPr marL="571500" indent="-571500"/>
+            <a:r>
+              <a:rPr lang="en-US" dirty="0"/>
+              <a:t>Mirrors separation of duties in any regulated workflow</a:t>
             </a:r>
           </a:p>
         </p:txBody>
@@ -8366,7 +8396,7 @@
           <a:p>
             <a:r>
               <a:rPr lang="en-US" dirty="0"/>
-              <a:t>Handoff Failure Modes</a:t>
+              <a:t>The Four Roles</a:t>
             </a:r>
           </a:p>
         </p:txBody>
@@ -8390,61 +8420,72 @@
         <p:spPr/>
         <p:txBody>
           <a:bodyPr>
-            <a:normAutofit fontScale="92116"/>
+            <a:normAutofit fontScale="88158" lnSpcReduction="10000"/>
           </a:bodyPr>
           <a:lstStyle/>
           <a:p>
             <a:pPr marL="571500" indent="-571500"/>
             <a:r>
               <a:rPr lang="en-US" b="1" dirty="0"/>
-              <a:t>Plan drift</a:t>
-            </a:r>
-            <a:r>
-              <a:rPr lang="en-US" dirty="0"/>
-              <a:t>: executor quietly solves a different problem</a:t>
+              <a:t>Planner</a:t>
+            </a:r>
+            <a:r>
+              <a:rPr lang="en-US" dirty="0"/>
+              <a:t>: breaks a goal into steps, outputs a task list</a:t>
+            </a:r>
+          </a:p>
+          <a:p>
+            <a:pPr lvl="1"/>
+            <a:r>
+              <a:rPr lang="en-US" dirty="0"/>
+              <a:t>Never touches code directly</a:t>
             </a:r>
           </a:p>
           <a:p>
             <a:pPr marL="571500" indent="-571500"/>
             <a:r>
               <a:rPr lang="en-US" b="1" dirty="0"/>
-              <a:t>Context loss</a:t>
-            </a:r>
-            <a:r>
-              <a:rPr lang="en-US" dirty="0"/>
-              <a:t>: the next role lacks the “why”</a:t>
-            </a:r>
-          </a:p>
-          <a:p>
-            <a:pPr marL="1257300" lvl="1" indent="-571500"/>
-            <a:r>
-              <a:rPr lang="en-US" dirty="0"/>
-              <a:t>Silent tool failure reported upstream as success</a:t>
-            </a:r>
-          </a:p>
-          <a:p>
-            <a:pPr marL="1257300" lvl="1" indent="-571500"/>
-            <a:r>
-              <a:rPr lang="en-US" dirty="0"/>
-              <a:t>Auditor rubber-stamps once everything technically passes</a:t>
-            </a:r>
-          </a:p>
-          <a:p>
-            <a:pPr marL="1257300" lvl="1" indent="-571500"/>
-            <a:r>
-              <a:rPr lang="en-US" dirty="0"/>
-              <a:t>Infinite loop: reject, replan, nothing converges</a:t>
+              <a:t>Executor</a:t>
+            </a:r>
+            <a:r>
+              <a:rPr lang="en-US" dirty="0"/>
+              <a:t>: writes code in a scoped worktree, small commits</a:t>
+            </a:r>
+          </a:p>
+          <a:p>
+            <a:pPr lvl="1"/>
+            <a:r>
+              <a:rPr lang="en-US" dirty="0"/>
+              <a:t>Job ends at “code exists,” not “code is safe”</a:t>
             </a:r>
           </a:p>
           <a:p>
             <a:pPr marL="571500" indent="-571500"/>
             <a:r>
               <a:rPr lang="en-US" b="1" dirty="0"/>
-              <a:t>Fix</a:t>
-            </a:r>
-            <a:r>
-              <a:rPr lang="en-US" dirty="0"/>
-              <a:t>: structured handoffs, retry budgets, escalation to humans</a:t>
+              <a:t>Tooler</a:t>
+            </a:r>
+            <a:r>
+              <a:rPr lang="en-US" dirty="0"/>
+              <a:t>: runs tests, linters, builds — bridges written to proven</a:t>
+            </a:r>
+          </a:p>
+          <a:p>
+            <a:pPr marL="571500" indent="-571500"/>
+            <a:r>
+              <a:rPr lang="en-US" b="1" dirty="0"/>
+              <a:t>Auditor</a:t>
+            </a:r>
+            <a:r>
+              <a:rPr lang="en-US" dirty="0"/>
+              <a:t>: reviews the full trail for chained risk</a:t>
+            </a:r>
+          </a:p>
+          <a:p>
+            <a:pPr lvl="1"/>
+            <a:r>
+              <a:rPr lang="en-US" dirty="0"/>
+              <a:t>No auditor sign-off, no merge</a:t>
             </a:r>
           </a:p>
         </p:txBody>
@@ -8504,7 +8545,7 @@
           <a:p>
             <a:r>
               <a:rPr lang="en-US" dirty="0"/>
-              <a:t>Gastown: Orchestrating Agents at Scale</a:t>
+              <a:t>Handoff Failure Modes</a:t>
             </a:r>
           </a:p>
         </p:txBody>
@@ -8528,62 +8569,61 @@
         <p:spPr/>
         <p:txBody>
           <a:bodyPr>
-            <a:normAutofit fontScale="81784" lnSpcReduction="20000"/>
+            <a:normAutofit fontScale="92116"/>
           </a:bodyPr>
           <a:lstStyle/>
           <a:p>
             <a:pPr marL="571500" indent="-571500"/>
             <a:r>
-              <a:rPr lang="en-US" dirty="0"/>
-              <a:t>Gastown: open-source workspace manager for coding agents</a:t>
-            </a:r>
-          </a:p>
-          <a:p>
-            <a:pPr lvl="1"/>
-            <a:r>
-              <a:rPr lang="en-US" i="1" dirty="0"/>
-              <a:t>Built by Steve Yegge, </a:t>
-            </a:r>
-            <a:r>
-              <a:rPr lang="en-US" i="1" dirty="0">
-                <a:latin typeface="Consolas"/>
-              </a:rPr>
-              <a:t>gastownhall.ai</a:t>
-            </a:r>
-          </a:p>
-          <a:p>
-            <a:pPr marL="571500" indent="-571500"/>
-            <a:r>
-              <a:rPr lang="en-US" dirty="0"/>
-              <a:t>Coordinates Claude Code, Codex, Copilot, Gemini</a:t>
-            </a:r>
-          </a:p>
-          <a:p>
-            <a:pPr marL="571500" indent="-571500"/>
-            <a:r>
-              <a:rPr lang="en-US" dirty="0"/>
-              <a:t>Beads, its issue tracker, persists work state across restarts</a:t>
-            </a:r>
-          </a:p>
-          <a:p>
-            <a:pPr marL="571500" indent="-571500"/>
-            <a:r>
-              <a:rPr lang="en-US" dirty="0"/>
-              <a:t>Routes finished work through a verification-gated merge queue</a:t>
-            </a:r>
-          </a:p>
-          <a:p>
-            <a:pPr marL="571500" indent="-571500"/>
-            <a:r>
-              <a:rPr lang="en-US" dirty="0"/>
-              <a:t>Used by Fortune 100 teams, still needs heavy oversight</a:t>
-            </a:r>
-          </a:p>
-          <a:p>
-            <a:pPr marL="571500" indent="-571500"/>
-            <a:r>
-              <a:rPr lang="en-US" dirty="0"/>
-              <a:t>Read it critically: this is the builder’s own description</a:t>
+              <a:rPr lang="en-US" b="1" dirty="0"/>
+              <a:t>Plan drift</a:t>
+            </a:r>
+            <a:r>
+              <a:rPr lang="en-US" dirty="0"/>
+              <a:t>: executor quietly solves a different problem</a:t>
+            </a:r>
+          </a:p>
+          <a:p>
+            <a:pPr marL="571500" indent="-571500"/>
+            <a:r>
+              <a:rPr lang="en-US" b="1" dirty="0"/>
+              <a:t>Context loss</a:t>
+            </a:r>
+            <a:r>
+              <a:rPr lang="en-US" dirty="0"/>
+              <a:t>: the next role lacks the “why”</a:t>
+            </a:r>
+          </a:p>
+          <a:p>
+            <a:pPr marL="1257300" lvl="1" indent="-571500"/>
+            <a:r>
+              <a:rPr lang="en-US" dirty="0"/>
+              <a:t>Silent tool failure reported upstream as success</a:t>
+            </a:r>
+          </a:p>
+          <a:p>
+            <a:pPr marL="1257300" lvl="1" indent="-571500"/>
+            <a:r>
+              <a:rPr lang="en-US" dirty="0"/>
+              <a:t>Auditor rubber-stamps once everything technically passes</a:t>
+            </a:r>
+          </a:p>
+          <a:p>
+            <a:pPr marL="1257300" lvl="1" indent="-571500"/>
+            <a:r>
+              <a:rPr lang="en-US" dirty="0"/>
+              <a:t>Infinite loop: reject, replan, nothing converges</a:t>
+            </a:r>
+          </a:p>
+          <a:p>
+            <a:pPr marL="571500" indent="-571500"/>
+            <a:r>
+              <a:rPr lang="en-US" b="1" dirty="0"/>
+              <a:t>Fix</a:t>
+            </a:r>
+            <a:r>
+              <a:rPr lang="en-US" dirty="0"/>
+              <a:t>: structured handoffs, retry budgets, escalation to humans</a:t>
             </a:r>
           </a:p>
         </p:txBody>
@@ -8602,6 +8642,145 @@
 </file>
 
 <file path=ppt/slides/slide24.xml><?xml version="1.0" encoding="utf-8"?>
+<p:sld xmlns:a="http://schemas.openxmlformats.org/drawingml/2006/main" xmlns:r="http://schemas.openxmlformats.org/officeDocument/2006/relationships" xmlns:p="http://schemas.openxmlformats.org/presentationml/2006/main">
+  <p:cSld>
+    <p:spTree>
+      <p:nvGrpSpPr>
+        <p:cNvPr id="1" name=""/>
+        <p:cNvGrpSpPr/>
+        <p:nvPr/>
+      </p:nvGrpSpPr>
+      <p:grpSpPr>
+        <a:xfrm>
+          <a:off x="0" y="0"/>
+          <a:ext cx="0" cy="0"/>
+          <a:chOff x="0" y="0"/>
+          <a:chExt cx="0" cy="0"/>
+        </a:xfrm>
+      </p:grpSpPr>
+      <p:sp>
+        <p:nvSpPr>
+          <p:cNvPr id="5" name="Title 4">
+            <a:extLst>
+              <a:ext uri="{FF2B5EF4-FFF2-40B4-BE49-F238E27FC236}">
+                <a16:creationId xmlns:a16="http://schemas.microsoft.com/office/drawing/2014/main" id="{2F76A2A9-483B-FC56-BB52-1E6E204E72B2}"/>
+              </a:ext>
+            </a:extLst>
+          </p:cNvPr>
+          <p:cNvSpPr>
+            <a:spLocks noGrp="1"/>
+          </p:cNvSpPr>
+          <p:nvPr>
+            <p:ph type="title"/>
+          </p:nvPr>
+        </p:nvSpPr>
+        <p:spPr/>
+        <p:txBody>
+          <a:bodyPr>
+            <a:normAutofit/>
+          </a:bodyPr>
+          <a:lstStyle/>
+          <a:p>
+            <a:r>
+              <a:rPr lang="en-US" dirty="0"/>
+              <a:t>Gastown: Orchestrating Agents at Scale</a:t>
+            </a:r>
+          </a:p>
+        </p:txBody>
+      </p:sp>
+      <p:sp>
+        <p:nvSpPr>
+          <p:cNvPr id="6" name="Text Placeholder 5">
+            <a:extLst>
+              <a:ext uri="{FF2B5EF4-FFF2-40B4-BE49-F238E27FC236}">
+                <a16:creationId xmlns:a16="http://schemas.microsoft.com/office/drawing/2014/main" id="{37962287-FA7C-C8FD-5531-68A2FFAD38FD}"/>
+              </a:ext>
+            </a:extLst>
+          </p:cNvPr>
+          <p:cNvSpPr>
+            <a:spLocks noGrp="1"/>
+          </p:cNvSpPr>
+          <p:nvPr>
+            <p:ph type="body" sz="quarter" idx="11"/>
+          </p:nvPr>
+        </p:nvSpPr>
+        <p:spPr/>
+        <p:txBody>
+          <a:bodyPr>
+            <a:normAutofit fontScale="81784" lnSpcReduction="20000"/>
+          </a:bodyPr>
+          <a:lstStyle/>
+          <a:p>
+            <a:pPr marL="571500" indent="-571500"/>
+            <a:r>
+              <a:rPr lang="en-US" dirty="0"/>
+              <a:t>Gastown: open-source workspace manager for coding agents</a:t>
+            </a:r>
+          </a:p>
+          <a:p>
+            <a:pPr lvl="1"/>
+            <a:r>
+              <a:rPr lang="en-US" i="1" dirty="0"/>
+              <a:t>Built by Steve Yegge, </a:t>
+            </a:r>
+            <a:r>
+              <a:rPr lang="en-US" i="1" dirty="0">
+                <a:latin typeface="Consolas"/>
+              </a:rPr>
+              <a:t>gastownhall.ai</a:t>
+            </a:r>
+          </a:p>
+          <a:p>
+            <a:pPr marL="571500" indent="-571500"/>
+            <a:r>
+              <a:rPr lang="en-US" dirty="0"/>
+              <a:t>Coordinates Claude Code, Codex, Copilot, Gemini</a:t>
+            </a:r>
+          </a:p>
+          <a:p>
+            <a:pPr marL="571500" indent="-571500"/>
+            <a:r>
+              <a:rPr lang="en-US" dirty="0"/>
+              <a:t>Beads, its issue tracker, persists work state across restarts</a:t>
+            </a:r>
+          </a:p>
+          <a:p>
+            <a:pPr marL="571500" indent="-571500"/>
+            <a:r>
+              <a:rPr lang="en-US" dirty="0"/>
+              <a:t>Routes finished work through a verification-gated merge queue</a:t>
+            </a:r>
+          </a:p>
+          <a:p>
+            <a:pPr marL="571500" indent="-571500"/>
+            <a:r>
+              <a:rPr lang="en-US" dirty="0"/>
+              <a:t>Used by Fortune 100 teams, still needs heavy oversight</a:t>
+            </a:r>
+          </a:p>
+          <a:p>
+            <a:pPr marL="571500" indent="-571500"/>
+            <a:r>
+              <a:rPr lang="en-US" dirty="0"/>
+              <a:t>Read it critically: this is the builder’s own description</a:t>
+            </a:r>
+          </a:p>
+        </p:txBody>
+      </p:sp>
+    </p:spTree>
+    <p:extLst>
+      <p:ext uri="{BB962C8B-B14F-4D97-AF65-F5344CB8AC3E}">
+        <p14:creationId xmlns:p14="http://schemas.microsoft.com/office/powerpoint/2010/main" val="2161850691"/>
+      </p:ext>
+    </p:extLst>
+  </p:cSld>
+  <p:clrMapOvr>
+    <a:masterClrMapping/>
+  </p:clrMapOvr>
+</p:sld>
+</file>
+
+<file path=ppt/slides/slide25.xml><?xml version="1.0" encoding="utf-8"?>
 <p:sld xmlns:a="http://schemas.openxmlformats.org/drawingml/2006/main" xmlns:r="http://schemas.openxmlformats.org/officeDocument/2006/relationships" xmlns:p="http://schemas.openxmlformats.org/presentationml/2006/main">
   <p:cSld>
     <p:spTree>
@@ -8720,7 +8899,7 @@
 </p:sld>
 </file>
 
-<file path=ppt/slides/slide25.xml><?xml version="1.0" encoding="utf-8"?>
+<file path=ppt/slides/slide26.xml><?xml version="1.0" encoding="utf-8"?>
 <p:sld xmlns:a="http://schemas.openxmlformats.org/drawingml/2006/main" xmlns:r="http://schemas.openxmlformats.org/officeDocument/2006/relationships" xmlns:p="http://schemas.openxmlformats.org/presentationml/2006/main">
   <p:cSld>
     <p:spTree>
@@ -8890,7 +9069,7 @@
 </p:sld>
 </file>
 
-<file path=ppt/slides/slide26.xml><?xml version="1.0" encoding="utf-8"?>
+<file path=ppt/slides/slide27.xml><?xml version="1.0" encoding="utf-8"?>
 <p:sld xmlns:a="http://schemas.openxmlformats.org/drawingml/2006/main" xmlns:r="http://schemas.openxmlformats.org/officeDocument/2006/relationships" xmlns:p="http://schemas.openxmlformats.org/presentationml/2006/main">
   <p:cSld>
     <p:spTree>
@@ -9006,132 +9185,6 @@
 </p:sld>
 </file>
 
-<file path=ppt/slides/slide27.xml><?xml version="1.0" encoding="utf-8"?>
-<p:sld xmlns:a="http://schemas.openxmlformats.org/drawingml/2006/main" xmlns:r="http://schemas.openxmlformats.org/officeDocument/2006/relationships" xmlns:p="http://schemas.openxmlformats.org/presentationml/2006/main">
-  <p:cSld>
-    <p:spTree>
-      <p:nvGrpSpPr>
-        <p:cNvPr id="1" name=""/>
-        <p:cNvGrpSpPr/>
-        <p:nvPr/>
-      </p:nvGrpSpPr>
-      <p:grpSpPr>
-        <a:xfrm>
-          <a:off x="0" y="0"/>
-          <a:ext cx="0" cy="0"/>
-          <a:chOff x="0" y="0"/>
-          <a:chExt cx="0" cy="0"/>
-        </a:xfrm>
-      </p:grpSpPr>
-      <p:sp>
-        <p:nvSpPr>
-          <p:cNvPr id="5" name="Title 4">
-            <a:extLst>
-              <a:ext uri="{FF2B5EF4-FFF2-40B4-BE49-F238E27FC236}">
-                <a16:creationId xmlns:a16="http://schemas.microsoft.com/office/drawing/2014/main" id="{2F76A2A9-483B-FC56-BB52-1E6E204E72B2}"/>
-              </a:ext>
-            </a:extLst>
-          </p:cNvPr>
-          <p:cNvSpPr>
-            <a:spLocks noGrp="1"/>
-          </p:cNvSpPr>
-          <p:nvPr>
-            <p:ph type="title"/>
-          </p:nvPr>
-        </p:nvSpPr>
-        <p:spPr/>
-        <p:txBody>
-          <a:bodyPr>
-            <a:normAutofit/>
-          </a:bodyPr>
-          <a:lstStyle/>
-          <a:p>
-            <a:r>
-              <a:rPr lang="en-US" dirty="0"/>
-              <a:t>The Engineer’s Job: Shrink the Workspace</a:t>
-            </a:r>
-          </a:p>
-        </p:txBody>
-      </p:sp>
-      <p:sp>
-        <p:nvSpPr>
-          <p:cNvPr id="6" name="Text Placeholder 5">
-            <a:extLst>
-              <a:ext uri="{FF2B5EF4-FFF2-40B4-BE49-F238E27FC236}">
-                <a16:creationId xmlns:a16="http://schemas.microsoft.com/office/drawing/2014/main" id="{37962287-FA7C-C8FD-5531-68A2FFAD38FD}"/>
-              </a:ext>
-            </a:extLst>
-          </p:cNvPr>
-          <p:cNvSpPr>
-            <a:spLocks noGrp="1"/>
-          </p:cNvSpPr>
-          <p:nvPr>
-            <p:ph type="body" sz="quarter" idx="11"/>
-          </p:nvPr>
-        </p:nvSpPr>
-        <p:spPr/>
-        <p:txBody>
-          <a:bodyPr>
-            <a:normAutofit fontScale="80658" lnSpcReduction="10000"/>
-          </a:bodyPr>
-          <a:lstStyle/>
-          <a:p>
-            <a:pPr marL="571500" indent="-571500"/>
-            <a:r>
-              <a:rPr lang="en-US" dirty="0"/>
-              <a:t>Our job: reshape the task to fit one of three shapes</a:t>
-            </a:r>
-          </a:p>
-          <a:p>
-            <a:pPr marL="571500" indent="-571500"/>
-            <a:r>
-              <a:rPr lang="en-US" dirty="0"/>
-              <a:t>Cheap failure: sandbox it, make retries free</a:t>
-            </a:r>
-          </a:p>
-          <a:p>
-            <a:pPr marL="571500" indent="-571500"/>
-            <a:r>
-              <a:rPr lang="en-US" dirty="0"/>
-              <a:t>Narrow and guardrailed: scope down, build the guardrail first</a:t>
-            </a:r>
-          </a:p>
-          <a:p>
-            <a:pPr marL="571500" indent="-571500"/>
-            <a:r>
-              <a:rPr lang="en-US" dirty="0"/>
-              <a:t>Rigor required: write the spec, make validation cheap</a:t>
-            </a:r>
-          </a:p>
-          <a:p>
-            <a:pPr marL="571500" indent="-571500"/>
-            <a:r>
-              <a:rPr lang="en-US" dirty="0"/>
-              <a:t>This is workspace engineering, not prompt engineering</a:t>
-            </a:r>
-          </a:p>
-          <a:p>
-            <a:pPr marL="571500" indent="-571500"/>
-            <a:r>
-              <a:rPr lang="en-US" dirty="0"/>
-              <a:t>Can’t shrink it yet? Don’t autonomize it yet</a:t>
-            </a:r>
-          </a:p>
-        </p:txBody>
-      </p:sp>
-    </p:spTree>
-    <p:extLst>
-      <p:ext uri="{BB962C8B-B14F-4D97-AF65-F5344CB8AC3E}">
-        <p14:creationId xmlns:p14="http://schemas.microsoft.com/office/powerpoint/2010/main" val="2161850691"/>
-      </p:ext>
-    </p:extLst>
-  </p:cSld>
-  <p:clrMapOvr>
-    <a:masterClrMapping/>
-  </p:clrMapOvr>
-</p:sld>
-</file>
-
 <file path=ppt/slides/slide28.xml><?xml version="1.0" encoding="utf-8"?>
 <p:sld xmlns:a="http://schemas.openxmlformats.org/drawingml/2006/main" xmlns:r="http://schemas.openxmlformats.org/officeDocument/2006/relationships" xmlns:p="http://schemas.openxmlformats.org/presentationml/2006/main">
   <p:cSld>
@@ -9174,7 +9227,7 @@
           <a:p>
             <a:r>
               <a:rPr lang="en-US" dirty="0"/>
-              <a:t>Where Most Teams Actually Sit</a:t>
+              <a:t>The Engineer’s Job: Shrink the Workspace</a:t>
             </a:r>
           </a:p>
         </p:txBody>
@@ -9198,56 +9251,49 @@
         <p:spPr/>
         <p:txBody>
           <a:bodyPr>
-            <a:normAutofit fontScale="84754" lnSpcReduction="20000"/>
+            <a:normAutofit fontScale="80658" lnSpcReduction="10000"/>
           </a:bodyPr>
           <a:lstStyle/>
           <a:p>
             <a:pPr marL="571500" indent="-571500"/>
             <a:r>
               <a:rPr lang="en-US" dirty="0"/>
-              <a:t>91% of enterprises deploy agents in some form</a:t>
-            </a:r>
-          </a:p>
-          <a:p>
-            <a:pPr lvl="1"/>
-            <a:r>
-              <a:rPr lang="en-US" dirty="0"/>
-              <a:t>Only 42% trust agents to lead work (Anthropic, 2026)</a:t>
-            </a:r>
-          </a:p>
-          <a:p>
-            <a:pPr marL="571500" indent="-571500"/>
-            <a:r>
-              <a:rPr lang="en-US" dirty="0"/>
-              <a:t>“Deploy” is a low bar — not the same as production</a:t>
-            </a:r>
-          </a:p>
-          <a:p>
-            <a:pPr marL="571500" indent="-571500"/>
-            <a:r>
-              <a:rPr lang="en-US" dirty="0"/>
-              <a:t>The gap between deployed and trusted is the real story</a:t>
-            </a:r>
-          </a:p>
-          <a:p>
-            <a:pPr marL="571500" indent="-571500"/>
-            <a:r>
-              <a:rPr lang="en-US" dirty="0"/>
-              <a:t>Regulated industries cluster low deliberately — but not always</a:t>
-            </a:r>
-          </a:p>
-          <a:p>
-            <a:pPr lvl="1"/>
-            <a:r>
-              <a:rPr lang="en-US" dirty="0"/>
-              <a:t>Goldman Sachs, JPMorgan run agentic coding at scale</a:t>
-            </a:r>
-          </a:p>
-          <a:p>
-            <a:pPr marL="571500" indent="-571500"/>
-            <a:r>
-              <a:rPr lang="en-US" dirty="0"/>
-              <a:t>The differentiator is governance, not model access</a:t>
+              <a:t>Our job: reshape the task to fit one of three shapes</a:t>
+            </a:r>
+          </a:p>
+          <a:p>
+            <a:pPr marL="571500" indent="-571500"/>
+            <a:r>
+              <a:rPr lang="en-US" dirty="0"/>
+              <a:t>Cheap failure: sandbox it, make retries free</a:t>
+            </a:r>
+          </a:p>
+          <a:p>
+            <a:pPr marL="571500" indent="-571500"/>
+            <a:r>
+              <a:rPr lang="en-US" dirty="0"/>
+              <a:t>Narrow and guardrailed: scope down, build the guardrail first</a:t>
+            </a:r>
+          </a:p>
+          <a:p>
+            <a:pPr marL="571500" indent="-571500"/>
+            <a:r>
+              <a:rPr lang="en-US" dirty="0"/>
+              <a:t>Rigor required: write the spec, make validation cheap</a:t>
+            </a:r>
+          </a:p>
+          <a:p>
+            <a:pPr marL="571500" indent="-571500"/>
+            <a:r>
+              <a:rPr lang="en-US" dirty="0"/>
+              <a:t>This is workspace engineering, not prompt engineering</a:t>
+            </a:r>
+          </a:p>
+          <a:p>
+            <a:pPr marL="571500" indent="-571500"/>
+            <a:r>
+              <a:rPr lang="en-US" dirty="0"/>
+              <a:t>Can’t shrink it yet? Don’t autonomize it yet</a:t>
             </a:r>
           </a:p>
         </p:txBody>
@@ -9307,7 +9353,7 @@
           <a:p>
             <a:r>
               <a:rPr lang="en-US" dirty="0"/>
-              <a:t>Auditing and Observability</a:t>
+              <a:t>Where Most Teams Actually Sit</a:t>
             </a:r>
           </a:p>
         </p:txBody>
@@ -9331,49 +9377,56 @@
         <p:spPr/>
         <p:txBody>
           <a:bodyPr>
-            <a:normAutofit fontScale="84616" lnSpcReduction="20000"/>
+            <a:normAutofit fontScale="84754" lnSpcReduction="20000"/>
           </a:bodyPr>
           <a:lstStyle/>
           <a:p>
             <a:pPr marL="571500" indent="-571500"/>
             <a:r>
               <a:rPr lang="en-US" dirty="0"/>
-              <a:t>Every AI action gets logged: prompt, tool call, result</a:t>
-            </a:r>
-          </a:p>
-          <a:p>
-            <a:pPr marL="571500" indent="-571500"/>
-            <a:r>
-              <a:rPr lang="en-US" dirty="0"/>
-              <a:t>Structured JSON, not free text, so it can replay</a:t>
-            </a:r>
-          </a:p>
-          <a:p>
-            <a:pPr marL="571500" indent="-571500"/>
-            <a:r>
-              <a:rPr lang="en-US" dirty="0"/>
-              <a:t>Audit trails answer who changed what, when, under which version</a:t>
-            </a:r>
-          </a:p>
-          <a:p>
-            <a:pPr marL="571500" indent="-571500"/>
-            <a:r>
-              <a:rPr lang="en-US" dirty="0"/>
-              <a:t>Auditors compare output against guardrail results, not just diffs</a:t>
-            </a:r>
-          </a:p>
-          <a:p>
-            <a:pPr marL="571500" indent="-571500"/>
-            <a:r>
-              <a:rPr lang="en-US" dirty="0"/>
-              <a:t>Retention windows matter: fintech audits often span years</a:t>
-            </a:r>
-          </a:p>
-          <a:p>
-            <a:pPr marL="571500" indent="-571500"/>
-            <a:r>
-              <a:rPr lang="en-US" dirty="0"/>
-              <a:t>Can’t reconstruct a decision? Can’t audit it</a:t>
+              <a:t>91% of enterprises deploy agents in some form</a:t>
+            </a:r>
+          </a:p>
+          <a:p>
+            <a:pPr lvl="1"/>
+            <a:r>
+              <a:rPr lang="en-US" dirty="0"/>
+              <a:t>Only 42% trust agents to lead work (Anthropic, 2026)</a:t>
+            </a:r>
+          </a:p>
+          <a:p>
+            <a:pPr marL="571500" indent="-571500"/>
+            <a:r>
+              <a:rPr lang="en-US" dirty="0"/>
+              <a:t>“Deploy” is a low bar — not the same as production</a:t>
+            </a:r>
+          </a:p>
+          <a:p>
+            <a:pPr marL="571500" indent="-571500"/>
+            <a:r>
+              <a:rPr lang="en-US" dirty="0"/>
+              <a:t>The gap between deployed and trusted is the real story</a:t>
+            </a:r>
+          </a:p>
+          <a:p>
+            <a:pPr marL="571500" indent="-571500"/>
+            <a:r>
+              <a:rPr lang="en-US" dirty="0"/>
+              <a:t>Regulated industries cluster low deliberately — but not always</a:t>
+            </a:r>
+          </a:p>
+          <a:p>
+            <a:pPr lvl="1"/>
+            <a:r>
+              <a:rPr lang="en-US" dirty="0"/>
+              <a:t>Goldman Sachs, JPMorgan run agentic coding at scale</a:t>
+            </a:r>
+          </a:p>
+          <a:p>
+            <a:pPr marL="571500" indent="-571500"/>
+            <a:r>
+              <a:rPr lang="en-US" dirty="0"/>
+              <a:t>The differentiator is governance, not model access</a:t>
             </a:r>
           </a:p>
         </p:txBody>
@@ -9699,7 +9752,7 @@
           <a:p>
             <a:r>
               <a:rPr lang="en-US" dirty="0"/>
-              <a:t>Replay and Root Cause</a:t>
+              <a:t>Auditing and Observability</a:t>
             </a:r>
           </a:p>
         </p:txBody>
@@ -9723,49 +9776,49 @@
         <p:spPr/>
         <p:txBody>
           <a:bodyPr>
-            <a:normAutofit fontScale="81703" lnSpcReduction="10000"/>
+            <a:normAutofit fontScale="84616" lnSpcReduction="20000"/>
           </a:bodyPr>
           <a:lstStyle/>
           <a:p>
             <a:pPr marL="571500" indent="-571500"/>
             <a:r>
               <a:rPr lang="en-US" dirty="0"/>
-              <a:t>Replay reruns the exact sequence behind a change</a:t>
-            </a:r>
-          </a:p>
-          <a:p>
-            <a:pPr marL="571500" indent="-571500"/>
-            <a:r>
-              <a:rPr lang="en-US" dirty="0"/>
-              <a:t>Nondeterminism makes exact replay hard</a:t>
-            </a:r>
-          </a:p>
-          <a:p>
-            <a:pPr marL="571500" indent="-571500"/>
-            <a:r>
-              <a:rPr lang="en-US" dirty="0"/>
-              <a:t>Log inputs, not just outputs</a:t>
-            </a:r>
-          </a:p>
-          <a:p>
-            <a:pPr marL="571500" indent="-571500"/>
-            <a:r>
-              <a:rPr lang="en-US" dirty="0"/>
-              <a:t>Pin model and skill versions for meaningful replay</a:t>
-            </a:r>
-          </a:p>
-          <a:p>
-            <a:pPr marL="571500" indent="-571500"/>
-            <a:r>
-              <a:rPr lang="en-US" dirty="0"/>
-              <a:t>Root cause usually lives in the plan</a:t>
-            </a:r>
-          </a:p>
-          <a:p>
-            <a:pPr marL="571500" indent="-571500"/>
-            <a:r>
-              <a:rPr lang="en-US" dirty="0"/>
-              <a:t>Without replay, postmortems become speculation</a:t>
+              <a:t>Every AI action gets logged: prompt, tool call, result</a:t>
+            </a:r>
+          </a:p>
+          <a:p>
+            <a:pPr marL="571500" indent="-571500"/>
+            <a:r>
+              <a:rPr lang="en-US" dirty="0"/>
+              <a:t>Structured JSON, not free text, so it can replay</a:t>
+            </a:r>
+          </a:p>
+          <a:p>
+            <a:pPr marL="571500" indent="-571500"/>
+            <a:r>
+              <a:rPr lang="en-US" dirty="0"/>
+              <a:t>Audit trails answer who changed what, when, under which version</a:t>
+            </a:r>
+          </a:p>
+          <a:p>
+            <a:pPr marL="571500" indent="-571500"/>
+            <a:r>
+              <a:rPr lang="en-US" dirty="0"/>
+              <a:t>Auditors compare output against guardrail results, not just diffs</a:t>
+            </a:r>
+          </a:p>
+          <a:p>
+            <a:pPr marL="571500" indent="-571500"/>
+            <a:r>
+              <a:rPr lang="en-US" dirty="0"/>
+              <a:t>Retention windows matter: fintech audits often span years</a:t>
+            </a:r>
+          </a:p>
+          <a:p>
+            <a:pPr marL="571500" indent="-571500"/>
+            <a:r>
+              <a:rPr lang="en-US" dirty="0"/>
+              <a:t>Can’t reconstruct a decision? Can’t audit it</a:t>
             </a:r>
           </a:p>
         </p:txBody>
@@ -9825,7 +9878,7 @@
           <a:p>
             <a:r>
               <a:rPr lang="en-US" dirty="0"/>
-              <a:t>Fintech: Regulatory Audit Requirements</a:t>
+              <a:t>Replay and Root Cause</a:t>
             </a:r>
           </a:p>
         </p:txBody>
@@ -9849,57 +9902,49 @@
         <p:spPr/>
         <p:txBody>
           <a:bodyPr>
-            <a:normAutofit fontScale="80658" lnSpcReduction="10000"/>
+            <a:normAutofit fontScale="81703" lnSpcReduction="10000"/>
           </a:bodyPr>
           <a:lstStyle/>
           <a:p>
             <a:pPr marL="571500" indent="-571500"/>
             <a:r>
               <a:rPr lang="en-US" dirty="0"/>
-              <a:t>Regulated industries need more auditability as autonomy rises</a:t>
-            </a:r>
-          </a:p>
-          <a:p>
-            <a:pPr marL="571500" indent="-571500"/>
-            <a:r>
-              <a:rPr lang="en-US" dirty="0"/>
-              <a:t>Change management standards assume a named human approver</a:t>
-            </a:r>
-          </a:p>
-          <a:p>
-            <a:pPr marL="571500" indent="-571500"/>
-            <a:r>
-              <a:rPr lang="en-US" dirty="0"/>
-              <a:t>“</a:t>
-            </a:r>
-            <a:r>
-              <a:rPr lang="en-US" i="1" dirty="0"/>
-              <a:t>The agent decided</a:t>
-            </a:r>
-            <a:r>
-              <a:rPr lang="en-US" dirty="0"/>
-              <a:t>” is not an accepted control narrative</a:t>
-            </a:r>
-          </a:p>
-          <a:p>
-            <a:pPr marL="571500" indent="-571500"/>
-            <a:r>
-              <a:rPr lang="en-US" dirty="0"/>
-              <a:t>Model and skill versions join the compliance record</a:t>
-            </a:r>
-          </a:p>
-          <a:p>
-            <a:pPr marL="571500" indent="-571500"/>
-            <a:r>
-              <a:rPr lang="en-US" dirty="0"/>
-              <a:t>Auditors will ask who authorized the agent’s scope</a:t>
-            </a:r>
-          </a:p>
-          <a:p>
-            <a:pPr marL="571500" indent="-571500"/>
-            <a:r>
-              <a:rPr lang="en-US" dirty="0"/>
-              <a:t>Build the audit trail before the regulator asks</a:t>
+              <a:t>Replay reruns the exact sequence behind a change</a:t>
+            </a:r>
+          </a:p>
+          <a:p>
+            <a:pPr marL="571500" indent="-571500"/>
+            <a:r>
+              <a:rPr lang="en-US" dirty="0"/>
+              <a:t>Nondeterminism makes exact replay hard</a:t>
+            </a:r>
+          </a:p>
+          <a:p>
+            <a:pPr marL="571500" indent="-571500"/>
+            <a:r>
+              <a:rPr lang="en-US" dirty="0"/>
+              <a:t>Log inputs, not just outputs</a:t>
+            </a:r>
+          </a:p>
+          <a:p>
+            <a:pPr marL="571500" indent="-571500"/>
+            <a:r>
+              <a:rPr lang="en-US" dirty="0"/>
+              <a:t>Pin model and skill versions for meaningful replay</a:t>
+            </a:r>
+          </a:p>
+          <a:p>
+            <a:pPr marL="571500" indent="-571500"/>
+            <a:r>
+              <a:rPr lang="en-US" dirty="0"/>
+              <a:t>Root cause usually lives in the plan</a:t>
+            </a:r>
+          </a:p>
+          <a:p>
+            <a:pPr marL="571500" indent="-571500"/>
+            <a:r>
+              <a:rPr lang="en-US" dirty="0"/>
+              <a:t>Without replay, postmortems become speculation</a:t>
             </a:r>
           </a:p>
         </p:txBody>
@@ -9918,6 +9963,140 @@
 </file>
 
 <file path=ppt/slides/slide32.xml><?xml version="1.0" encoding="utf-8"?>
+<p:sld xmlns:a="http://schemas.openxmlformats.org/drawingml/2006/main" xmlns:r="http://schemas.openxmlformats.org/officeDocument/2006/relationships" xmlns:p="http://schemas.openxmlformats.org/presentationml/2006/main">
+  <p:cSld>
+    <p:spTree>
+      <p:nvGrpSpPr>
+        <p:cNvPr id="1" name=""/>
+        <p:cNvGrpSpPr/>
+        <p:nvPr/>
+      </p:nvGrpSpPr>
+      <p:grpSpPr>
+        <a:xfrm>
+          <a:off x="0" y="0"/>
+          <a:ext cx="0" cy="0"/>
+          <a:chOff x="0" y="0"/>
+          <a:chExt cx="0" cy="0"/>
+        </a:xfrm>
+      </p:grpSpPr>
+      <p:sp>
+        <p:nvSpPr>
+          <p:cNvPr id="5" name="Title 4">
+            <a:extLst>
+              <a:ext uri="{FF2B5EF4-FFF2-40B4-BE49-F238E27FC236}">
+                <a16:creationId xmlns:a16="http://schemas.microsoft.com/office/drawing/2014/main" id="{2F76A2A9-483B-FC56-BB52-1E6E204E72B2}"/>
+              </a:ext>
+            </a:extLst>
+          </p:cNvPr>
+          <p:cNvSpPr>
+            <a:spLocks noGrp="1"/>
+          </p:cNvSpPr>
+          <p:nvPr>
+            <p:ph type="title"/>
+          </p:nvPr>
+        </p:nvSpPr>
+        <p:spPr/>
+        <p:txBody>
+          <a:bodyPr>
+            <a:normAutofit/>
+          </a:bodyPr>
+          <a:lstStyle/>
+          <a:p>
+            <a:r>
+              <a:rPr lang="en-US" dirty="0"/>
+              <a:t>Fintech: Regulatory Audit Requirements</a:t>
+            </a:r>
+          </a:p>
+        </p:txBody>
+      </p:sp>
+      <p:sp>
+        <p:nvSpPr>
+          <p:cNvPr id="6" name="Text Placeholder 5">
+            <a:extLst>
+              <a:ext uri="{FF2B5EF4-FFF2-40B4-BE49-F238E27FC236}">
+                <a16:creationId xmlns:a16="http://schemas.microsoft.com/office/drawing/2014/main" id="{37962287-FA7C-C8FD-5531-68A2FFAD38FD}"/>
+              </a:ext>
+            </a:extLst>
+          </p:cNvPr>
+          <p:cNvSpPr>
+            <a:spLocks noGrp="1"/>
+          </p:cNvSpPr>
+          <p:nvPr>
+            <p:ph type="body" sz="quarter" idx="11"/>
+          </p:nvPr>
+        </p:nvSpPr>
+        <p:spPr/>
+        <p:txBody>
+          <a:bodyPr>
+            <a:normAutofit fontScale="80658" lnSpcReduction="10000"/>
+          </a:bodyPr>
+          <a:lstStyle/>
+          <a:p>
+            <a:pPr marL="571500" indent="-571500"/>
+            <a:r>
+              <a:rPr lang="en-US" dirty="0"/>
+              <a:t>Regulated industries need more auditability as autonomy rises</a:t>
+            </a:r>
+          </a:p>
+          <a:p>
+            <a:pPr marL="571500" indent="-571500"/>
+            <a:r>
+              <a:rPr lang="en-US" dirty="0"/>
+              <a:t>Change management standards assume a named human approver</a:t>
+            </a:r>
+          </a:p>
+          <a:p>
+            <a:pPr marL="571500" indent="-571500"/>
+            <a:r>
+              <a:rPr lang="en-US" dirty="0"/>
+              <a:t>“</a:t>
+            </a:r>
+            <a:r>
+              <a:rPr lang="en-US" i="1" dirty="0"/>
+              <a:t>The agent decided</a:t>
+            </a:r>
+            <a:r>
+              <a:rPr lang="en-US" dirty="0"/>
+              <a:t>” is not an accepted control narrative</a:t>
+            </a:r>
+          </a:p>
+          <a:p>
+            <a:pPr marL="571500" indent="-571500"/>
+            <a:r>
+              <a:rPr lang="en-US" dirty="0"/>
+              <a:t>Model and skill versions join the compliance record</a:t>
+            </a:r>
+          </a:p>
+          <a:p>
+            <a:pPr marL="571500" indent="-571500"/>
+            <a:r>
+              <a:rPr lang="en-US" dirty="0"/>
+              <a:t>Auditors will ask who authorized the agent’s scope</a:t>
+            </a:r>
+          </a:p>
+          <a:p>
+            <a:pPr marL="571500" indent="-571500"/>
+            <a:r>
+              <a:rPr lang="en-US" dirty="0"/>
+              <a:t>Build the audit trail before the regulator asks</a:t>
+            </a:r>
+          </a:p>
+        </p:txBody>
+      </p:sp>
+    </p:spTree>
+    <p:extLst>
+      <p:ext uri="{BB962C8B-B14F-4D97-AF65-F5344CB8AC3E}">
+        <p14:creationId xmlns:p14="http://schemas.microsoft.com/office/powerpoint/2010/main" val="2161850691"/>
+      </p:ext>
+    </p:extLst>
+  </p:cSld>
+  <p:clrMapOvr>
+    <a:masterClrMapping/>
+  </p:clrMapOvr>
+</p:sld>
+</file>
+
+<file path=ppt/slides/slide33.xml><?xml version="1.0" encoding="utf-8"?>
 <p:sld xmlns:a="http://schemas.openxmlformats.org/drawingml/2006/main" xmlns:r="http://schemas.openxmlformats.org/officeDocument/2006/relationships" xmlns:p="http://schemas.openxmlformats.org/presentationml/2006/main">
   <p:cSld>
     <p:spTree>
@@ -10036,147 +10215,6 @@
 </p:sld>
 </file>
 
-<file path=ppt/slides/slide33.xml><?xml version="1.0" encoding="utf-8"?>
-<p:sld xmlns:a="http://schemas.openxmlformats.org/drawingml/2006/main" xmlns:r="http://schemas.openxmlformats.org/officeDocument/2006/relationships" xmlns:p="http://schemas.openxmlformats.org/presentationml/2006/main">
-  <p:cSld>
-    <p:spTree>
-      <p:nvGrpSpPr>
-        <p:cNvPr id="1" name=""/>
-        <p:cNvGrpSpPr/>
-        <p:nvPr/>
-      </p:nvGrpSpPr>
-      <p:grpSpPr>
-        <a:xfrm>
-          <a:off x="0" y="0"/>
-          <a:ext cx="0" cy="0"/>
-          <a:chOff x="0" y="0"/>
-          <a:chExt cx="0" cy="0"/>
-        </a:xfrm>
-      </p:grpSpPr>
-      <p:sp>
-        <p:nvSpPr>
-          <p:cNvPr id="5" name="Title 4">
-            <a:extLst>
-              <a:ext uri="{FF2B5EF4-FFF2-40B4-BE49-F238E27FC236}">
-                <a16:creationId xmlns:a16="http://schemas.microsoft.com/office/drawing/2014/main" id="{2F76A2A9-483B-FC56-BB52-1E6E204E72B2}"/>
-              </a:ext>
-            </a:extLst>
-          </p:cNvPr>
-          <p:cNvSpPr>
-            <a:spLocks noGrp="1"/>
-          </p:cNvSpPr>
-          <p:nvPr>
-            <p:ph type="title"/>
-          </p:nvPr>
-        </p:nvSpPr>
-        <p:spPr/>
-        <p:txBody>
-          <a:bodyPr>
-            <a:normAutofit/>
-          </a:bodyPr>
-          <a:lstStyle/>
-          <a:p>
-            <a:r>
-              <a:rPr lang="en-US" dirty="0"/>
-              <a:t>Security: CVE Chaining Risks</a:t>
-            </a:r>
-          </a:p>
-        </p:txBody>
-      </p:sp>
-      <p:sp>
-        <p:nvSpPr>
-          <p:cNvPr id="6" name="Text Placeholder 5">
-            <a:extLst>
-              <a:ext uri="{FF2B5EF4-FFF2-40B4-BE49-F238E27FC236}">
-                <a16:creationId xmlns:a16="http://schemas.microsoft.com/office/drawing/2014/main" id="{37962287-FA7C-C8FD-5531-68A2FFAD38FD}"/>
-              </a:ext>
-            </a:extLst>
-          </p:cNvPr>
-          <p:cNvSpPr>
-            <a:spLocks noGrp="1"/>
-          </p:cNvSpPr>
-          <p:nvPr>
-            <p:ph type="body" sz="quarter" idx="11"/>
-          </p:nvPr>
-        </p:nvSpPr>
-        <p:spPr>
-          <a:xfrm>
-            <a:off x="353171" y="1278968"/>
-            <a:ext cx="11838829" cy="4404656"/>
-          </a:xfrm>
-        </p:spPr>
-        <p:txBody>
-          <a:bodyPr>
-            <a:normAutofit fontScale="80658" lnSpcReduction="10000"/>
-          </a:bodyPr>
-          <a:lstStyle/>
-          <a:p>
-            <a:pPr marL="571500" indent="-571500"/>
-            <a:r>
-              <a:rPr lang="en-US" dirty="0"/>
-              <a:t>Agents chain low-severity issues into high-impact exploits</a:t>
-            </a:r>
-          </a:p>
-          <a:p>
-            <a:pPr marL="571500" indent="-571500"/>
-            <a:r>
-              <a:rPr lang="en-US" dirty="0"/>
-              <a:t>Not new to AI — but agents chain fast, autonomously</a:t>
-            </a:r>
-          </a:p>
-          <a:p>
-            <a:pPr marL="571500" indent="-571500"/>
-            <a:r>
-              <a:rPr lang="en-US" dirty="0"/>
-              <a:t>XBOW: 48-step blind-SSRF chain to full compromise, 2025</a:t>
-            </a:r>
-          </a:p>
-          <a:p>
-            <a:pPr marL="571500" indent="-571500"/>
-            <a:r>
-              <a:rPr lang="en-US" dirty="0"/>
-              <a:t>JADEPUFFER chained a Langflow code-injection flaw (</a:t>
-            </a:r>
-            <a:r>
-              <a:rPr lang="en-US" dirty="0">
-                <a:latin typeface="Consolas"/>
-              </a:rPr>
-              <a:t>CVE-2025-3248</a:t>
-            </a:r>
-            <a:r>
-              <a:rPr lang="en-US" dirty="0"/>
-              <a:t>)</a:t>
-            </a:r>
-          </a:p>
-          <a:p>
-            <a:pPr lvl="1"/>
-            <a:r>
-              <a:rPr lang="en-US" dirty="0"/>
-              <a:t>Sysdig writeup — autonomous ransomware and extortion, not just theft</a:t>
-            </a:r>
-          </a:p>
-          <a:p>
-            <a:pPr marL="571500" indent="-571500"/>
-            <a:r>
-              <a:rPr lang="en-US" dirty="0"/>
-              <a:t>Guardrails must catch chains, not just single CVEs</a:t>
-            </a:r>
-          </a:p>
-        </p:txBody>
-      </p:sp>
-    </p:spTree>
-    <p:extLst>
-      <p:ext uri="{BB962C8B-B14F-4D97-AF65-F5344CB8AC3E}">
-        <p14:creationId xmlns:p14="http://schemas.microsoft.com/office/powerpoint/2010/main" val="2161850691"/>
-      </p:ext>
-    </p:extLst>
-  </p:cSld>
-  <p:clrMapOvr>
-    <a:masterClrMapping/>
-  </p:clrMapOvr>
-</p:sld>
-</file>
-
 <file path=ppt/slides/slide34.xml><?xml version="1.0" encoding="utf-8"?>
 <p:sld xmlns:a="http://schemas.openxmlformats.org/drawingml/2006/main" xmlns:r="http://schemas.openxmlformats.org/officeDocument/2006/relationships" xmlns:p="http://schemas.openxmlformats.org/presentationml/2006/main">
   <p:cSld>
@@ -10219,7 +10257,7 @@
           <a:p>
             <a:r>
               <a:rPr lang="en-US" dirty="0"/>
-              <a:t>The Agent Attack Surface</a:t>
+              <a:t>Security: CVE Chaining Risks</a:t>
             </a:r>
           </a:p>
         </p:txBody>
@@ -10248,66 +10286,59 @@
         </p:spPr>
         <p:txBody>
           <a:bodyPr>
-            <a:normAutofit fontScale="95658" lnSpcReduction="10000"/>
+            <a:normAutofit fontScale="80658" lnSpcReduction="10000"/>
           </a:bodyPr>
           <a:lstStyle/>
           <a:p>
             <a:pPr marL="571500" indent="-571500"/>
             <a:r>
-              <a:rPr lang="en-US" b="1" dirty="0"/>
-              <a:t>Prompt injection</a:t>
-            </a:r>
-            <a:r>
-              <a:rPr lang="en-US" dirty="0"/>
-              <a:t>: hostile text in a file or web page</a:t>
-            </a:r>
-          </a:p>
-          <a:p>
-            <a:pPr marL="1257300" lvl="1" indent="-571500"/>
-            <a:r>
-              <a:rPr lang="en-US" dirty="0"/>
-              <a:t>The agent can’t reliably tell instruction from data</a:t>
-            </a:r>
-            <a:endParaRPr lang="en-US" b="1" dirty="0"/>
-          </a:p>
-          <a:p>
-            <a:pPr marL="571500" indent="-571500"/>
-            <a:r>
-              <a:rPr lang="en-US" b="1" dirty="0"/>
-              <a:t>Supply chain</a:t>
-            </a:r>
-            <a:r>
-              <a:rPr lang="en-US" dirty="0"/>
-              <a:t>: a poisoned dependency installed without asking</a:t>
-            </a:r>
-          </a:p>
-          <a:p>
-            <a:pPr marL="1257300" lvl="1" indent="-571500"/>
-            <a:r>
-              <a:rPr lang="en-US" dirty="0"/>
-              <a:t>Tool access turns injection into code execution</a:t>
-            </a:r>
-          </a:p>
-          <a:p>
-            <a:pPr marL="1257300" lvl="1" indent="-571500"/>
-            <a:r>
-              <a:rPr lang="en-US" dirty="0"/>
-              <a:t>Agents with repo write access are a privileged target</a:t>
-            </a:r>
-          </a:p>
-          <a:p>
-            <a:pPr algn="ctr">
-              <a:buNone/>
-            </a:pPr>
-            <a:endParaRPr lang="en-US" dirty="0"/>
-          </a:p>
-          <a:p>
-            <a:pPr algn="ctr">
-              <a:buNone/>
-            </a:pPr>
-            <a:r>
-              <a:rPr lang="en-US" dirty="0"/>
-              <a:t>Treat everything an agent reads as untrusted</a:t>
+              <a:rPr lang="en-US" dirty="0"/>
+              <a:t>Agents chain low-severity issues into high-impact exploits</a:t>
+            </a:r>
+          </a:p>
+          <a:p>
+            <a:pPr marL="571500" indent="-571500"/>
+            <a:r>
+              <a:rPr lang="en-US" dirty="0"/>
+              <a:t>Not new to AI — but agents chain fast, autonomously</a:t>
+            </a:r>
+          </a:p>
+          <a:p>
+            <a:pPr marL="571500" indent="-571500"/>
+            <a:r>
+              <a:rPr lang="en-US" dirty="0"/>
+              <a:t>XBOW: 48-step blind-SSRF chain to full compromise, 2025</a:t>
+            </a:r>
+          </a:p>
+          <a:p>
+            <a:pPr marL="571500" indent="-571500"/>
+            <a:r>
+              <a:rPr lang="en-US" dirty="0"/>
+              <a:t>JADEPUFFER chained a Langflow code-injection flaw (</a:t>
+            </a:r>
+            <a:r>
+              <a:rPr lang="en-US" dirty="0">
+                <a:latin typeface="Consolas"/>
+              </a:rPr>
+              <a:t>CVE-2025-3248</a:t>
+            </a:r>
+            <a:r>
+              <a:rPr lang="en-US" dirty="0"/>
+              <a:t>)</a:t>
+            </a:r>
+          </a:p>
+          <a:p>
+            <a:pPr lvl="1"/>
+            <a:r>
+              <a:rPr lang="en-US" dirty="0"/>
+              <a:t>Sysdig writeup — autonomous ransomware and extortion, not just theft</a:t>
+            </a:r>
+          </a:p>
+          <a:p>
+            <a:pPr marL="571500" indent="-571500"/>
+            <a:r>
+              <a:rPr lang="en-US" dirty="0"/>
+              <a:t>Guardrails must catch chains, not just single CVEs</a:t>
             </a:r>
           </a:p>
         </p:txBody>
@@ -10367,7 +10398,7 @@
           <a:p>
             <a:r>
               <a:rPr lang="en-US" dirty="0"/>
-              <a:t>When Agents Go Wrong: Real Incidents</a:t>
+              <a:t>The Agent Attack Surface</a:t>
             </a:r>
           </a:p>
         </p:txBody>
@@ -10396,35 +10427,66 @@
         </p:spPr>
         <p:txBody>
           <a:bodyPr>
-            <a:normAutofit fontScale="97342"/>
+            <a:normAutofit fontScale="95658" lnSpcReduction="10000"/>
           </a:bodyPr>
           <a:lstStyle/>
           <a:p>
             <a:pPr marL="571500" indent="-571500"/>
             <a:r>
-              <a:rPr lang="en-US" dirty="0"/>
-              <a:t>Replit, 2025: an agent deleted a live database during a freeze</a:t>
-            </a:r>
-          </a:p>
-          <a:p>
-            <a:pPr marL="571500" indent="-571500"/>
-            <a:r>
-              <a:rPr lang="en-US" dirty="0"/>
-              <a:t>The agent admitted running unauthorized commands</a:t>
-            </a:r>
-          </a:p>
-          <a:p>
-            <a:pPr marL="571500" indent="-571500"/>
-            <a:r>
-              <a:rPr lang="en-US" dirty="0"/>
-              <a:t>What went wrong: too much permission, too soon</a:t>
-            </a:r>
-          </a:p>
-          <a:p>
-            <a:pPr marL="571500" indent="-571500"/>
-            <a:r>
-              <a:rPr lang="en-US" dirty="0"/>
-              <a:t>Progressive autonomy: earn scope, don’t grant it upfront</a:t>
+              <a:rPr lang="en-US" b="1" dirty="0"/>
+              <a:t>Prompt injection</a:t>
+            </a:r>
+            <a:r>
+              <a:rPr lang="en-US" dirty="0"/>
+              <a:t>: hostile text in a file or web page</a:t>
+            </a:r>
+          </a:p>
+          <a:p>
+            <a:pPr marL="1257300" lvl="1" indent="-571500"/>
+            <a:r>
+              <a:rPr lang="en-US" dirty="0"/>
+              <a:t>The agent can’t reliably tell instruction from data</a:t>
+            </a:r>
+            <a:endParaRPr lang="en-US" b="1" dirty="0"/>
+          </a:p>
+          <a:p>
+            <a:pPr marL="571500" indent="-571500"/>
+            <a:r>
+              <a:rPr lang="en-US" b="1" dirty="0"/>
+              <a:t>Supply chain</a:t>
+            </a:r>
+            <a:r>
+              <a:rPr lang="en-US" dirty="0"/>
+              <a:t>: a poisoned dependency installed without asking</a:t>
+            </a:r>
+          </a:p>
+          <a:p>
+            <a:pPr marL="1257300" lvl="1" indent="-571500"/>
+            <a:r>
+              <a:rPr lang="en-US" dirty="0"/>
+              <a:t>Tool access turns injection into code execution</a:t>
+            </a:r>
+          </a:p>
+          <a:p>
+            <a:pPr marL="1257300" lvl="1" indent="-571500"/>
+            <a:r>
+              <a:rPr lang="en-US" dirty="0"/>
+              <a:t>Agents with repo write access are a privileged target</a:t>
+            </a:r>
+          </a:p>
+          <a:p>
+            <a:pPr algn="ctr">
+              <a:buNone/>
+            </a:pPr>
+            <a:endParaRPr lang="en-US" dirty="0"/>
+          </a:p>
+          <a:p>
+            <a:pPr algn="ctr">
+              <a:buNone/>
+            </a:pPr>
+            <a:r>
+              <a:rPr lang="en-US" dirty="0"/>
+              <a:t>Treat everything an agent reads as untrusted</a:t>
             </a:r>
           </a:p>
         </p:txBody>
@@ -10484,7 +10546,7 @@
           <a:p>
             <a:r>
               <a:rPr lang="en-US" dirty="0"/>
-              <a:t>Permission Scoping and Progressive Autonomy</a:t>
+              <a:t>When Agents Go Wrong: Real Incidents</a:t>
             </a:r>
           </a:p>
         </p:txBody>
@@ -10505,52 +10567,43 @@
             <p:ph type="body" sz="quarter" idx="11"/>
           </p:nvPr>
         </p:nvSpPr>
-        <p:spPr/>
+        <p:spPr>
+          <a:xfrm>
+            <a:off x="353171" y="1278968"/>
+            <a:ext cx="11838829" cy="4404656"/>
+          </a:xfrm>
+        </p:spPr>
         <p:txBody>
           <a:bodyPr>
-            <a:normAutofit fontScale="80658" lnSpcReduction="10000"/>
+            <a:normAutofit fontScale="97342"/>
           </a:bodyPr>
           <a:lstStyle/>
           <a:p>
             <a:pPr marL="571500" indent="-571500"/>
             <a:r>
               <a:rPr lang="en-US" dirty="0"/>
-              <a:t>Start read-only; grant write access per-directory, not globally</a:t>
-            </a:r>
-          </a:p>
-          <a:p>
-            <a:pPr marL="571500" indent="-571500"/>
-            <a:r>
-              <a:rPr lang="en-US" dirty="0"/>
-              <a:t>No production credentials in an agent’s environment, ever</a:t>
-            </a:r>
-          </a:p>
-          <a:p>
-            <a:pPr marL="571500" indent="-571500"/>
-            <a:r>
-              <a:rPr lang="en-US" dirty="0"/>
-              <a:t>Destructive operations always require human confirmation</a:t>
-            </a:r>
-          </a:p>
-          <a:p>
-            <a:pPr marL="571500" indent="-571500"/>
-            <a:r>
-              <a:rPr lang="en-US" dirty="0"/>
-              <a:t>Expand scope on track record, not optimism</a:t>
-            </a:r>
-          </a:p>
-          <a:p>
-            <a:pPr marL="571500" indent="-571500"/>
-            <a:r>
-              <a:rPr lang="en-US" dirty="0"/>
-              <a:t>Separate agent identities so logs attribute actions correctly</a:t>
-            </a:r>
-          </a:p>
-          <a:p>
-            <a:pPr marL="571500" indent="-571500"/>
-            <a:r>
-              <a:rPr lang="en-US" dirty="0"/>
-              <a:t>The blast radius you allow is the one you’ll get</a:t>
+              <a:t>Replit, 2025: an agent deleted a live database during a freeze</a:t>
+            </a:r>
+          </a:p>
+          <a:p>
+            <a:pPr marL="571500" indent="-571500"/>
+            <a:r>
+              <a:rPr lang="en-US" dirty="0"/>
+              <a:t>The agent admitted running unauthorized commands</a:t>
+            </a:r>
+          </a:p>
+          <a:p>
+            <a:pPr marL="571500" indent="-571500"/>
+            <a:r>
+              <a:rPr lang="en-US" dirty="0"/>
+              <a:t>What went wrong: too much permission, too soon</a:t>
+            </a:r>
+          </a:p>
+          <a:p>
+            <a:pPr marL="571500" indent="-571500"/>
+            <a:r>
+              <a:rPr lang="en-US" dirty="0"/>
+              <a:t>Progressive autonomy: earn scope, don’t grant it upfront</a:t>
             </a:r>
           </a:p>
         </p:txBody>
@@ -10610,7 +10663,7 @@
           <a:p>
             <a:r>
               <a:rPr lang="en-US" dirty="0"/>
-              <a:t>Secrets and Credential Handling</a:t>
+              <a:t>Permission Scoping and Progressive Autonomy</a:t>
             </a:r>
           </a:p>
         </p:txBody>
@@ -10634,42 +10687,49 @@
         <p:spPr/>
         <p:txBody>
           <a:bodyPr>
-            <a:normAutofit fontScale="89294"/>
+            <a:normAutofit fontScale="80658" lnSpcReduction="10000"/>
           </a:bodyPr>
           <a:lstStyle/>
           <a:p>
             <a:pPr marL="571500" indent="-571500"/>
             <a:r>
               <a:rPr lang="en-US" dirty="0"/>
-              <a:t>Agents log prompts and outputs — secrets end up there too</a:t>
-            </a:r>
-          </a:p>
-          <a:p>
-            <a:pPr marL="571500" indent="-571500"/>
-            <a:r>
-              <a:rPr lang="en-US" dirty="0"/>
-              <a:t>Never paste credentials into an agent’s working context</a:t>
-            </a:r>
-          </a:p>
-          <a:p>
-            <a:pPr marL="571500" indent="-571500"/>
-            <a:r>
-              <a:rPr lang="en-US" dirty="0"/>
-              <a:t>Use short-lived, scoped tokens instead of long-lived keys</a:t>
-            </a:r>
-          </a:p>
-          <a:p>
-            <a:pPr marL="571500" indent="-571500"/>
-            <a:r>
-              <a:rPr lang="en-US" dirty="0"/>
-              <a:t>Secret scanning in CI catches accidental commits</a:t>
-            </a:r>
-          </a:p>
-          <a:p>
-            <a:pPr marL="571500" indent="-571500"/>
-            <a:r>
-              <a:rPr lang="en-US" dirty="0"/>
-              <a:t>Rotate anything an agent has ever seen</a:t>
+              <a:t>Start read-only; grant write access per-directory, not globally</a:t>
+            </a:r>
+          </a:p>
+          <a:p>
+            <a:pPr marL="571500" indent="-571500"/>
+            <a:r>
+              <a:rPr lang="en-US" dirty="0"/>
+              <a:t>No production credentials in an agent’s environment, ever</a:t>
+            </a:r>
+          </a:p>
+          <a:p>
+            <a:pPr marL="571500" indent="-571500"/>
+            <a:r>
+              <a:rPr lang="en-US" dirty="0"/>
+              <a:t>Destructive operations always require human confirmation</a:t>
+            </a:r>
+          </a:p>
+          <a:p>
+            <a:pPr marL="571500" indent="-571500"/>
+            <a:r>
+              <a:rPr lang="en-US" dirty="0"/>
+              <a:t>Expand scope on track record, not optimism</a:t>
+            </a:r>
+          </a:p>
+          <a:p>
+            <a:pPr marL="571500" indent="-571500"/>
+            <a:r>
+              <a:rPr lang="en-US" dirty="0"/>
+              <a:t>Separate agent identities so logs attribute actions correctly</a:t>
+            </a:r>
+          </a:p>
+          <a:p>
+            <a:pPr marL="571500" indent="-571500"/>
+            <a:r>
+              <a:rPr lang="en-US" dirty="0"/>
+              <a:t>The blast radius you allow is the one you’ll get</a:t>
             </a:r>
           </a:p>
         </p:txBody>
@@ -10729,7 +10789,7 @@
           <a:p>
             <a:r>
               <a:rPr lang="en-US" dirty="0"/>
-              <a:t>PR Churn and Review Fatigue</a:t>
+              <a:t>Secrets and Credential Handling</a:t>
             </a:r>
           </a:p>
         </p:txBody>
@@ -10760,35 +10820,35 @@
             <a:pPr marL="571500" indent="-571500"/>
             <a:r>
               <a:rPr lang="en-US" dirty="0"/>
-              <a:t>More AI PRs strain GitHub’s own UI and APIs</a:t>
-            </a:r>
-          </a:p>
-          <a:p>
-            <a:pPr marL="571500" indent="-571500"/>
-            <a:r>
-              <a:rPr lang="en-US" dirty="0"/>
-              <a:t>Constant review requests cause real reviewer fatigue</a:t>
-            </a:r>
-          </a:p>
-          <a:p>
-            <a:pPr marL="571500" indent="-571500"/>
-            <a:r>
-              <a:rPr lang="en-US" dirty="0"/>
-              <a:t>Fatigue leads to rubber-stamping, not real review</a:t>
-            </a:r>
-          </a:p>
-          <a:p>
-            <a:pPr marL="571500" indent="-571500"/>
-            <a:r>
-              <a:rPr lang="en-US" dirty="0"/>
-              <a:t>Batching and smaller PRs ease machine and human load</a:t>
-            </a:r>
-          </a:p>
-          <a:p>
-            <a:pPr marL="571500" indent="-571500"/>
-            <a:r>
-              <a:rPr lang="en-US" dirty="0"/>
-              <a:t>Review capacity, not code generation, becomes the bottleneck</a:t>
+              <a:t>Agents log prompts and outputs — secrets end up there too</a:t>
+            </a:r>
+          </a:p>
+          <a:p>
+            <a:pPr marL="571500" indent="-571500"/>
+            <a:r>
+              <a:rPr lang="en-US" dirty="0"/>
+              <a:t>Never paste credentials into an agent’s working context</a:t>
+            </a:r>
+          </a:p>
+          <a:p>
+            <a:pPr marL="571500" indent="-571500"/>
+            <a:r>
+              <a:rPr lang="en-US" dirty="0"/>
+              <a:t>Use short-lived, scoped tokens instead of long-lived keys</a:t>
+            </a:r>
+          </a:p>
+          <a:p>
+            <a:pPr marL="571500" indent="-571500"/>
+            <a:r>
+              <a:rPr lang="en-US" dirty="0"/>
+              <a:t>Secret scanning in CI catches accidental commits</a:t>
+            </a:r>
+          </a:p>
+          <a:p>
+            <a:pPr marL="571500" indent="-571500"/>
+            <a:r>
+              <a:rPr lang="en-US" dirty="0"/>
+              <a:t>Rotate anything an agent has ever seen</a:t>
             </a:r>
           </a:p>
         </p:txBody>
@@ -10848,7 +10908,7 @@
           <a:p>
             <a:r>
               <a:rPr lang="en-US" dirty="0"/>
-              <a:t>Review Triage: What Humans Should See</a:t>
+              <a:t>PR Churn and Review Fatigue</a:t>
             </a:r>
           </a:p>
         </p:txBody>
@@ -10872,42 +10932,42 @@
         <p:spPr/>
         <p:txBody>
           <a:bodyPr>
-            <a:normAutofit fontScale="84616" lnSpcReduction="10000"/>
+            <a:normAutofit fontScale="89294"/>
           </a:bodyPr>
           <a:lstStyle/>
           <a:p>
             <a:pPr marL="571500" indent="-571500"/>
             <a:r>
               <a:rPr lang="en-US" dirty="0"/>
-              <a:t>Not every agent PR deserves equal attention</a:t>
-            </a:r>
-          </a:p>
-          <a:p>
-            <a:pPr marL="571500" indent="-571500"/>
-            <a:r>
-              <a:rPr lang="en-US" dirty="0"/>
-              <a:t>Auto-merge: dependency bumps, formatting, generated code</a:t>
-            </a:r>
-          </a:p>
-          <a:p>
-            <a:pPr marL="571500" indent="-571500"/>
-            <a:r>
-              <a:rPr lang="en-US" dirty="0"/>
-              <a:t>Always review deeply: auth, payments, migrations, public interfaces</a:t>
-            </a:r>
-          </a:p>
-          <a:p>
-            <a:pPr marL="571500" indent="-571500"/>
-            <a:r>
-              <a:rPr lang="en-US" dirty="0"/>
-              <a:t>Let the auditor rank PRs by risk, not arrival order</a:t>
-            </a:r>
-          </a:p>
-          <a:p>
-            <a:pPr marL="571500" indent="-571500"/>
-            <a:r>
-              <a:rPr lang="en-US" dirty="0"/>
-              <a:t>Triage, not more reviewers, makes review sustainable</a:t>
+              <a:t>More AI PRs strain GitHub’s own UI and APIs</a:t>
+            </a:r>
+          </a:p>
+          <a:p>
+            <a:pPr marL="571500" indent="-571500"/>
+            <a:r>
+              <a:rPr lang="en-US" dirty="0"/>
+              <a:t>Constant review requests cause real reviewer fatigue</a:t>
+            </a:r>
+          </a:p>
+          <a:p>
+            <a:pPr marL="571500" indent="-571500"/>
+            <a:r>
+              <a:rPr lang="en-US" dirty="0"/>
+              <a:t>Fatigue leads to rubber-stamping, not real review</a:t>
+            </a:r>
+          </a:p>
+          <a:p>
+            <a:pPr marL="571500" indent="-571500"/>
+            <a:r>
+              <a:rPr lang="en-US" dirty="0"/>
+              <a:t>Batching and smaller PRs ease machine and human load</a:t>
+            </a:r>
+          </a:p>
+          <a:p>
+            <a:pPr marL="571500" indent="-571500"/>
+            <a:r>
+              <a:rPr lang="en-US" dirty="0"/>
+              <a:t>Review capacity, not code generation, becomes the bottleneck</a:t>
             </a:r>
           </a:p>
         </p:txBody>
@@ -10926,17 +10986,86 @@
 </file>
 
 <file path=ppt/slides/slide4.xml><?xml version="1.0" encoding="utf-8"?>
+<p:sld xmlns:a="http://schemas.openxmlformats.org/drawingml/2006/main" xmlns:p="http://schemas.openxmlformats.org/presentationml/2006/main" xmlns:r="http://schemas.openxmlformats.org/officeDocument/2006/relationships">
+  <p:cSld>
+    <p:spTree>
+      <p:nvGrpSpPr>
+        <p:cNvPr id="1" name=""/>
+        <p:cNvGrpSpPr/>
+        <p:nvPr/>
+      </p:nvGrpSpPr>
+      <p:grpSpPr/>
+      <p:sp>
+        <p:nvSpPr>
+          <p:cNvPr id="2" name="Text Placeholder 1"/>
+          <p:cNvSpPr>
+            <a:spLocks noGrp="1"/>
+          </p:cNvSpPr>
+          <p:nvPr>
+            <p:ph type="body" idx="11" sz="quarter"/>
+          </p:nvPr>
+        </p:nvSpPr>
+        <p:spPr/>
+        <p:txBody>
+          <a:bodyPr/>
+          <a:lstStyle/>
+          <a:p>
+            <a:r>
+              <a:t>Not a fortune teller — no crystal ball here</a:t>
+            </a:r>
+          </a:p>
+          <a:p>
+            <a:r>
+              <a:t>This talk shows what's happening now, not what's coming next</a:t>
+            </a:r>
+          </a:p>
+          <a:p>
+            <a:r>
+              <a:t>Every stat and framework is a snapshot, not a prophecy</a:t>
+            </a:r>
+          </a:p>
+          <a:p>
+            <a:r>
+              <a:t>“Why now” means as of today, not a forecast</a:t>
+            </a:r>
+          </a:p>
+        </p:txBody>
+      </p:sp>
+      <p:sp>
+        <p:nvSpPr>
+          <p:cNvPr id="3" name="Title 2"/>
+          <p:cNvSpPr>
+            <a:spLocks noGrp="1"/>
+          </p:cNvSpPr>
+          <p:nvPr>
+            <p:ph type="title"/>
+          </p:nvPr>
+        </p:nvSpPr>
+        <p:spPr/>
+        <p:txBody>
+          <a:bodyPr/>
+          <a:lstStyle/>
+          <a:p>
+            <a:r>
+              <a:t>No Crystal Ball</a:t>
+            </a:r>
+          </a:p>
+        </p:txBody>
+      </p:sp>
+    </p:spTree>
+  </p:cSld>
+  <p:clrMapOvr>
+    <a:masterClrMapping/>
+  </p:clrMapOvr>
+</p:sld>
+</file>
+
+<file path=ppt/slides/slide40.xml><?xml version="1.0" encoding="utf-8"?>
 <p:sld xmlns:a="http://schemas.openxmlformats.org/drawingml/2006/main" xmlns:r="http://schemas.openxmlformats.org/officeDocument/2006/relationships" xmlns:p="http://schemas.openxmlformats.org/presentationml/2006/main">
   <p:cSld>
     <p:spTree>
       <p:nvGrpSpPr>
-        <p:cNvPr id="1" name="">
-          <a:extLst>
-            <a:ext uri="{FF2B5EF4-FFF2-40B4-BE49-F238E27FC236}">
-              <a16:creationId xmlns:a16="http://schemas.microsoft.com/office/drawing/2014/main" id="{A7967EF8-3B44-6A70-6396-1F6F12D14073}"/>
-            </a:ext>
-          </a:extLst>
-        </p:cNvPr>
+        <p:cNvPr id="1" name=""/>
         <p:cNvGrpSpPr/>
         <p:nvPr/>
       </p:nvGrpSpPr>
@@ -10953,7 +11082,7 @@
           <p:cNvPr id="5" name="Title 4">
             <a:extLst>
               <a:ext uri="{FF2B5EF4-FFF2-40B4-BE49-F238E27FC236}">
-                <a16:creationId xmlns:a16="http://schemas.microsoft.com/office/drawing/2014/main" id="{35505AAE-A946-CD3E-F78D-1FA799DDEF52}"/>
+                <a16:creationId xmlns:a16="http://schemas.microsoft.com/office/drawing/2014/main" id="{2F76A2A9-483B-FC56-BB52-1E6E204E72B2}"/>
               </a:ext>
             </a:extLst>
           </p:cNvPr>
@@ -10973,7 +11102,7 @@
           <a:p>
             <a:r>
               <a:rPr lang="en-US" dirty="0"/>
-              <a:t>The Dark Factory Concept</a:t>
+              <a:t>Review Triage: What Humans Should See</a:t>
             </a:r>
           </a:p>
         </p:txBody>
@@ -10983,7 +11112,7 @@
           <p:cNvPr id="6" name="Text Placeholder 5">
             <a:extLst>
               <a:ext uri="{FF2B5EF4-FFF2-40B4-BE49-F238E27FC236}">
-                <a16:creationId xmlns:a16="http://schemas.microsoft.com/office/drawing/2014/main" id="{CEFC581A-ED6F-8D9F-19F3-23DF7A475040}"/>
+                <a16:creationId xmlns:a16="http://schemas.microsoft.com/office/drawing/2014/main" id="{37962287-FA7C-C8FD-5531-68A2FFAD38FD}"/>
               </a:ext>
             </a:extLst>
           </p:cNvPr>
@@ -10997,56 +11126,42 @@
         <p:spPr/>
         <p:txBody>
           <a:bodyPr>
-            <a:normAutofit fontScale="81784" lnSpcReduction="20000"/>
+            <a:normAutofit fontScale="84616" lnSpcReduction="10000"/>
           </a:bodyPr>
           <a:lstStyle/>
           <a:p>
             <a:pPr marL="571500" indent="-571500"/>
             <a:r>
               <a:rPr lang="en-US" dirty="0"/>
-              <a:t>A dark factory runs unattended, lights off, automated</a:t>
-            </a:r>
-          </a:p>
-          <a:p>
-            <a:pPr marL="571500" indent="-571500"/>
-            <a:r>
-              <a:rPr lang="en-US" dirty="0"/>
-              <a:t>Software’s version: minimal human touch, agents build and merge</a:t>
-            </a:r>
-          </a:p>
-          <a:p>
-            <a:pPr marL="571500" indent="-571500"/>
-            <a:r>
-              <a:rPr lang="en-US" dirty="0"/>
-              <a:t>Term borrowed from manufacturing’s “lights-out” floors</a:t>
-            </a:r>
-          </a:p>
-          <a:p>
-            <a:pPr lvl="1"/>
-            <a:r>
-              <a:rPr lang="en-US" dirty="0"/>
-              <a:t>FANUC has run one lights-out since 2001</a:t>
-            </a:r>
-          </a:p>
-          <a:p>
-            <a:pPr marL="571500" indent="-571500"/>
-            <a:r>
-              <a:rPr lang="en-US" dirty="0"/>
-              <a:t>Why now: task horizon, falling costs, competitive pressure</a:t>
-            </a:r>
-          </a:p>
-          <a:p>
-            <a:pPr marL="571500" indent="-571500"/>
-            <a:r>
-              <a:rPr lang="en-US" dirty="0"/>
-              <a:t>Trust comes from guardrails, not blind delegation</a:t>
-            </a:r>
-          </a:p>
-          <a:p>
-            <a:pPr marL="571500" indent="-571500"/>
-            <a:r>
-              <a:rPr lang="en-US" dirty="0"/>
-              <a:t>No real factory runs fully dark — neither does software</a:t>
+              <a:t>Not every agent PR deserves equal attention</a:t>
+            </a:r>
+          </a:p>
+          <a:p>
+            <a:pPr marL="571500" indent="-571500"/>
+            <a:r>
+              <a:rPr lang="en-US" dirty="0"/>
+              <a:t>Auto-merge: dependency bumps, formatting, generated code</a:t>
+            </a:r>
+          </a:p>
+          <a:p>
+            <a:pPr marL="571500" indent="-571500"/>
+            <a:r>
+              <a:rPr lang="en-US" dirty="0"/>
+              <a:t>Always review deeply: auth, payments, migrations, public interfaces</a:t>
+            </a:r>
+          </a:p>
+          <a:p>
+            <a:pPr marL="571500" indent="-571500"/>
+            <a:r>
+              <a:rPr lang="en-US" dirty="0"/>
+              <a:t>Let the auditor rank PRs by risk, not arrival order</a:t>
+            </a:r>
+          </a:p>
+          <a:p>
+            <a:pPr marL="571500" indent="-571500"/>
+            <a:r>
+              <a:rPr lang="en-US" dirty="0"/>
+              <a:t>Triage, not more reviewers, makes review sustainable</a:t>
             </a:r>
           </a:p>
         </p:txBody>
@@ -11054,7 +11169,7 @@
     </p:spTree>
     <p:extLst>
       <p:ext uri="{BB962C8B-B14F-4D97-AF65-F5344CB8AC3E}">
-        <p14:creationId xmlns:p14="http://schemas.microsoft.com/office/powerpoint/2010/main" val="3279335284"/>
+        <p14:creationId xmlns:p14="http://schemas.microsoft.com/office/powerpoint/2010/main" val="2161850691"/>
       </p:ext>
     </p:extLst>
   </p:cSld>
@@ -11064,7 +11179,7 @@
 </p:sld>
 </file>
 
-<file path=ppt/slides/slide40.xml><?xml version="1.0" encoding="utf-8"?>
+<file path=ppt/slides/slide41.xml><?xml version="1.0" encoding="utf-8"?>
 <p:sld xmlns:a="http://schemas.openxmlformats.org/drawingml/2006/main" xmlns:r="http://schemas.openxmlformats.org/officeDocument/2006/relationships" xmlns:p="http://schemas.openxmlformats.org/presentationml/2006/main">
   <p:cSld>
     <p:spTree>
@@ -11183,139 +11298,6 @@
 </p:sld>
 </file>
 
-<file path=ppt/slides/slide41.xml><?xml version="1.0" encoding="utf-8"?>
-<p:sld xmlns:a="http://schemas.openxmlformats.org/drawingml/2006/main" xmlns:r="http://schemas.openxmlformats.org/officeDocument/2006/relationships" xmlns:p="http://schemas.openxmlformats.org/presentationml/2006/main">
-  <p:cSld>
-    <p:spTree>
-      <p:nvGrpSpPr>
-        <p:cNvPr id="1" name=""/>
-        <p:cNvGrpSpPr/>
-        <p:nvPr/>
-      </p:nvGrpSpPr>
-      <p:grpSpPr>
-        <a:xfrm>
-          <a:off x="0" y="0"/>
-          <a:ext cx="0" cy="0"/>
-          <a:chOff x="0" y="0"/>
-          <a:chExt cx="0" cy="0"/>
-        </a:xfrm>
-      </p:grpSpPr>
-      <p:sp>
-        <p:nvSpPr>
-          <p:cNvPr id="5" name="Title 4">
-            <a:extLst>
-              <a:ext uri="{FF2B5EF4-FFF2-40B4-BE49-F238E27FC236}">
-                <a16:creationId xmlns:a16="http://schemas.microsoft.com/office/drawing/2014/main" id="{2F76A2A9-483B-FC56-BB52-1E6E204E72B2}"/>
-              </a:ext>
-            </a:extLst>
-          </p:cNvPr>
-          <p:cNvSpPr>
-            <a:spLocks noGrp="1"/>
-          </p:cNvSpPr>
-          <p:nvPr>
-            <p:ph type="title"/>
-          </p:nvPr>
-        </p:nvSpPr>
-        <p:spPr/>
-        <p:txBody>
-          <a:bodyPr>
-            <a:normAutofit/>
-          </a:bodyPr>
-          <a:lstStyle/>
-          <a:p>
-            <a:r>
-              <a:rPr lang="en-US" dirty="0"/>
-              <a:t>What Review Culture Looks Like From Outside</a:t>
-            </a:r>
-          </a:p>
-        </p:txBody>
-      </p:sp>
-      <p:sp>
-        <p:nvSpPr>
-          <p:cNvPr id="6" name="Text Placeholder 5">
-            <a:extLst>
-              <a:ext uri="{FF2B5EF4-FFF2-40B4-BE49-F238E27FC236}">
-                <a16:creationId xmlns:a16="http://schemas.microsoft.com/office/drawing/2014/main" id="{37962287-FA7C-C8FD-5531-68A2FFAD38FD}"/>
-              </a:ext>
-            </a:extLst>
-          </p:cNvPr>
-          <p:cNvSpPr>
-            <a:spLocks noGrp="1"/>
-          </p:cNvSpPr>
-          <p:nvPr>
-            <p:ph type="body" sz="quarter" idx="11"/>
-          </p:nvPr>
-        </p:nvSpPr>
-        <p:spPr/>
-        <p:txBody>
-          <a:bodyPr>
-            <a:normAutofit fontScale="77254" lnSpcReduction="20000"/>
-          </a:bodyPr>
-          <a:lstStyle/>
-          <a:p>
-            <a:pPr marL="571500" indent="-571500"/>
-            <a:r>
-              <a:rPr lang="en-US" dirty="0"/>
-              <a:t>Reviewing agent output all day is genuinely draining</a:t>
-            </a:r>
-          </a:p>
-          <a:p>
-            <a:pPr marL="571500" indent="-571500"/>
-            <a:r>
-              <a:rPr lang="en-US" dirty="0"/>
-              <a:t>High-vigilance, low-authorship — the worst combination</a:t>
-            </a:r>
-          </a:p>
-          <a:p>
-            <a:pPr marL="571500" indent="-571500"/>
-            <a:r>
-              <a:rPr lang="en-US" dirty="0"/>
-              <a:t>A bad team makes you feel like QA for a machine</a:t>
-            </a:r>
-          </a:p>
-          <a:p>
-            <a:pPr lvl="1"/>
-            <a:r>
-              <a:rPr lang="en-US" dirty="0"/>
-              <a:t>Worth asking about in an interview</a:t>
-            </a:r>
-          </a:p>
-          <a:p>
-            <a:pPr marL="571500" indent="-571500"/>
-            <a:r>
-              <a:rPr lang="en-US" dirty="0"/>
-              <a:t>Burnout shows up as rubber-stamping before it shows in surveys</a:t>
-            </a:r>
-          </a:p>
-          <a:p>
-            <a:pPr marL="571500" indent="-571500"/>
-            <a:r>
-              <a:rPr lang="en-US" dirty="0"/>
-              <a:t>A healthy team protects authorship time</a:t>
-            </a:r>
-          </a:p>
-          <a:p>
-            <a:pPr marL="571500" indent="-571500"/>
-            <a:r>
-              <a:rPr lang="en-US" dirty="0"/>
-              <a:t>Team health is a guardrail too — it degrades quietly</a:t>
-            </a:r>
-          </a:p>
-        </p:txBody>
-      </p:sp>
-    </p:spTree>
-    <p:extLst>
-      <p:ext uri="{BB962C8B-B14F-4D97-AF65-F5344CB8AC3E}">
-        <p14:creationId xmlns:p14="http://schemas.microsoft.com/office/powerpoint/2010/main" val="2161850691"/>
-      </p:ext>
-    </p:extLst>
-  </p:cSld>
-  <p:clrMapOvr>
-    <a:masterClrMapping/>
-  </p:clrMapOvr>
-</p:sld>
-</file>
-
 <file path=ppt/slides/slide42.xml><?xml version="1.0" encoding="utf-8"?>
 <p:sld xmlns:a="http://schemas.openxmlformats.org/drawingml/2006/main" xmlns:r="http://schemas.openxmlformats.org/officeDocument/2006/relationships" xmlns:p="http://schemas.openxmlformats.org/presentationml/2006/main">
   <p:cSld>
@@ -11358,7 +11340,7 @@
           <a:p>
             <a:r>
               <a:rPr lang="en-US" dirty="0"/>
-              <a:t>Context Management Discipline</a:t>
+              <a:t>What Review Culture Looks Like From Outside</a:t>
             </a:r>
           </a:p>
         </p:txBody>
@@ -11382,49 +11364,56 @@
         <p:spPr/>
         <p:txBody>
           <a:bodyPr>
-            <a:normAutofit fontScale="87441" lnSpcReduction="20000"/>
+            <a:normAutofit fontScale="77254" lnSpcReduction="20000"/>
           </a:bodyPr>
           <a:lstStyle/>
           <a:p>
             <a:pPr marL="571500" indent="-571500"/>
             <a:r>
               <a:rPr lang="en-US" dirty="0"/>
-              <a:t>Long sessions accumulate stale, irrelevant context</a:t>
-            </a:r>
-          </a:p>
-          <a:p>
-            <a:pPr marL="571500" indent="-571500"/>
-            <a:r>
-              <a:rPr lang="en-US" dirty="0"/>
-              <a:t>Treat context like a stack: push, use, pop</a:t>
-            </a:r>
-          </a:p>
-          <a:p>
-            <a:pPr marL="571500" indent="-571500"/>
-            <a:r>
-              <a:rPr lang="en-US" dirty="0"/>
-              <a:t>Stale context causes drift from original intent</a:t>
-            </a:r>
-          </a:p>
-          <a:p>
-            <a:pPr marL="571500" indent="-571500"/>
-            <a:r>
-              <a:rPr lang="en-US" dirty="0"/>
-              <a:t>Every token in context is paid for, every turn</a:t>
-            </a:r>
-          </a:p>
-          <a:p>
-            <a:pPr marL="571500" indent="-571500"/>
-            <a:r>
-              <a:rPr lang="en-US" dirty="0"/>
-              <a:t>Clearing context cuts spend and improves quality at once</a:t>
-            </a:r>
-          </a:p>
-          <a:p>
-            <a:pPr marL="571500" indent="-571500"/>
-            <a:r>
-              <a:rPr lang="en-US" dirty="0"/>
-              <a:t>Simple habit, outsized effect on output quality</a:t>
+              <a:t>Reviewing agent output all day is genuinely draining</a:t>
+            </a:r>
+          </a:p>
+          <a:p>
+            <a:pPr marL="571500" indent="-571500"/>
+            <a:r>
+              <a:rPr lang="en-US" dirty="0"/>
+              <a:t>High-vigilance, low-authorship — the worst combination</a:t>
+            </a:r>
+          </a:p>
+          <a:p>
+            <a:pPr marL="571500" indent="-571500"/>
+            <a:r>
+              <a:rPr lang="en-US" dirty="0"/>
+              <a:t>A bad team makes you feel like QA for a machine</a:t>
+            </a:r>
+          </a:p>
+          <a:p>
+            <a:pPr lvl="1"/>
+            <a:r>
+              <a:rPr lang="en-US" dirty="0"/>
+              <a:t>Worth asking about in an interview</a:t>
+            </a:r>
+          </a:p>
+          <a:p>
+            <a:pPr marL="571500" indent="-571500"/>
+            <a:r>
+              <a:rPr lang="en-US" dirty="0"/>
+              <a:t>Burnout shows up as rubber-stamping before it shows in surveys</a:t>
+            </a:r>
+          </a:p>
+          <a:p>
+            <a:pPr marL="571500" indent="-571500"/>
+            <a:r>
+              <a:rPr lang="en-US" dirty="0"/>
+              <a:t>A healthy team protects authorship time</a:t>
+            </a:r>
+          </a:p>
+          <a:p>
+            <a:pPr marL="571500" indent="-571500"/>
+            <a:r>
+              <a:rPr lang="en-US" dirty="0"/>
+              <a:t>Team health is a guardrail too — it degrades quietly</a:t>
             </a:r>
           </a:p>
         </p:txBody>
@@ -11484,7 +11473,7 @@
           <a:p>
             <a:r>
               <a:rPr lang="en-US" dirty="0"/>
-              <a:t>Worktrees and Subagents in Practice</a:t>
+              <a:t>Context Management Discipline</a:t>
             </a:r>
           </a:p>
         </p:txBody>
@@ -11508,49 +11497,49 @@
         <p:spPr/>
         <p:txBody>
           <a:bodyPr>
-            <a:normAutofit fontScale="84754" lnSpcReduction="20000"/>
+            <a:normAutofit fontScale="87441" lnSpcReduction="20000"/>
           </a:bodyPr>
           <a:lstStyle/>
           <a:p>
             <a:pPr marL="571500" indent="-571500"/>
             <a:r>
               <a:rPr lang="en-US" dirty="0"/>
-              <a:t>Git worktrees check out multiple branches in parallel</a:t>
-            </a:r>
-          </a:p>
-          <a:p>
-            <a:pPr marL="571500" indent="-571500"/>
-            <a:r>
-              <a:rPr lang="en-US" dirty="0"/>
-              <a:t>Subagents work in their own worktree, merge back when done</a:t>
-            </a:r>
-          </a:p>
-          <a:p>
-            <a:pPr marL="571500" indent="-571500"/>
-            <a:r>
-              <a:rPr lang="en-US" dirty="0"/>
-              <a:t>One worktree per task, torn down when it merges</a:t>
-            </a:r>
-          </a:p>
-          <a:p>
-            <a:pPr marL="571500" indent="-571500"/>
-            <a:r>
-              <a:rPr lang="en-US" dirty="0"/>
-              <a:t>Shared build caches save time — watch for config drift</a:t>
-            </a:r>
-          </a:p>
-          <a:p>
-            <a:pPr marL="571500" indent="-571500"/>
-            <a:r>
-              <a:rPr lang="en-US" dirty="0"/>
-              <a:t>Automate cleanup — nobody does it manually past week two</a:t>
-            </a:r>
-          </a:p>
-          <a:p>
-            <a:pPr marL="571500" indent="-571500"/>
-            <a:r>
-              <a:rPr lang="en-US" dirty="0"/>
-              <a:t>Trunk-based isolation limits the blast radius of a bad run</a:t>
+              <a:t>Long sessions accumulate stale, irrelevant context</a:t>
+            </a:r>
+          </a:p>
+          <a:p>
+            <a:pPr marL="571500" indent="-571500"/>
+            <a:r>
+              <a:rPr lang="en-US" dirty="0"/>
+              <a:t>Treat context like a stack: push, use, pop</a:t>
+            </a:r>
+          </a:p>
+          <a:p>
+            <a:pPr marL="571500" indent="-571500"/>
+            <a:r>
+              <a:rPr lang="en-US" dirty="0"/>
+              <a:t>Stale context causes drift from original intent</a:t>
+            </a:r>
+          </a:p>
+          <a:p>
+            <a:pPr marL="571500" indent="-571500"/>
+            <a:r>
+              <a:rPr lang="en-US" dirty="0"/>
+              <a:t>Every token in context is paid for, every turn</a:t>
+            </a:r>
+          </a:p>
+          <a:p>
+            <a:pPr marL="571500" indent="-571500"/>
+            <a:r>
+              <a:rPr lang="en-US" dirty="0"/>
+              <a:t>Clearing context cuts spend and improves quality at once</a:t>
+            </a:r>
+          </a:p>
+          <a:p>
+            <a:pPr marL="571500" indent="-571500"/>
+            <a:r>
+              <a:rPr lang="en-US" dirty="0"/>
+              <a:t>Simple habit, outsized effect on output quality</a:t>
             </a:r>
           </a:p>
         </p:txBody>
@@ -11610,7 +11599,7 @@
           <a:p>
             <a:r>
               <a:rPr lang="en-US" dirty="0"/>
-              <a:t>Practical Habits: Commit Often</a:t>
+              <a:t>Worktrees and Subagents in Practice</a:t>
             </a:r>
           </a:p>
         </p:txBody>
@@ -11634,42 +11623,49 @@
         <p:spPr/>
         <p:txBody>
           <a:bodyPr>
-            <a:normAutofit fontScale="96794" lnSpcReduction="10000"/>
+            <a:normAutofit fontScale="84754" lnSpcReduction="20000"/>
           </a:bodyPr>
           <a:lstStyle/>
           <a:p>
             <a:pPr marL="571500" indent="-571500"/>
             <a:r>
               <a:rPr lang="en-US" dirty="0"/>
-              <a:t>Small, frequent commits make agent work easy to review</a:t>
-            </a:r>
-          </a:p>
-          <a:p>
-            <a:pPr marL="571500" indent="-571500"/>
-            <a:r>
-              <a:rPr lang="en-US" dirty="0"/>
-              <a:t>Each commit is a checkpoint to revert to</a:t>
-            </a:r>
-          </a:p>
-          <a:p>
-            <a:pPr marL="571500" indent="-571500"/>
-            <a:r>
-              <a:rPr lang="en-US" dirty="0"/>
-              <a:t>Frequent commits shrink the diff a reviewer holds in mind</a:t>
-            </a:r>
-          </a:p>
-          <a:p>
-            <a:pPr marL="571500" indent="-571500"/>
-            <a:r>
-              <a:rPr lang="en-US" dirty="0"/>
-              <a:t>Commit messages become the audit trail for intent</a:t>
-            </a:r>
-          </a:p>
-          <a:p>
-            <a:pPr marL="571500" indent="-571500"/>
-            <a:r>
-              <a:rPr lang="en-US" dirty="0"/>
-              <a:t>Pairs naturally with worktrees: commit per subagent step</a:t>
+              <a:t>Git worktrees check out multiple branches in parallel</a:t>
+            </a:r>
+          </a:p>
+          <a:p>
+            <a:pPr marL="571500" indent="-571500"/>
+            <a:r>
+              <a:rPr lang="en-US" dirty="0"/>
+              <a:t>Subagents work in their own worktree, merge back when done</a:t>
+            </a:r>
+          </a:p>
+          <a:p>
+            <a:pPr marL="571500" indent="-571500"/>
+            <a:r>
+              <a:rPr lang="en-US" dirty="0"/>
+              <a:t>One worktree per task, torn down when it merges</a:t>
+            </a:r>
+          </a:p>
+          <a:p>
+            <a:pPr marL="571500" indent="-571500"/>
+            <a:r>
+              <a:rPr lang="en-US" dirty="0"/>
+              <a:t>Shared build caches save time — watch for config drift</a:t>
+            </a:r>
+          </a:p>
+          <a:p>
+            <a:pPr marL="571500" indent="-571500"/>
+            <a:r>
+              <a:rPr lang="en-US" dirty="0"/>
+              <a:t>Automate cleanup — nobody does it manually past week two</a:t>
+            </a:r>
+          </a:p>
+          <a:p>
+            <a:pPr marL="571500" indent="-571500"/>
+            <a:r>
+              <a:rPr lang="en-US" dirty="0"/>
+              <a:t>Trunk-based isolation limits the blast radius of a bad run</a:t>
             </a:r>
           </a:p>
         </p:txBody>
@@ -11729,7 +11725,7 @@
           <a:p>
             <a:r>
               <a:rPr lang="en-US" dirty="0"/>
-              <a:t>Enterprise Adoption: Pilots vs. Production</a:t>
+              <a:t>Practical Habits: Commit Often</a:t>
             </a:r>
           </a:p>
         </p:txBody>
@@ -11753,49 +11749,42 @@
         <p:spPr/>
         <p:txBody>
           <a:bodyPr>
-            <a:normAutofit fontScale="92254" lnSpcReduction="10000"/>
+            <a:normAutofit fontScale="96794" lnSpcReduction="10000"/>
           </a:bodyPr>
           <a:lstStyle/>
           <a:p>
             <a:pPr marL="571500" indent="-571500"/>
             <a:r>
               <a:rPr lang="en-US" dirty="0"/>
-              <a:t>88% of agent pilots never reach production (Northflank)</a:t>
-            </a:r>
-          </a:p>
-          <a:p>
-            <a:pPr lvl="1"/>
-            <a:r>
-              <a:rPr lang="en-US" dirty="0"/>
-              <a:t>MIT’s “GenAI Divide” work puts failure even higher</a:t>
-            </a:r>
-          </a:p>
-          <a:p>
-            <a:pPr marL="571500" indent="-571500"/>
-            <a:r>
-              <a:rPr lang="en-US" dirty="0"/>
-              <a:t>Gartner expects 40%+ of agentic projects canceled by 2027</a:t>
-            </a:r>
-          </a:p>
-          <a:p>
-            <a:pPr marL="571500" indent="-571500"/>
-            <a:r>
-              <a:rPr lang="en-US" dirty="0"/>
-              <a:t>The blocker is deployment infrastructure, rarely the model</a:t>
-            </a:r>
-          </a:p>
-          <a:p>
-            <a:pPr marL="571500" indent="-571500"/>
-            <a:r>
-              <a:rPr lang="en-US" dirty="0"/>
-              <a:t>Security review of agent permissions takes months, not days</a:t>
-            </a:r>
-          </a:p>
-          <a:p>
-            <a:pPr marL="571500" indent="-571500"/>
-            <a:r>
-              <a:rPr lang="en-US" dirty="0"/>
-              <a:t>A working demo and a production system are different projects</a:t>
+              <a:t>Small, frequent commits make agent work easy to review</a:t>
+            </a:r>
+          </a:p>
+          <a:p>
+            <a:pPr marL="571500" indent="-571500"/>
+            <a:r>
+              <a:rPr lang="en-US" dirty="0"/>
+              <a:t>Each commit is a checkpoint to revert to</a:t>
+            </a:r>
+          </a:p>
+          <a:p>
+            <a:pPr marL="571500" indent="-571500"/>
+            <a:r>
+              <a:rPr lang="en-US" dirty="0"/>
+              <a:t>Frequent commits shrink the diff a reviewer holds in mind</a:t>
+            </a:r>
+          </a:p>
+          <a:p>
+            <a:pPr marL="571500" indent="-571500"/>
+            <a:r>
+              <a:rPr lang="en-US" dirty="0"/>
+              <a:t>Commit messages become the audit trail for intent</a:t>
+            </a:r>
+          </a:p>
+          <a:p>
+            <a:pPr marL="571500" indent="-571500"/>
+            <a:r>
+              <a:rPr lang="en-US" dirty="0"/>
+              <a:t>Pairs naturally with worktrees: commit per subagent step</a:t>
             </a:r>
           </a:p>
         </p:txBody>
@@ -11855,7 +11844,7 @@
           <a:p>
             <a:r>
               <a:rPr lang="en-US" dirty="0"/>
-              <a:t>Economics: Token Costs and the Enterprise Bill</a:t>
+              <a:t>Enterprise Adoption: Pilots vs. Production</a:t>
             </a:r>
           </a:p>
         </p:txBody>
@@ -11879,49 +11868,49 @@
         <p:spPr/>
         <p:txBody>
           <a:bodyPr>
-            <a:normAutofit fontScale="81784" lnSpcReduction="10000"/>
+            <a:normAutofit fontScale="92254" lnSpcReduction="10000"/>
           </a:bodyPr>
           <a:lstStyle/>
           <a:p>
             <a:pPr marL="571500" indent="-571500"/>
             <a:r>
               <a:rPr lang="en-US" dirty="0"/>
-              <a:t>Inference cost dropped roughly 280x, late 2022 to late 2024</a:t>
+              <a:t>88% of agent pilots never reach production (Northflank)</a:t>
             </a:r>
           </a:p>
           <a:p>
             <a:pPr lvl="1"/>
             <a:r>
               <a:rPr lang="en-US" dirty="0"/>
-              <a:t>Stanford AI Index / a16z; a specific drop, not a universal trend</a:t>
-            </a:r>
-          </a:p>
-          <a:p>
-            <a:pPr marL="571500" indent="-571500"/>
-            <a:r>
-              <a:rPr lang="en-US" dirty="0"/>
-              <a:t>Enterprise AI dev tool spend: low tens of billions, climbing</a:t>
-            </a:r>
-          </a:p>
-          <a:p>
-            <a:pPr marL="571500" indent="-571500"/>
-            <a:r>
-              <a:rPr lang="en-US" dirty="0"/>
-              <a:t>Usage-based bills: reportedly $500-$2,000 per engineer per month</a:t>
-            </a:r>
-          </a:p>
-          <a:p>
-            <a:pPr marL="571500" indent="-571500"/>
-            <a:r>
-              <a:rPr lang="en-US" dirty="0"/>
-              <a:t>Heaviest users generate the largest bills — often your best engineers</a:t>
-            </a:r>
-          </a:p>
-          <a:p>
-            <a:pPr marL="571500" indent="-571500"/>
-            <a:r>
-              <a:rPr lang="en-US" dirty="0"/>
-              <a:t>Cost governance is now an engineering management problem</a:t>
+              <a:t>MIT’s “GenAI Divide” work puts failure even higher</a:t>
+            </a:r>
+          </a:p>
+          <a:p>
+            <a:pPr marL="571500" indent="-571500"/>
+            <a:r>
+              <a:rPr lang="en-US" dirty="0"/>
+              <a:t>Gartner expects 40%+ of agentic projects canceled by 2027</a:t>
+            </a:r>
+          </a:p>
+          <a:p>
+            <a:pPr marL="571500" indent="-571500"/>
+            <a:r>
+              <a:rPr lang="en-US" dirty="0"/>
+              <a:t>The blocker is deployment infrastructure, rarely the model</a:t>
+            </a:r>
+          </a:p>
+          <a:p>
+            <a:pPr marL="571500" indent="-571500"/>
+            <a:r>
+              <a:rPr lang="en-US" dirty="0"/>
+              <a:t>Security review of agent permissions takes months, not days</a:t>
+            </a:r>
+          </a:p>
+          <a:p>
+            <a:pPr marL="571500" indent="-571500"/>
+            <a:r>
+              <a:rPr lang="en-US" dirty="0"/>
+              <a:t>A working demo and a production system are different projects</a:t>
             </a:r>
           </a:p>
         </p:txBody>
@@ -11981,7 +11970,7 @@
           <a:p>
             <a:r>
               <a:rPr lang="en-US" dirty="0"/>
-              <a:t>Economics: Layoffs</a:t>
+              <a:t>Economics: Token Costs and the Enterprise Bill</a:t>
             </a:r>
           </a:p>
         </p:txBody>
@@ -12005,35 +11994,49 @@
         <p:spPr/>
         <p:txBody>
           <a:bodyPr>
-            <a:normAutofit fontScale="96794"/>
+            <a:normAutofit fontScale="81784" lnSpcReduction="10000"/>
           </a:bodyPr>
           <a:lstStyle/>
           <a:p>
             <a:pPr marL="571500" indent="-571500"/>
             <a:r>
               <a:rPr lang="en-US" dirty="0"/>
-              <a:t>2026 tech layoffs have topped 150,000 (Layoffs.fyi)</a:t>
-            </a:r>
-          </a:p>
-          <a:p>
-            <a:pPr marL="571500" indent="-571500"/>
-            <a:r>
-              <a:rPr lang="en-US" dirty="0"/>
-              <a:t>~32% of managers refilled roles they cut after adopting AI</a:t>
-            </a:r>
-          </a:p>
-          <a:p>
-            <a:pPr marL="571500" indent="-571500"/>
-            <a:r>
-              <a:rPr lang="en-US" dirty="0"/>
-              <a:t>Correlation is obvious; causation is genuinely murky</a:t>
-            </a:r>
-          </a:p>
-          <a:p>
-            <a:pPr marL="571500" indent="-571500"/>
-            <a:r>
-              <a:rPr lang="en-US" dirty="0"/>
-              <a:t>My read: some cuts fund the AI bill, not just efficiency</a:t>
+              <a:t>Inference cost dropped roughly 280x, late 2022 to late 2024</a:t>
+            </a:r>
+          </a:p>
+          <a:p>
+            <a:pPr lvl="1"/>
+            <a:r>
+              <a:rPr lang="en-US" dirty="0"/>
+              <a:t>Stanford AI Index / a16z; a specific drop, not a universal trend</a:t>
+            </a:r>
+          </a:p>
+          <a:p>
+            <a:pPr marL="571500" indent="-571500"/>
+            <a:r>
+              <a:rPr lang="en-US" dirty="0"/>
+              <a:t>Enterprise AI dev tool spend: low tens of billions, climbing</a:t>
+            </a:r>
+          </a:p>
+          <a:p>
+            <a:pPr marL="571500" indent="-571500"/>
+            <a:r>
+              <a:rPr lang="en-US" dirty="0"/>
+              <a:t>Usage-based bills: reportedly $500-$2,000 per engineer per month</a:t>
+            </a:r>
+          </a:p>
+          <a:p>
+            <a:pPr marL="571500" indent="-571500"/>
+            <a:r>
+              <a:rPr lang="en-US" dirty="0"/>
+              <a:t>Heaviest users generate the largest bills — often your best engineers</a:t>
+            </a:r>
+          </a:p>
+          <a:p>
+            <a:pPr marL="571500" indent="-571500"/>
+            <a:r>
+              <a:rPr lang="en-US" dirty="0"/>
+              <a:t>Cost governance is now an engineering management problem</a:t>
             </a:r>
           </a:p>
         </p:txBody>
@@ -12093,7 +12096,7 @@
           <a:p>
             <a:r>
               <a:rPr lang="en-US" dirty="0"/>
-              <a:t>Is AI Actually Replacing Developers?</a:t>
+              <a:t>Economics: Layoffs</a:t>
             </a:r>
           </a:p>
         </p:txBody>
@@ -12117,49 +12120,35 @@
         <p:spPr/>
         <p:txBody>
           <a:bodyPr>
-            <a:normAutofit fontScale="84616" lnSpcReduction="20000"/>
+            <a:normAutofit fontScale="96794"/>
           </a:bodyPr>
           <a:lstStyle/>
           <a:p>
             <a:pPr marL="571500" indent="-571500"/>
             <a:r>
               <a:rPr lang="en-US" dirty="0"/>
-              <a:t>Oxford Economics (2024): firms aren’t replacing workers at scale</a:t>
-            </a:r>
-          </a:p>
-          <a:p>
-            <a:pPr marL="571500" indent="-571500"/>
-            <a:r>
-              <a:rPr lang="en-US" dirty="0"/>
-              <a:t>Junior developer hiring has contracted the most</a:t>
-            </a:r>
-          </a:p>
-          <a:p>
-            <a:pPr marL="571500" indent="-571500"/>
-            <a:r>
-              <a:rPr lang="en-US" dirty="0"/>
-              <a:t>Some layoffs get framed as AI without measurable AI cause</a:t>
-            </a:r>
-          </a:p>
-          <a:p>
-            <a:pPr marL="571500" indent="-571500"/>
-            <a:r>
-              <a:rPr lang="en-US" dirty="0"/>
-              <a:t>Adoption varies widely across firms</a:t>
-            </a:r>
-          </a:p>
-          <a:p>
-            <a:pPr marL="571500" indent="-571500"/>
-            <a:r>
-              <a:rPr lang="en-US" dirty="0"/>
-              <a:t>Personal note: my company hasn’t cut developers; others have</a:t>
-            </a:r>
-          </a:p>
-          <a:p>
-            <a:pPr marL="571500" indent="-571500"/>
-            <a:r>
-              <a:rPr lang="en-US" dirty="0"/>
-              <a:t>The honest answer: it depends</a:t>
+              <a:t>2026 tech layoffs have topped 150,000 (Layoffs.fyi)</a:t>
+            </a:r>
+          </a:p>
+          <a:p>
+            <a:pPr marL="571500" indent="-571500"/>
+            <a:r>
+              <a:rPr lang="en-US" dirty="0"/>
+              <a:t>~32% of managers refilled roles they cut after adopting AI</a:t>
+            </a:r>
+          </a:p>
+          <a:p>
+            <a:pPr marL="571500" indent="-571500"/>
+            <a:r>
+              <a:rPr lang="en-US" dirty="0"/>
+              <a:t>Correlation is obvious; causation is genuinely murky</a:t>
+            </a:r>
+          </a:p>
+          <a:p>
+            <a:pPr marL="571500" indent="-571500"/>
+            <a:r>
+              <a:rPr lang="en-US" dirty="0"/>
+              <a:t>My read: some cuts fund the AI bill, not just efficiency</a:t>
             </a:r>
           </a:p>
         </p:txBody>
@@ -12219,7 +12208,7 @@
           <a:p>
             <a:r>
               <a:rPr lang="en-US" dirty="0"/>
-              <a:t>Do Agents Actually Make You Faster?</a:t>
+              <a:t>Is AI Actually Replacing Developers?</a:t>
             </a:r>
           </a:p>
         </p:txBody>
@@ -12243,49 +12232,49 @@
         <p:spPr/>
         <p:txBody>
           <a:bodyPr>
-            <a:normAutofit fontScale="89203" lnSpcReduction="5398"/>
+            <a:normAutofit fontScale="84616" lnSpcReduction="20000"/>
           </a:bodyPr>
           <a:lstStyle/>
           <a:p>
             <a:pPr marL="571500" indent="-571500"/>
             <a:r>
               <a:rPr lang="en-US" dirty="0"/>
-              <a:t>METR ran an RCT with experienced developers, 2025</a:t>
-            </a:r>
-          </a:p>
-          <a:p>
-            <a:pPr marL="571500" indent="-571500"/>
-            <a:r>
-              <a:rPr lang="en-US" dirty="0"/>
-              <a:t>Developers using AI tools were about 19% slower</a:t>
-            </a:r>
-          </a:p>
-          <a:p>
-            <a:pPr lvl="1"/>
-            <a:r>
-              <a:rPr lang="en-US" dirty="0"/>
-              <a:t>While believing they were 20% faster</a:t>
-            </a:r>
-          </a:p>
-          <a:p>
-            <a:pPr marL="571500" indent="-571500"/>
-            <a:r>
-              <a:rPr lang="en-US" dirty="0"/>
-              <a:t>Felt speed and measured speed diverge sharply</a:t>
-            </a:r>
-          </a:p>
-          <a:p>
-            <a:pPr marL="571500" indent="-571500"/>
-            <a:r>
-              <a:rPr lang="en-US" dirty="0"/>
-              <a:t>Self-report is a bad measure of AI’s actual help</a:t>
-            </a:r>
-          </a:p>
-          <a:p>
-            <a:pPr marL="571500" indent="-571500"/>
-            <a:r>
-              <a:rPr lang="en-US" dirty="0"/>
-              <a:t>Ask for the data, not the vibe</a:t>
+              <a:t>Oxford Economics (2024): firms aren’t replacing workers at scale</a:t>
+            </a:r>
+          </a:p>
+          <a:p>
+            <a:pPr marL="571500" indent="-571500"/>
+            <a:r>
+              <a:rPr lang="en-US" dirty="0"/>
+              <a:t>Junior developer hiring has contracted the most</a:t>
+            </a:r>
+          </a:p>
+          <a:p>
+            <a:pPr marL="571500" indent="-571500"/>
+            <a:r>
+              <a:rPr lang="en-US" dirty="0"/>
+              <a:t>Some layoffs get framed as AI without measurable AI cause</a:t>
+            </a:r>
+          </a:p>
+          <a:p>
+            <a:pPr marL="571500" indent="-571500"/>
+            <a:r>
+              <a:rPr lang="en-US" dirty="0"/>
+              <a:t>Adoption varies widely across firms</a:t>
+            </a:r>
+          </a:p>
+          <a:p>
+            <a:pPr marL="571500" indent="-571500"/>
+            <a:r>
+              <a:rPr lang="en-US" dirty="0"/>
+              <a:t>Personal note: my company hasn’t cut developers; others have</a:t>
+            </a:r>
+          </a:p>
+          <a:p>
+            <a:pPr marL="571500" indent="-571500"/>
+            <a:r>
+              <a:rPr lang="en-US" dirty="0"/>
+              <a:t>The honest answer: it depends</a:t>
             </a:r>
           </a:p>
         </p:txBody>
@@ -12308,7 +12297,13 @@
   <p:cSld>
     <p:spTree>
       <p:nvGrpSpPr>
-        <p:cNvPr id="1" name=""/>
+        <p:cNvPr id="1" name="">
+          <a:extLst>
+            <a:ext uri="{FF2B5EF4-FFF2-40B4-BE49-F238E27FC236}">
+              <a16:creationId xmlns:a16="http://schemas.microsoft.com/office/drawing/2014/main" id="{A7967EF8-3B44-6A70-6396-1F6F12D14073}"/>
+            </a:ext>
+          </a:extLst>
+        </p:cNvPr>
         <p:cNvGrpSpPr/>
         <p:nvPr/>
       </p:nvGrpSpPr>
@@ -12325,7 +12320,7 @@
           <p:cNvPr id="5" name="Title 4">
             <a:extLst>
               <a:ext uri="{FF2B5EF4-FFF2-40B4-BE49-F238E27FC236}">
-                <a16:creationId xmlns:a16="http://schemas.microsoft.com/office/drawing/2014/main" id="{2F76A2A9-483B-FC56-BB52-1E6E204E72B2}"/>
+                <a16:creationId xmlns:a16="http://schemas.microsoft.com/office/drawing/2014/main" id="{35505AAE-A946-CD3E-F78D-1FA799DDEF52}"/>
               </a:ext>
             </a:extLst>
           </p:cNvPr>
@@ -12345,7 +12340,7 @@
           <a:p>
             <a:r>
               <a:rPr lang="en-US" dirty="0"/>
-              <a:t>What Actually Changed: Task Horizon</a:t>
+              <a:t>The Dark Factory Concept</a:t>
             </a:r>
           </a:p>
         </p:txBody>
@@ -12355,7 +12350,7 @@
           <p:cNvPr id="6" name="Text Placeholder 5">
             <a:extLst>
               <a:ext uri="{FF2B5EF4-FFF2-40B4-BE49-F238E27FC236}">
-                <a16:creationId xmlns:a16="http://schemas.microsoft.com/office/drawing/2014/main" id="{37962287-FA7C-C8FD-5531-68A2FFAD38FD}"/>
+                <a16:creationId xmlns:a16="http://schemas.microsoft.com/office/drawing/2014/main" id="{CEFC581A-ED6F-8D9F-19F3-23DF7A475040}"/>
               </a:ext>
             </a:extLst>
           </p:cNvPr>
@@ -12369,56 +12364,56 @@
         <p:spPr/>
         <p:txBody>
           <a:bodyPr>
-            <a:normAutofit fontScale="77254" lnSpcReduction="20000"/>
+            <a:normAutofit fontScale="81784" lnSpcReduction="20000"/>
           </a:bodyPr>
           <a:lstStyle/>
           <a:p>
             <a:pPr marL="571500" indent="-571500"/>
             <a:r>
               <a:rPr lang="en-US" dirty="0"/>
-              <a:t>Early models held one function in working memory</a:t>
-            </a:r>
-          </a:p>
-          <a:p>
-            <a:pPr marL="571500" indent="-571500"/>
-            <a:r>
-              <a:rPr lang="en-US" dirty="0"/>
-              <a:t>By 2026, agents sustain multi-hour, multi-file tasks</a:t>
-            </a:r>
-          </a:p>
-          <a:p>
-            <a:pPr marL="571500" indent="-571500"/>
-            <a:r>
-              <a:rPr lang="en-US" dirty="0"/>
-              <a:t>Task horizon: how long an agent stays coherent</a:t>
+              <a:t>A dark factory runs unattended, lights off, automated</a:t>
+            </a:r>
+          </a:p>
+          <a:p>
+            <a:pPr marL="571500" indent="-571500"/>
+            <a:r>
+              <a:rPr lang="en-US" dirty="0"/>
+              <a:t>Software’s version: minimal human touch, agents build and merge</a:t>
+            </a:r>
+          </a:p>
+          <a:p>
+            <a:pPr marL="571500" indent="-571500"/>
+            <a:r>
+              <a:rPr lang="en-US" dirty="0"/>
+              <a:t>Term borrowed from manufacturing’s “lights-out” floors</a:t>
             </a:r>
           </a:p>
           <a:p>
             <a:pPr lvl="1"/>
             <a:r>
               <a:rPr lang="en-US" dirty="0"/>
-              <a:t>METR tracks this publicly as “task length”</a:t>
-            </a:r>
-          </a:p>
-          <a:p>
-            <a:pPr marL="571500" indent="-571500"/>
-            <a:r>
-              <a:rPr lang="en-US" dirty="0"/>
-              <a:t>The 2021-to-2026 jump was about horizon, not raw capability</a:t>
-            </a:r>
-          </a:p>
-          <a:p>
-            <a:pPr marL="571500" indent="-571500"/>
-            <a:r>
-              <a:rPr lang="en-US" dirty="0"/>
-              <a:t>Longer horizons mean less human re-prompting per task</a:t>
-            </a:r>
-          </a:p>
-          <a:p>
-            <a:pPr marL="571500" indent="-571500"/>
-            <a:r>
-              <a:rPr lang="en-US" dirty="0"/>
-              <a:t>Horizon still degrades: long sessions drift without discipline</a:t>
+              <a:t>FANUC has run one lights-out since 2001</a:t>
+            </a:r>
+          </a:p>
+          <a:p>
+            <a:pPr marL="571500" indent="-571500"/>
+            <a:r>
+              <a:rPr lang="en-US" dirty="0"/>
+              <a:t>Why now: task horizon, falling costs, competitive pressure</a:t>
+            </a:r>
+          </a:p>
+          <a:p>
+            <a:pPr marL="571500" indent="-571500"/>
+            <a:r>
+              <a:rPr lang="en-US" dirty="0"/>
+              <a:t>Trust comes from guardrails, not blind delegation</a:t>
+            </a:r>
+          </a:p>
+          <a:p>
+            <a:pPr marL="571500" indent="-571500"/>
+            <a:r>
+              <a:rPr lang="en-US" dirty="0"/>
+              <a:t>No real factory runs fully dark — neither does software</a:t>
             </a:r>
           </a:p>
         </p:txBody>
@@ -12426,7 +12421,7 @@
     </p:spTree>
     <p:extLst>
       <p:ext uri="{BB962C8B-B14F-4D97-AF65-F5344CB8AC3E}">
-        <p14:creationId xmlns:p14="http://schemas.microsoft.com/office/powerpoint/2010/main" val="2161850691"/>
+        <p14:creationId xmlns:p14="http://schemas.microsoft.com/office/powerpoint/2010/main" val="3279335284"/>
       </p:ext>
     </p:extLst>
   </p:cSld>
@@ -12478,7 +12473,7 @@
           <a:p>
             <a:r>
               <a:rPr lang="en-US" dirty="0"/>
-              <a:t>What This Means as You Enter Industry</a:t>
+              <a:t>Do Agents Actually Make You Faster?</a:t>
             </a:r>
           </a:p>
         </p:txBody>
@@ -12502,49 +12497,49 @@
         <p:spPr/>
         <p:txBody>
           <a:bodyPr>
-            <a:normAutofit fontScale="89284"/>
+            <a:normAutofit fontScale="89203" lnSpcReduction="5398"/>
           </a:bodyPr>
           <a:lstStyle/>
           <a:p>
             <a:pPr marL="571500" indent="-571500"/>
             <a:r>
-              <a:rPr lang="en-US" sz="2800" dirty="0"/>
-              <a:t>The junior rung of the ladder is under pressure now</a:t>
-            </a:r>
-          </a:p>
-          <a:p>
-            <a:pPr marL="571500" indent="-571500"/>
-            <a:r>
-              <a:rPr lang="en-US" sz="2800" dirty="0"/>
-              <a:t>Review, debugging, and systems judgment are appreciating skills</a:t>
-            </a:r>
-          </a:p>
-          <a:p>
-            <a:pPr marL="571500" indent="-571500"/>
-            <a:r>
-              <a:rPr lang="en-US" sz="2800" dirty="0"/>
-              <a:t>Reading code fast matters more than writing it fast</a:t>
-            </a:r>
-          </a:p>
-          <a:p>
-            <a:pPr marL="571500" indent="-571500"/>
-            <a:r>
-              <a:rPr lang="en-US" sz="2800" dirty="0"/>
-              <a:t>PhD rigor — specs, validation, methodology — determines who audits agents well</a:t>
-            </a:r>
-          </a:p>
-          <a:p>
-            <a:pPr marL="571500" indent="-571500"/>
-            <a:r>
-              <a:rPr lang="en-US" sz="2800" dirty="0"/>
-              <a:t>Tool fluency is table stakes; judgment is the differentiator</a:t>
-            </a:r>
-          </a:p>
-          <a:p>
-            <a:pPr marL="571500" indent="-571500"/>
-            <a:r>
-              <a:rPr lang="en-US" sz="2800" dirty="0"/>
-              <a:t>Nobody has this fully figured out, including who’s hiring you</a:t>
+              <a:rPr lang="en-US" dirty="0"/>
+              <a:t>METR ran an RCT with experienced developers, 2025</a:t>
+            </a:r>
+          </a:p>
+          <a:p>
+            <a:pPr marL="571500" indent="-571500"/>
+            <a:r>
+              <a:rPr lang="en-US" dirty="0"/>
+              <a:t>Developers using AI tools were about 19% slower</a:t>
+            </a:r>
+          </a:p>
+          <a:p>
+            <a:pPr lvl="1"/>
+            <a:r>
+              <a:rPr lang="en-US" dirty="0"/>
+              <a:t>While believing they were 20% faster</a:t>
+            </a:r>
+          </a:p>
+          <a:p>
+            <a:pPr marL="571500" indent="-571500"/>
+            <a:r>
+              <a:rPr lang="en-US" dirty="0"/>
+              <a:t>Felt speed and measured speed diverge sharply</a:t>
+            </a:r>
+          </a:p>
+          <a:p>
+            <a:pPr marL="571500" indent="-571500"/>
+            <a:r>
+              <a:rPr lang="en-US" dirty="0"/>
+              <a:t>Self-report is a bad measure of AI’s actual help</a:t>
+            </a:r>
+          </a:p>
+          <a:p>
+            <a:pPr marL="571500" indent="-571500"/>
+            <a:r>
+              <a:rPr lang="en-US" dirty="0"/>
+              <a:t>Ask for the data, not the vibe</a:t>
             </a:r>
           </a:p>
         </p:txBody>
@@ -12604,7 +12599,7 @@
           <a:p>
             <a:r>
               <a:rPr lang="en-US" dirty="0"/>
-              <a:t>Why Human-Made Guardrails Still Matter</a:t>
+              <a:t>What This Means as You Enter Industry</a:t>
             </a:r>
           </a:p>
         </p:txBody>
@@ -12628,60 +12623,49 @@
         <p:spPr/>
         <p:txBody>
           <a:bodyPr>
-            <a:normAutofit fontScale="84330" lnSpcReduction="10000"/>
+            <a:normAutofit fontScale="89284"/>
           </a:bodyPr>
           <a:lstStyle/>
           <a:p>
             <a:pPr marL="571500" indent="-571500"/>
             <a:r>
-              <a:rPr lang="en-US" dirty="0"/>
-              <a:t>Not a self-correcting loop — potentially a self-poisoning one</a:t>
-            </a:r>
-          </a:p>
-          <a:p>
-            <a:pPr marL="571500" indent="-571500"/>
-            <a:r>
-              <a:rPr lang="en-US" dirty="0"/>
-              <a:t>Human review alone doesn’t scale to LLM output volume</a:t>
-            </a:r>
-          </a:p>
-          <a:p>
-            <a:pPr lvl="1"/>
-            <a:r>
-              <a:rPr lang="en-US" dirty="0"/>
-              <a:t>It’s also gameable: the xz backdoor, the UMN “hypocrite commits”</a:t>
-            </a:r>
-          </a:p>
-          <a:p>
-            <a:pPr marL="571500" indent="-571500"/>
-            <a:r>
-              <a:rPr lang="en-US" dirty="0"/>
-              <a:t>The fix isn’t more eyeballs — it’s more human-designed checks</a:t>
-            </a:r>
-          </a:p>
-          <a:p>
-            <a:pPr lvl="1"/>
-            <a:r>
-              <a:rPr lang="en-US" dirty="0"/>
-              <a:t>Fuzzing, mutation testing, specs written before code exists</a:t>
-            </a:r>
-          </a:p>
-          <a:p>
-            <a:pPr marL="571500" indent="-571500"/>
-            <a:r>
-              <a:rPr lang="en-US" dirty="0"/>
-              <a:t>Bad AI code trains future AI models — </a:t>
-            </a:r>
-            <a:r>
-              <a:rPr lang="en-US" i="1" dirty="0"/>
-              <a:t>model collapse</a:t>
-            </a:r>
-          </a:p>
-          <a:p>
-            <a:pPr marL="571500" indent="-571500"/>
-            <a:r>
-              <a:rPr lang="en-US" dirty="0"/>
-              <a:t>Non-negotiable: a human designs the checks, not just reviews output</a:t>
+              <a:rPr lang="en-US" sz="2800" dirty="0"/>
+              <a:t>The junior rung of the ladder is under pressure now</a:t>
+            </a:r>
+          </a:p>
+          <a:p>
+            <a:pPr marL="571500" indent="-571500"/>
+            <a:r>
+              <a:rPr lang="en-US" sz="2800" dirty="0"/>
+              <a:t>Review, debugging, and systems judgment are appreciating skills</a:t>
+            </a:r>
+          </a:p>
+          <a:p>
+            <a:pPr marL="571500" indent="-571500"/>
+            <a:r>
+              <a:rPr lang="en-US" sz="2800" dirty="0"/>
+              <a:t>Reading code fast matters more than writing it fast</a:t>
+            </a:r>
+          </a:p>
+          <a:p>
+            <a:pPr marL="571500" indent="-571500"/>
+            <a:r>
+              <a:rPr lang="en-US" sz="2800" dirty="0"/>
+              <a:t>PhD rigor — specs, validation, methodology — determines who audits agents well</a:t>
+            </a:r>
+          </a:p>
+          <a:p>
+            <a:pPr marL="571500" indent="-571500"/>
+            <a:r>
+              <a:rPr lang="en-US" sz="2800" dirty="0"/>
+              <a:t>Tool fluency is table stakes; judgment is the differentiator</a:t>
+            </a:r>
+          </a:p>
+          <a:p>
+            <a:pPr marL="571500" indent="-571500"/>
+            <a:r>
+              <a:rPr lang="en-US" sz="2800" dirty="0"/>
+              <a:t>Nobody has this fully figured out, including who’s hiring you</a:t>
             </a:r>
           </a:p>
         </p:txBody>
@@ -12741,7 +12725,7 @@
           <a:p>
             <a:r>
               <a:rPr lang="en-US" dirty="0"/>
-              <a:t>Model Collapse: The Mechanism</a:t>
+              <a:t>Why Human-Made Guardrails Still Matter</a:t>
             </a:r>
           </a:p>
         </p:txBody>
@@ -12765,49 +12749,60 @@
         <p:spPr/>
         <p:txBody>
           <a:bodyPr>
-            <a:normAutofit fontScale="92254" lnSpcReduction="10000"/>
+            <a:normAutofit fontScale="84330" lnSpcReduction="10000"/>
           </a:bodyPr>
           <a:lstStyle/>
           <a:p>
             <a:pPr marL="571500" indent="-571500"/>
             <a:r>
               <a:rPr lang="en-US" dirty="0"/>
-              <a:t>Models train on public code, increasingly AI-generated</a:t>
-            </a:r>
-          </a:p>
-          <a:p>
-            <a:pPr marL="571500" indent="-571500"/>
-            <a:r>
-              <a:rPr lang="en-US" dirty="0"/>
-              <a:t>Each generation can amplify the last one’s blind spots</a:t>
+              <a:t>Not a self-correcting loop — potentially a self-poisoning one</a:t>
+            </a:r>
+          </a:p>
+          <a:p>
+            <a:pPr marL="571500" indent="-571500"/>
+            <a:r>
+              <a:rPr lang="en-US" dirty="0"/>
+              <a:t>Human review alone doesn’t scale to LLM output volume</a:t>
             </a:r>
           </a:p>
           <a:p>
             <a:pPr lvl="1"/>
             <a:r>
               <a:rPr lang="en-US" dirty="0"/>
-              <a:t>Shumailov et al., Nature, 2024 — controlled experiments</a:t>
-            </a:r>
-          </a:p>
-          <a:p>
-            <a:pPr marL="571500" indent="-571500"/>
-            <a:r>
-              <a:rPr lang="en-US" dirty="0"/>
-              <a:t>Whether this happens at scale in real pipelines is contested</a:t>
-            </a:r>
-          </a:p>
-          <a:p>
-            <a:pPr marL="571500" indent="-571500"/>
-            <a:r>
-              <a:rPr lang="en-US" dirty="0"/>
-              <a:t>Risk either way: rare, correct patterns get sampled out</a:t>
-            </a:r>
-          </a:p>
-          <a:p>
-            <a:pPr marL="571500" indent="-571500"/>
-            <a:r>
-              <a:rPr lang="en-US" dirty="0"/>
-              <a:t>Human-reviewed code is the hedge regardless</a:t>
+              <a:t>It’s also gameable: the xz backdoor, the UMN “hypocrite commits”</a:t>
+            </a:r>
+          </a:p>
+          <a:p>
+            <a:pPr marL="571500" indent="-571500"/>
+            <a:r>
+              <a:rPr lang="en-US" dirty="0"/>
+              <a:t>The fix isn’t more eyeballs — it’s more human-designed checks</a:t>
+            </a:r>
+          </a:p>
+          <a:p>
+            <a:pPr lvl="1"/>
+            <a:r>
+              <a:rPr lang="en-US" dirty="0"/>
+              <a:t>Fuzzing, mutation testing, specs written before code exists</a:t>
+            </a:r>
+          </a:p>
+          <a:p>
+            <a:pPr marL="571500" indent="-571500"/>
+            <a:r>
+              <a:rPr lang="en-US" dirty="0"/>
+              <a:t>Bad AI code trains future AI models — </a:t>
+            </a:r>
+            <a:r>
+              <a:rPr lang="en-US" i="1" dirty="0"/>
+              <a:t>model collapse</a:t>
+            </a:r>
+          </a:p>
+          <a:p>
+            <a:pPr marL="571500" indent="-571500"/>
+            <a:r>
+              <a:rPr lang="en-US" dirty="0"/>
+              <a:t>Non-negotiable: a human designs the checks, not just reviews output</a:t>
             </a:r>
           </a:p>
         </p:txBody>
@@ -12867,7 +12862,7 @@
           <a:p>
             <a:r>
               <a:rPr lang="en-US" dirty="0"/>
-              <a:t>Risks, Limits, and What’s Next</a:t>
+              <a:t>Model Collapse: The Mechanism</a:t>
             </a:r>
           </a:p>
         </p:txBody>
@@ -12891,49 +12886,49 @@
         <p:spPr/>
         <p:txBody>
           <a:bodyPr>
-            <a:normAutofit fontScale="80658" lnSpcReduction="10000"/>
+            <a:normAutofit fontScale="92254" lnSpcReduction="10000"/>
           </a:bodyPr>
           <a:lstStyle/>
           <a:p>
             <a:pPr marL="571500" indent="-571500"/>
             <a:r>
               <a:rPr lang="en-US" dirty="0"/>
-              <a:t>Guardrails only catch what they’re written to catch</a:t>
-            </a:r>
-          </a:p>
-          <a:p>
-            <a:pPr marL="571500" indent="-571500"/>
-            <a:r>
-              <a:rPr lang="en-US" dirty="0"/>
-              <a:t>Overtrust in green checkmarks is its own failure mode</a:t>
-            </a:r>
-          </a:p>
-          <a:p>
-            <a:pPr marL="571500" indent="-571500"/>
-            <a:r>
-              <a:rPr lang="en-US" dirty="0"/>
-              <a:t>Skills drift as models and libraries update</a:t>
-            </a:r>
-          </a:p>
-          <a:p>
-            <a:pPr marL="571500" indent="-571500"/>
-            <a:r>
-              <a:rPr lang="en-US" dirty="0"/>
-              <a:t>Expect tighter planner-auditor loops, shared skill registries</a:t>
-            </a:r>
-          </a:p>
-          <a:p>
-            <a:pPr marL="571500" indent="-571500"/>
-            <a:r>
-              <a:rPr lang="en-US" dirty="0"/>
-              <a:t>Humans shift from writing code to reviewing systems</a:t>
-            </a:r>
-          </a:p>
-          <a:p>
-            <a:pPr marL="571500" indent="-571500"/>
-            <a:r>
-              <a:rPr lang="en-US" dirty="0"/>
-              <a:t>Today’s shape will keep changing</a:t>
+              <a:t>Models train on public code, increasingly AI-generated</a:t>
+            </a:r>
+          </a:p>
+          <a:p>
+            <a:pPr marL="571500" indent="-571500"/>
+            <a:r>
+              <a:rPr lang="en-US" dirty="0"/>
+              <a:t>Each generation can amplify the last one’s blind spots</a:t>
+            </a:r>
+          </a:p>
+          <a:p>
+            <a:pPr lvl="1"/>
+            <a:r>
+              <a:rPr lang="en-US" dirty="0"/>
+              <a:t>Shumailov et al., Nature, 2024 — controlled experiments</a:t>
+            </a:r>
+          </a:p>
+          <a:p>
+            <a:pPr marL="571500" indent="-571500"/>
+            <a:r>
+              <a:rPr lang="en-US" dirty="0"/>
+              <a:t>Whether this happens at scale in real pipelines is contested</a:t>
+            </a:r>
+          </a:p>
+          <a:p>
+            <a:pPr marL="571500" indent="-571500"/>
+            <a:r>
+              <a:rPr lang="en-US" dirty="0"/>
+              <a:t>Risk either way: rare, correct patterns get sampled out</a:t>
+            </a:r>
+          </a:p>
+          <a:p>
+            <a:pPr marL="571500" indent="-571500"/>
+            <a:r>
+              <a:rPr lang="en-US" dirty="0"/>
+              <a:t>Human-reviewed code is the hedge regardless</a:t>
             </a:r>
           </a:p>
         </p:txBody>
@@ -12993,7 +12988,7 @@
           <a:p>
             <a:r>
               <a:rPr lang="en-US" dirty="0"/>
-              <a:t>Discussion: Questions for the Room</a:t>
+              <a:t>Risks, Limits, and What’s Next</a:t>
             </a:r>
           </a:p>
         </p:txBody>
@@ -13017,49 +13012,49 @@
         <p:spPr/>
         <p:txBody>
           <a:bodyPr>
-            <a:normAutofit fontScale="81794" lnSpcReduction="10000"/>
+            <a:normAutofit fontScale="80658" lnSpcReduction="10000"/>
           </a:bodyPr>
           <a:lstStyle/>
           <a:p>
             <a:pPr marL="571500" indent="-571500"/>
             <a:r>
               <a:rPr lang="en-US" dirty="0"/>
-              <a:t>What would earn your trust in an agent’s PR on day one</a:t>
-            </a:r>
-          </a:p>
-          <a:p>
-            <a:pPr marL="571500" indent="-571500"/>
-            <a:r>
-              <a:rPr lang="en-US" dirty="0"/>
-              <a:t>Where would you draw the line on agent autonomy</a:t>
-            </a:r>
-          </a:p>
-          <a:p>
-            <a:pPr marL="571500" indent="-571500"/>
-            <a:r>
-              <a:rPr lang="en-US" dirty="0"/>
-              <a:t>How would you audit an agent you didn’t build</a:t>
-            </a:r>
-          </a:p>
-          <a:p>
-            <a:pPr marL="571500" indent="-571500"/>
-            <a:r>
-              <a:rPr lang="en-US" dirty="0"/>
-              <a:t>What guardrail would you want before touching production code</a:t>
-            </a:r>
-          </a:p>
-          <a:p>
-            <a:pPr marL="571500" indent="-571500"/>
-            <a:r>
-              <a:rPr lang="en-US" dirty="0"/>
-              <a:t>What do you want to know about the industry side</a:t>
-            </a:r>
-          </a:p>
-          <a:p>
-            <a:pPr marL="571500" indent="-571500"/>
-            <a:r>
-              <a:rPr lang="en-US" dirty="0"/>
-              <a:t>Open floor: bring your own questions</a:t>
+              <a:t>Guardrails only catch what they’re written to catch</a:t>
+            </a:r>
+          </a:p>
+          <a:p>
+            <a:pPr marL="571500" indent="-571500"/>
+            <a:r>
+              <a:rPr lang="en-US" dirty="0"/>
+              <a:t>Overtrust in green checkmarks is its own failure mode</a:t>
+            </a:r>
+          </a:p>
+          <a:p>
+            <a:pPr marL="571500" indent="-571500"/>
+            <a:r>
+              <a:rPr lang="en-US" dirty="0"/>
+              <a:t>Skills drift as models and libraries update</a:t>
+            </a:r>
+          </a:p>
+          <a:p>
+            <a:pPr marL="571500" indent="-571500"/>
+            <a:r>
+              <a:rPr lang="en-US" dirty="0"/>
+              <a:t>Expect tighter planner-auditor loops, shared skill registries</a:t>
+            </a:r>
+          </a:p>
+          <a:p>
+            <a:pPr marL="571500" indent="-571500"/>
+            <a:r>
+              <a:rPr lang="en-US" dirty="0"/>
+              <a:t>Humans shift from writing code to reviewing systems</a:t>
+            </a:r>
+          </a:p>
+          <a:p>
+            <a:pPr marL="571500" indent="-571500"/>
+            <a:r>
+              <a:rPr lang="en-US" dirty="0"/>
+              <a:t>Today’s shape will keep changing</a:t>
             </a:r>
           </a:p>
         </p:txBody>
@@ -13119,7 +13114,7 @@
           <a:p>
             <a:r>
               <a:rPr lang="en-US" dirty="0"/>
-              <a:t>Further Reading</a:t>
+              <a:t>Discussion: Questions for the Room</a:t>
             </a:r>
           </a:p>
         </p:txBody>
@@ -13143,91 +13138,49 @@
         <p:spPr/>
         <p:txBody>
           <a:bodyPr>
-            <a:normAutofit fontScale="59402" lnSpcReduction="20000"/>
+            <a:normAutofit fontScale="81794" lnSpcReduction="10000"/>
           </a:bodyPr>
           <a:lstStyle/>
           <a:p>
             <a:pPr marL="571500" indent="-571500"/>
             <a:r>
-              <a:rPr lang="en-US" dirty="0">
-                <a:latin typeface="Consolas"/>
-              </a:rPr>
-              <a:t>gastownhall.ai</a:t>
-            </a:r>
-            <a:r>
-              <a:rPr lang="en-US" dirty="0"/>
-              <a:t>: Gastown docs and community hub</a:t>
-            </a:r>
-          </a:p>
-          <a:p>
-            <a:pPr marL="571500" indent="-571500"/>
-            <a:r>
-              <a:rPr lang="en-US" dirty="0" err="1"/>
-              <a:t>StrongDM’s</a:t>
-            </a:r>
-            <a:r>
-              <a:rPr lang="en-US" dirty="0"/>
-              <a:t> “Software Factory” writeup (Simon Willison, Feb 2026)</a:t>
-            </a:r>
-          </a:p>
-          <a:p>
-            <a:pPr marL="571500" indent="-571500"/>
-            <a:r>
-              <a:rPr lang="en-US" dirty="0"/>
-              <a:t>OpenAI’s “Harness Engineering” post</a:t>
-            </a:r>
-          </a:p>
-          <a:p>
-            <a:pPr marL="571500" indent="-571500"/>
-            <a:r>
-              <a:rPr lang="en-US" dirty="0" err="1"/>
-              <a:t>Anthropic’s</a:t>
-            </a:r>
-            <a:r>
-              <a:rPr lang="en-US" dirty="0"/>
-              <a:t> 2026 State of AI Agents Report</a:t>
-            </a:r>
-          </a:p>
-          <a:p>
-            <a:pPr marL="571500" indent="-571500"/>
-            <a:r>
-              <a:rPr lang="en-US" dirty="0" err="1"/>
-              <a:t>Northflank’s</a:t>
-            </a:r>
-            <a:r>
-              <a:rPr lang="en-US" dirty="0"/>
-              <a:t> enterprise AI coding deployment guide</a:t>
-            </a:r>
-          </a:p>
-          <a:p>
-            <a:pPr marL="571500" indent="-571500"/>
-            <a:r>
-              <a:rPr lang="en-US" dirty="0"/>
-              <a:t>Sysdig’s JADEPUFFER/Langflow writeup (</a:t>
-            </a:r>
-            <a:r>
-              <a:rPr lang="en-US" dirty="0">
-                <a:latin typeface="Consolas"/>
-              </a:rPr>
-              <a:t>CVE-2025-3248</a:t>
-            </a:r>
-            <a:r>
-              <a:rPr lang="en-US" dirty="0"/>
-              <a:t>)</a:t>
-            </a:r>
-          </a:p>
-          <a:p>
-            <a:pPr marL="571500" indent="-571500"/>
-            <a:r>
-              <a:rPr lang="en-US" dirty="0"/>
-              <a:t>Robert Half’s 2026 AI hiring and rehiring survey</a:t>
-            </a:r>
-          </a:p>
-          <a:p>
-            <a:pPr marL="571500" indent="-571500"/>
-            <a:r>
-              <a:rPr lang="en-US" dirty="0"/>
-              <a:t>METR’s agentic coding RCT and task-horizon research</a:t>
+              <a:rPr lang="en-US" dirty="0"/>
+              <a:t>What would earn your trust in an agent’s PR on day one</a:t>
+            </a:r>
+          </a:p>
+          <a:p>
+            <a:pPr marL="571500" indent="-571500"/>
+            <a:r>
+              <a:rPr lang="en-US" dirty="0"/>
+              <a:t>Where would you draw the line on agent autonomy</a:t>
+            </a:r>
+          </a:p>
+          <a:p>
+            <a:pPr marL="571500" indent="-571500"/>
+            <a:r>
+              <a:rPr lang="en-US" dirty="0"/>
+              <a:t>How would you audit an agent you didn’t build</a:t>
+            </a:r>
+          </a:p>
+          <a:p>
+            <a:pPr marL="571500" indent="-571500"/>
+            <a:r>
+              <a:rPr lang="en-US" dirty="0"/>
+              <a:t>What guardrail would you want before touching production code</a:t>
+            </a:r>
+          </a:p>
+          <a:p>
+            <a:pPr marL="571500" indent="-571500"/>
+            <a:r>
+              <a:rPr lang="en-US" dirty="0"/>
+              <a:t>What do you want to know about the industry side</a:t>
+            </a:r>
+          </a:p>
+          <a:p>
+            <a:pPr marL="571500" indent="-571500"/>
+            <a:r>
+              <a:rPr lang="en-US" dirty="0"/>
+              <a:t>Open floor: bring your own questions</a:t>
             </a:r>
           </a:p>
         </p:txBody>
@@ -13287,7 +13240,7 @@
           <a:p>
             <a:r>
               <a:rPr lang="en-US" dirty="0"/>
-              <a:t>Summary</a:t>
+              <a:t>Further Reading</a:t>
             </a:r>
           </a:p>
         </p:txBody>
@@ -13311,56 +13264,91 @@
         <p:spPr/>
         <p:txBody>
           <a:bodyPr>
-            <a:normAutofit fontScale="64164" lnSpcReduction="20000"/>
+            <a:normAutofit fontScale="59402" lnSpcReduction="20000"/>
           </a:bodyPr>
           <a:lstStyle/>
           <a:p>
             <a:pPr marL="571500" indent="-571500"/>
             <a:r>
-              <a:rPr lang="en-US" dirty="0"/>
-              <a:t>Dark factories run on layered guardrails, not trust</a:t>
-            </a:r>
-          </a:p>
-          <a:p>
-            <a:pPr marL="571500" indent="-571500"/>
-            <a:r>
-              <a:rPr lang="en-US" dirty="0"/>
-              <a:t>SSDLC gates move left into the spec, down into CI</a:t>
-            </a:r>
-          </a:p>
-          <a:p>
-            <a:pPr marL="571500" indent="-571500"/>
-            <a:r>
-              <a:rPr lang="en-US" dirty="0"/>
-              <a:t>Orchestration is maturing faster than confidence in it</a:t>
-            </a:r>
-          </a:p>
-          <a:p>
-            <a:pPr marL="571500" indent="-571500"/>
-            <a:r>
-              <a:rPr lang="en-US" dirty="0"/>
-              <a:t>Security, permission scoping, audit trails are the hard parts</a:t>
-            </a:r>
-          </a:p>
-          <a:p>
-            <a:pPr marL="571500" indent="-571500"/>
-            <a:r>
-              <a:rPr lang="en-US" dirty="0"/>
-              <a:t>Small commits, clean context, triaged review keep teams functional</a:t>
-            </a:r>
-          </a:p>
-          <a:p>
-            <a:pPr marL="571500" indent="-571500"/>
-            <a:r>
-              <a:rPr lang="en-US" dirty="0"/>
-              <a:t>Adoption is near-universal; autonomy and trust are not</a:t>
-            </a:r>
-          </a:p>
-          <a:p>
-            <a:pPr marL="571500" indent="-571500"/>
-            <a:r>
-              <a:rPr lang="en-US" dirty="0"/>
-              <a:t>Human-designed guardrails are what keep the loop from poisoning itself</a:t>
+              <a:rPr lang="en-US" dirty="0">
+                <a:latin typeface="Consolas"/>
+              </a:rPr>
+              <a:t>gastownhall.ai</a:t>
+            </a:r>
+            <a:r>
+              <a:rPr lang="en-US" dirty="0"/>
+              <a:t>: Gastown docs and community hub</a:t>
+            </a:r>
+          </a:p>
+          <a:p>
+            <a:pPr marL="571500" indent="-571500"/>
+            <a:r>
+              <a:rPr lang="en-US" dirty="0" err="1"/>
+              <a:t>StrongDM’s</a:t>
+            </a:r>
+            <a:r>
+              <a:rPr lang="en-US" dirty="0"/>
+              <a:t> “Software Factory” writeup (Simon Willison, Feb 2026)</a:t>
+            </a:r>
+          </a:p>
+          <a:p>
+            <a:pPr marL="571500" indent="-571500"/>
+            <a:r>
+              <a:rPr lang="en-US" dirty="0"/>
+              <a:t>OpenAI’s “Harness Engineering” post</a:t>
+            </a:r>
+          </a:p>
+          <a:p>
+            <a:pPr marL="571500" indent="-571500"/>
+            <a:r>
+              <a:rPr lang="en-US" dirty="0" err="1"/>
+              <a:t>Anthropic’s</a:t>
+            </a:r>
+            <a:r>
+              <a:rPr lang="en-US" dirty="0"/>
+              <a:t> 2026 State of AI Agents Report</a:t>
+            </a:r>
+          </a:p>
+          <a:p>
+            <a:pPr marL="571500" indent="-571500"/>
+            <a:r>
+              <a:rPr lang="en-US" dirty="0" err="1"/>
+              <a:t>Northflank’s</a:t>
+            </a:r>
+            <a:r>
+              <a:rPr lang="en-US" dirty="0"/>
+              <a:t> enterprise AI coding deployment guide</a:t>
+            </a:r>
+          </a:p>
+          <a:p>
+            <a:pPr marL="571500" indent="-571500"/>
+            <a:r>
+              <a:rPr lang="en-US" dirty="0"/>
+              <a:t>Sysdig’s JADEPUFFER/Langflow writeup (</a:t>
+            </a:r>
+            <a:r>
+              <a:rPr lang="en-US" dirty="0">
+                <a:latin typeface="Consolas"/>
+              </a:rPr>
+              <a:t>CVE-2025-3248</a:t>
+            </a:r>
+            <a:r>
+              <a:rPr lang="en-US" dirty="0"/>
+              <a:t>)</a:t>
+            </a:r>
+          </a:p>
+          <a:p>
+            <a:pPr marL="571500" indent="-571500"/>
+            <a:r>
+              <a:rPr lang="en-US" dirty="0"/>
+              <a:t>Robert Half’s 2026 AI hiring and rehiring survey</a:t>
+            </a:r>
+          </a:p>
+          <a:p>
+            <a:pPr marL="571500" indent="-571500"/>
+            <a:r>
+              <a:rPr lang="en-US" dirty="0"/>
+              <a:t>METR’s agentic coding RCT and task-horizon research</a:t>
             </a:r>
           </a:p>
         </p:txBody>
@@ -13379,7 +13367,7 @@
 </file>
 
 <file path=ppt/slides/slide57.xml><?xml version="1.0" encoding="utf-8"?>
-<p:sld xmlns:a="http://schemas.openxmlformats.org/drawingml/2006/main" xmlns:p="http://schemas.openxmlformats.org/presentationml/2006/main" xmlns:r="http://schemas.openxmlformats.org/officeDocument/2006/relationships">
+<p:sld xmlns:a="http://schemas.openxmlformats.org/drawingml/2006/main" xmlns:r="http://schemas.openxmlformats.org/officeDocument/2006/relationships" xmlns:p="http://schemas.openxmlformats.org/presentationml/2006/main">
   <p:cSld>
     <p:spTree>
       <p:nvGrpSpPr>
@@ -13387,46 +13375,23 @@
         <p:cNvGrpSpPr/>
         <p:nvPr/>
       </p:nvGrpSpPr>
-      <p:grpSpPr/>
-      <p:sp>
-        <p:nvSpPr>
-          <p:cNvPr id="2" name="Text Placeholder 1"/>
-          <p:cNvSpPr>
-            <a:spLocks noGrp="1"/>
-          </p:cNvSpPr>
-          <p:nvPr>
-            <p:ph type="body" idx="11" sz="quarter"/>
-          </p:nvPr>
-        </p:nvSpPr>
-        <p:spPr/>
-        <p:txBody>
-          <a:bodyPr/>
-          <a:lstStyle/>
-          <a:p>
-            <a:r>
-              <a:t>Not a fortune teller — no crystal ball here</a:t>
-            </a:r>
-          </a:p>
-          <a:p>
-            <a:r>
-              <a:t>This talk shows what's happening now, not what's coming next</a:t>
-            </a:r>
-          </a:p>
-          <a:p>
-            <a:r>
-              <a:t>Every stat and framework is a snapshot, not a prophecy</a:t>
-            </a:r>
-          </a:p>
-          <a:p>
-            <a:r>
-              <a:t>“Why now” means as of today, not a forecast</a:t>
-            </a:r>
-          </a:p>
-        </p:txBody>
-      </p:sp>
-      <p:sp>
-        <p:nvSpPr>
-          <p:cNvPr id="3" name="Title 2"/>
+      <p:grpSpPr>
+        <a:xfrm>
+          <a:off x="0" y="0"/>
+          <a:ext cx="0" cy="0"/>
+          <a:chOff x="0" y="0"/>
+          <a:chExt cx="0" cy="0"/>
+        </a:xfrm>
+      </p:grpSpPr>
+      <p:sp>
+        <p:nvSpPr>
+          <p:cNvPr id="5" name="Title 4">
+            <a:extLst>
+              <a:ext uri="{FF2B5EF4-FFF2-40B4-BE49-F238E27FC236}">
+                <a16:creationId xmlns:a16="http://schemas.microsoft.com/office/drawing/2014/main" id="{2F76A2A9-483B-FC56-BB52-1E6E204E72B2}"/>
+              </a:ext>
+            </a:extLst>
+          </p:cNvPr>
           <p:cNvSpPr>
             <a:spLocks noGrp="1"/>
           </p:cNvSpPr>
@@ -13436,16 +13401,97 @@
         </p:nvSpPr>
         <p:spPr/>
         <p:txBody>
-          <a:bodyPr/>
-          <a:lstStyle/>
-          <a:p>
-            <a:r>
-              <a:t>No Crystal Ball</a:t>
+          <a:bodyPr>
+            <a:normAutofit/>
+          </a:bodyPr>
+          <a:lstStyle/>
+          <a:p>
+            <a:r>
+              <a:rPr lang="en-US" dirty="0"/>
+              <a:t>Summary</a:t>
+            </a:r>
+          </a:p>
+        </p:txBody>
+      </p:sp>
+      <p:sp>
+        <p:nvSpPr>
+          <p:cNvPr id="6" name="Text Placeholder 5">
+            <a:extLst>
+              <a:ext uri="{FF2B5EF4-FFF2-40B4-BE49-F238E27FC236}">
+                <a16:creationId xmlns:a16="http://schemas.microsoft.com/office/drawing/2014/main" id="{37962287-FA7C-C8FD-5531-68A2FFAD38FD}"/>
+              </a:ext>
+            </a:extLst>
+          </p:cNvPr>
+          <p:cNvSpPr>
+            <a:spLocks noGrp="1"/>
+          </p:cNvSpPr>
+          <p:nvPr>
+            <p:ph type="body" sz="quarter" idx="11"/>
+          </p:nvPr>
+        </p:nvSpPr>
+        <p:spPr/>
+        <p:txBody>
+          <a:bodyPr>
+            <a:normAutofit fontScale="64164" lnSpcReduction="20000"/>
+          </a:bodyPr>
+          <a:lstStyle/>
+          <a:p>
+            <a:pPr marL="571500" indent="-571500"/>
+            <a:r>
+              <a:rPr lang="en-US" dirty="0"/>
+              <a:t>Dark factories run on layered guardrails, not trust</a:t>
+            </a:r>
+          </a:p>
+          <a:p>
+            <a:pPr marL="571500" indent="-571500"/>
+            <a:r>
+              <a:rPr lang="en-US" dirty="0"/>
+              <a:t>SSDLC gates move left into the spec, down into CI</a:t>
+            </a:r>
+          </a:p>
+          <a:p>
+            <a:pPr marL="571500" indent="-571500"/>
+            <a:r>
+              <a:rPr lang="en-US" dirty="0"/>
+              <a:t>Orchestration is maturing faster than confidence in it</a:t>
+            </a:r>
+          </a:p>
+          <a:p>
+            <a:pPr marL="571500" indent="-571500"/>
+            <a:r>
+              <a:rPr lang="en-US" dirty="0"/>
+              <a:t>Security, permission scoping, audit trails are the hard parts</a:t>
+            </a:r>
+          </a:p>
+          <a:p>
+            <a:pPr marL="571500" indent="-571500"/>
+            <a:r>
+              <a:rPr lang="en-US" dirty="0"/>
+              <a:t>Small commits, clean context, triaged review keep teams functional</a:t>
+            </a:r>
+          </a:p>
+          <a:p>
+            <a:pPr marL="571500" indent="-571500"/>
+            <a:r>
+              <a:rPr lang="en-US" dirty="0"/>
+              <a:t>Adoption is near-universal; autonomy and trust are not</a:t>
+            </a:r>
+          </a:p>
+          <a:p>
+            <a:pPr marL="571500" indent="-571500"/>
+            <a:r>
+              <a:rPr lang="en-US" dirty="0"/>
+              <a:t>Human-designed guardrails are what keep the loop from poisoning itself</a:t>
             </a:r>
           </a:p>
         </p:txBody>
       </p:sp>
     </p:spTree>
+    <p:extLst>
+      <p:ext uri="{BB962C8B-B14F-4D97-AF65-F5344CB8AC3E}">
+        <p14:creationId xmlns:p14="http://schemas.microsoft.com/office/powerpoint/2010/main" val="2161850691"/>
+      </p:ext>
+    </p:extLst>
   </p:cSld>
   <p:clrMapOvr>
     <a:masterClrMapping/>
@@ -13495,7 +13541,7 @@
           <a:p>
             <a:r>
               <a:rPr lang="en-US" dirty="0"/>
-              <a:t>From SSDLC to Dark Factory SDLC</a:t>
+              <a:t>What Actually Changed: Task Horizon</a:t>
             </a:r>
           </a:p>
         </p:txBody>
@@ -13519,60 +13565,56 @@
         <p:spPr/>
         <p:txBody>
           <a:bodyPr>
-            <a:normAutofit fontScale="66784" lnSpcReduction="20000"/>
+            <a:normAutofit fontScale="77254" lnSpcReduction="20000"/>
           </a:bodyPr>
           <a:lstStyle/>
           <a:p>
             <a:pPr marL="571500" indent="-571500"/>
             <a:r>
               <a:rPr lang="en-US" dirty="0"/>
-              <a:t>Traditional SSDLC: human gate at every phase</a:t>
-            </a:r>
-          </a:p>
-          <a:p>
-            <a:pPr marL="571500" indent="-571500"/>
-            <a:r>
-              <a:rPr lang="en-US" dirty="0"/>
-              <a:t>Requirements, design, implement, verify, release, respond — </a:t>
-            </a:r>
-            <a:r>
-              <a:rPr lang="en-US" i="1" dirty="0"/>
-              <a:t>each gated</a:t>
-            </a:r>
-          </a:p>
-          <a:p>
-            <a:pPr marL="571500" indent="-571500"/>
-            <a:r>
-              <a:rPr lang="en-US" dirty="0"/>
-              <a:t>Dark factory version: agents own most of the gates</a:t>
-            </a:r>
-          </a:p>
-          <a:p>
-            <a:pPr marL="571500" indent="-571500"/>
-            <a:r>
-              <a:rPr lang="en-US" dirty="0"/>
-              <a:t>Design, implement, and verify compress into one continuous loop</a:t>
-            </a:r>
-          </a:p>
-          <a:p>
-            <a:pPr marL="571500" indent="-571500"/>
-            <a:r>
-              <a:rPr lang="en-US" dirty="0"/>
-              <a:t>Per-change human review and phase-based pen testing disappear</a:t>
+              <a:t>Early models held one function in working memory</a:t>
+            </a:r>
+          </a:p>
+          <a:p>
+            <a:pPr marL="571500" indent="-571500"/>
+            <a:r>
+              <a:rPr lang="en-US" dirty="0"/>
+              <a:t>By 2026, agents sustain multi-hour, multi-file tasks</a:t>
+            </a:r>
+          </a:p>
+          <a:p>
+            <a:pPr marL="571500" indent="-571500"/>
+            <a:r>
+              <a:rPr lang="en-US" dirty="0"/>
+              <a:t>Task horizon: how long an agent stays coherent</a:t>
             </a:r>
           </a:p>
           <a:p>
             <a:pPr lvl="1"/>
             <a:r>
               <a:rPr lang="en-US" dirty="0"/>
-              <a:t>Named-approver sign-off survives only for high-risk releases</a:t>
-            </a:r>
-          </a:p>
-          <a:p>
-            <a:pPr marL="571500" indent="-571500"/>
-            <a:r>
-              <a:rPr lang="en-US" dirty="0"/>
-              <a:t>New: agents receive untrusted input mid-build, with no traditional phase to handle it</a:t>
+              <a:t>METR tracks this publicly as “task length”</a:t>
+            </a:r>
+          </a:p>
+          <a:p>
+            <a:pPr marL="571500" indent="-571500"/>
+            <a:r>
+              <a:rPr lang="en-US" dirty="0"/>
+              <a:t>The 2021-to-2026 jump was about horizon, not raw capability</a:t>
+            </a:r>
+          </a:p>
+          <a:p>
+            <a:pPr marL="571500" indent="-571500"/>
+            <a:r>
+              <a:rPr lang="en-US" dirty="0"/>
+              <a:t>Longer horizons mean less human re-prompting per task</a:t>
+            </a:r>
+          </a:p>
+          <a:p>
+            <a:pPr marL="571500" indent="-571500"/>
+            <a:r>
+              <a:rPr lang="en-US" dirty="0"/>
+              <a:t>Horizon still degrades: long sessions drift without discipline</a:t>
             </a:r>
           </a:p>
         </p:txBody>
@@ -13591,6 +13633,143 @@
 </file>
 
 <file path=ppt/slides/slide7.xml><?xml version="1.0" encoding="utf-8"?>
+<p:sld xmlns:a="http://schemas.openxmlformats.org/drawingml/2006/main" xmlns:r="http://schemas.openxmlformats.org/officeDocument/2006/relationships" xmlns:p="http://schemas.openxmlformats.org/presentationml/2006/main">
+  <p:cSld>
+    <p:spTree>
+      <p:nvGrpSpPr>
+        <p:cNvPr id="1" name=""/>
+        <p:cNvGrpSpPr/>
+        <p:nvPr/>
+      </p:nvGrpSpPr>
+      <p:grpSpPr>
+        <a:xfrm>
+          <a:off x="0" y="0"/>
+          <a:ext cx="0" cy="0"/>
+          <a:chOff x="0" y="0"/>
+          <a:chExt cx="0" cy="0"/>
+        </a:xfrm>
+      </p:grpSpPr>
+      <p:sp>
+        <p:nvSpPr>
+          <p:cNvPr id="5" name="Title 4">
+            <a:extLst>
+              <a:ext uri="{FF2B5EF4-FFF2-40B4-BE49-F238E27FC236}">
+                <a16:creationId xmlns:a16="http://schemas.microsoft.com/office/drawing/2014/main" id="{2F76A2A9-483B-FC56-BB52-1E6E204E72B2}"/>
+              </a:ext>
+            </a:extLst>
+          </p:cNvPr>
+          <p:cNvSpPr>
+            <a:spLocks noGrp="1"/>
+          </p:cNvSpPr>
+          <p:nvPr>
+            <p:ph type="title"/>
+          </p:nvPr>
+        </p:nvSpPr>
+        <p:spPr/>
+        <p:txBody>
+          <a:bodyPr>
+            <a:normAutofit/>
+          </a:bodyPr>
+          <a:lstStyle/>
+          <a:p>
+            <a:r>
+              <a:rPr lang="en-US" dirty="0"/>
+              <a:t>From SSDLC to Dark Factory SDLC</a:t>
+            </a:r>
+          </a:p>
+        </p:txBody>
+      </p:sp>
+      <p:sp>
+        <p:nvSpPr>
+          <p:cNvPr id="6" name="Text Placeholder 5">
+            <a:extLst>
+              <a:ext uri="{FF2B5EF4-FFF2-40B4-BE49-F238E27FC236}">
+                <a16:creationId xmlns:a16="http://schemas.microsoft.com/office/drawing/2014/main" id="{37962287-FA7C-C8FD-5531-68A2FFAD38FD}"/>
+              </a:ext>
+            </a:extLst>
+          </p:cNvPr>
+          <p:cNvSpPr>
+            <a:spLocks noGrp="1"/>
+          </p:cNvSpPr>
+          <p:nvPr>
+            <p:ph type="body" sz="quarter" idx="11"/>
+          </p:nvPr>
+        </p:nvSpPr>
+        <p:spPr/>
+        <p:txBody>
+          <a:bodyPr>
+            <a:normAutofit fontScale="66784" lnSpcReduction="20000"/>
+          </a:bodyPr>
+          <a:lstStyle/>
+          <a:p>
+            <a:pPr marL="571500" indent="-571500"/>
+            <a:r>
+              <a:rPr lang="en-US" dirty="0"/>
+              <a:t>Traditional SSDLC: human gate at every phase</a:t>
+            </a:r>
+          </a:p>
+          <a:p>
+            <a:pPr marL="571500" indent="-571500"/>
+            <a:r>
+              <a:rPr lang="en-US" dirty="0"/>
+              <a:t>Requirements, design, implement, verify, release, respond — </a:t>
+            </a:r>
+            <a:r>
+              <a:rPr lang="en-US" i="1" dirty="0"/>
+              <a:t>each gated</a:t>
+            </a:r>
+          </a:p>
+          <a:p>
+            <a:pPr marL="571500" indent="-571500"/>
+            <a:r>
+              <a:rPr lang="en-US" dirty="0"/>
+              <a:t>Dark factory version: agents own most of the gates</a:t>
+            </a:r>
+          </a:p>
+          <a:p>
+            <a:pPr marL="571500" indent="-571500"/>
+            <a:r>
+              <a:rPr lang="en-US" dirty="0"/>
+              <a:t>Design, implement, and verify compress into one continuous loop</a:t>
+            </a:r>
+          </a:p>
+          <a:p>
+            <a:pPr marL="571500" indent="-571500"/>
+            <a:r>
+              <a:rPr lang="en-US" dirty="0"/>
+              <a:t>Per-change human review and phase-based pen testing disappear</a:t>
+            </a:r>
+          </a:p>
+          <a:p>
+            <a:pPr lvl="1"/>
+            <a:r>
+              <a:rPr lang="en-US" dirty="0"/>
+              <a:t>Named-approver sign-off survives only for high-risk releases</a:t>
+            </a:r>
+          </a:p>
+          <a:p>
+            <a:pPr marL="571500" indent="-571500"/>
+            <a:r>
+              <a:rPr lang="en-US" dirty="0"/>
+              <a:t>New: agents receive untrusted input mid-build, with no traditional phase to handle it</a:t>
+            </a:r>
+          </a:p>
+        </p:txBody>
+      </p:sp>
+    </p:spTree>
+    <p:extLst>
+      <p:ext uri="{BB962C8B-B14F-4D97-AF65-F5344CB8AC3E}">
+        <p14:creationId xmlns:p14="http://schemas.microsoft.com/office/powerpoint/2010/main" val="2161850691"/>
+      </p:ext>
+    </p:extLst>
+  </p:cSld>
+  <p:clrMapOvr>
+    <a:masterClrMapping/>
+  </p:clrMapOvr>
+</p:sld>
+</file>
+
+<file path=ppt/slides/slide8.xml><?xml version="1.0" encoding="utf-8"?>
 <p:sld xmlns:a="http://schemas.openxmlformats.org/drawingml/2006/main" xmlns:r="http://schemas.openxmlformats.org/officeDocument/2006/relationships" xmlns:p="http://schemas.openxmlformats.org/presentationml/2006/main">
   <p:cSld>
     <p:spTree>
@@ -13709,7 +13888,7 @@
 </p:sld>
 </file>
 
-<file path=ppt/slides/slide8.xml><?xml version="1.0" encoding="utf-8"?>
+<file path=ppt/slides/slide9.xml><?xml version="1.0" encoding="utf-8"?>
 <p:sld xmlns:a="http://schemas.openxmlformats.org/drawingml/2006/main" xmlns:r="http://schemas.openxmlformats.org/officeDocument/2006/relationships" xmlns:p="http://schemas.openxmlformats.org/presentationml/2006/main">
   <p:cSld>
     <p:spTree>
@@ -13809,120 +13988,6 @@
           <a:xfrm>
             <a:off x="332524" y="2376576"/>
             <a:ext cx="11512550" cy="2364184"/>
-          </a:xfrm>
-          <a:prstGeom prst="rect">
-            <a:avLst/>
-          </a:prstGeom>
-        </p:spPr>
-      </p:pic>
-    </p:spTree>
-    <p:extLst>
-      <p:ext uri="{BB962C8B-B14F-4D97-AF65-F5344CB8AC3E}">
-        <p14:creationId xmlns:p14="http://schemas.microsoft.com/office/powerpoint/2010/main" val="4024389998"/>
-      </p:ext>
-    </p:extLst>
-  </p:cSld>
-  <p:clrMapOvr>
-    <a:masterClrMapping/>
-  </p:clrMapOvr>
-</p:sld>
-</file>
-
-<file path=ppt/slides/slide9.xml><?xml version="1.0" encoding="utf-8"?>
-<p:sld xmlns:a="http://schemas.openxmlformats.org/drawingml/2006/main" xmlns:r="http://schemas.openxmlformats.org/officeDocument/2006/relationships" xmlns:p="http://schemas.openxmlformats.org/presentationml/2006/main">
-  <p:cSld>
-    <p:spTree>
-      <p:nvGrpSpPr>
-        <p:cNvPr id="1" name=""/>
-        <p:cNvGrpSpPr/>
-        <p:nvPr/>
-      </p:nvGrpSpPr>
-      <p:grpSpPr>
-        <a:xfrm>
-          <a:off x="0" y="0"/>
-          <a:ext cx="0" cy="0"/>
-          <a:chOff x="0" y="0"/>
-          <a:chExt cx="0" cy="0"/>
-        </a:xfrm>
-      </p:grpSpPr>
-      <p:sp>
-        <p:nvSpPr>
-          <p:cNvPr id="5" name="Text Placeholder 4">
-            <a:extLst>
-              <a:ext uri="{FF2B5EF4-FFF2-40B4-BE49-F238E27FC236}">
-                <a16:creationId xmlns:a16="http://schemas.microsoft.com/office/drawing/2014/main" id="{8F306AE0-C82F-CBE0-1C4F-1FE7B5B7AB4B}"/>
-              </a:ext>
-            </a:extLst>
-          </p:cNvPr>
-          <p:cNvSpPr>
-            <a:spLocks noGrp="1"/>
-          </p:cNvSpPr>
-          <p:nvPr>
-            <p:ph type="body" sz="quarter" idx="11"/>
-          </p:nvPr>
-        </p:nvSpPr>
-        <p:spPr/>
-        <p:txBody>
-          <a:bodyPr>
-            <a:normAutofit fontScale="77500" lnSpcReduction="20000"/>
-          </a:bodyPr>
-          <a:lstStyle/>
-          <a:p>
-            <a:r>
-              <a:rPr lang="en-US" dirty="0"/>
-              <a:t>Layers run in parallel: the agent hits cheap friction in seconds, humans see it last.</a:t>
-            </a:r>
-          </a:p>
-        </p:txBody>
-      </p:sp>
-      <p:sp>
-        <p:nvSpPr>
-          <p:cNvPr id="4" name="Title 3">
-            <a:extLst>
-              <a:ext uri="{FF2B5EF4-FFF2-40B4-BE49-F238E27FC236}">
-                <a16:creationId xmlns:a16="http://schemas.microsoft.com/office/drawing/2014/main" id="{B8BA588A-C7B5-ED3C-1C44-C76F7B26DB39}"/>
-              </a:ext>
-            </a:extLst>
-          </p:cNvPr>
-          <p:cNvSpPr>
-            <a:spLocks noGrp="1"/>
-          </p:cNvSpPr>
-          <p:nvPr>
-            <p:ph type="title"/>
-          </p:nvPr>
-        </p:nvSpPr>
-        <p:spPr/>
-        <p:txBody>
-          <a:bodyPr>
-            <a:normAutofit/>
-          </a:bodyPr>
-          <a:lstStyle/>
-          <a:p>
-            <a:r>
-              <a:rPr lang="en-US" dirty="0"/>
-              <a:t>Guardrails: Defense in Depth</a:t>
-            </a:r>
-          </a:p>
-        </p:txBody>
-      </p:sp>
-      <p:pic>
-        <p:nvPicPr>
-          <p:cNvPr id="7" name="Diagram" descr="A flowchart showing agent output feeding three parallel checks — types, linters, tests, each labeled with how fast it runs — that converge on a merge gate, which then feeds audit and human review downstream."/>
-          <p:cNvPicPr>
-            <a:picLocks noChangeAspect="1"/>
-          </p:cNvPicPr>
-          <p:nvPr/>
-        </p:nvPicPr>
-        <p:blipFill>
-          <a:blip r:embed="rId3"/>
-          <a:stretch>
-            <a:fillRect/>
-          </a:stretch>
-        </p:blipFill>
-        <p:spPr>
-          <a:xfrm>
-            <a:off x="793082" y="1356623"/>
-            <a:ext cx="10591433" cy="4404091"/>
           </a:xfrm>
           <a:prstGeom prst="rect">
             <a:avLst/>
